--- a/docs/W07/ViVQA-VLM_Review2_EN.pptx
+++ b/docs/W07/ViVQA-VLM_Review2_EN.pptx
@@ -122,43 +122,43 @@
   <p:extLst>
     <p:ext uri="{521415D9-36F7-43E2-AB2F-B90AF26B5E84}">
       <p14:sectionLst xmlns:p14="http://schemas.microsoft.com/office/powerpoint/2010/main">
-        <p14:section name="Opening" id="{be3aa7f7-c5ed-0907-ea0a-97f57fec2728}">
+        <p14:section name="Opening" id="{2cbd35ed-fed4-c599-5707-db5722ff4e79}">
           <p14:sldIdLst>
             <p14:sldId id="256"/>
           </p14:sldIdLst>
         </p14:section>
-        <p14:section name="Summary" id="{ecd34f39-16a6-67e6-bf72-1a67ee8113e0}">
+        <p14:section name="Summary" id="{c3bbe5e6-5cee-5282-e94f-05f3ab3f69fa}">
           <p14:sldIdLst>
             <p14:sldId id="257"/>
           </p14:sldIdLst>
         </p14:section>
-        <p14:section name="Feedback" id="{38a5f4d5-8b91-f1fc-31cd-627fffff83ad}">
+        <p14:section name="Feedback" id="{7313a6b8-004e-7112-5cc0-73c660fe100f}">
           <p14:sldIdLst>
             <p14:sldId id="258"/>
           </p14:sldIdLst>
         </p14:section>
-        <p14:section name="Data &amp; baseline" id="{9a009395-c079-8bce-6e2e-6e8a6dd29438}">
+        <p14:section name="Data &amp; baseline" id="{8d07adf7-b27c-cdd0-1542-e6f232df1110}">
           <p14:sldIdLst>
             <p14:sldId id="259"/>
             <p14:sldId id="260"/>
             <p14:sldId id="261"/>
           </p14:sldIdLst>
         </p14:section>
-        <p14:section name="Results" id="{f0390466-b24e-5922-3f6b-f8ab7a515f4e}">
+        <p14:section name="Results" id="{9e29faf6-d535-e60f-0fd2-924f652703d9}">
           <p14:sldIdLst>
             <p14:sldId id="262"/>
             <p14:sldId id="263"/>
             <p14:sldId id="264"/>
           </p14:sldIdLst>
         </p14:section>
-        <p14:section name="Improvement" id="{b2d4b6c2-2806-b1c6-cb7a-2a7890a64e0b}">
+        <p14:section name="Improvement" id="{0efb8de8-83bc-80de-24cd-e7c01cf19643}">
           <p14:sldIdLst>
             <p14:sldId id="265"/>
             <p14:sldId id="266"/>
             <p14:sldId id="267"/>
           </p14:sldIdLst>
         </p14:section>
-        <p14:section name="Analysis &amp; plan" id="{ede2893f-e1fa-a9c2-3b7c-c8a3eef94536}">
+        <p14:section name="Analysis &amp; plan" id="{e269a539-991f-7b85-443d-5807ba6ffc33}">
           <p14:sldIdLst>
             <p14:sldId id="268"/>
             <p14:sldId id="269"/>
@@ -2484,7 +2484,7 @@
           <a:p>
             <a:r>
               <a:rPr lang="en-US" dirty="0"/>
-              <a:t>Đối chiếu với các giả thuyết đã nêu ở Review 1. H1 được ủng hộ mạnh. H2 chỉ đạt một nửa: VRAM giảm nhiều nhưng độ chính xác giữ 94,5%, dưới mức 97%. H7 chưa được ủng hộ với dạng few-shot đã thử. H8 về hallucination đang chờ kết quả duyệt tay. H3 đến H6 thuộc kế hoạch W8 đến W12.</a:t>
+              <a:t>Đối chiếu với các giả thuyết đã nêu ở Review 1. H1 được ủng hộ mạnh. H2 chỉ đạt một nửa: VRAM giảm nhiều nhưng độ chính xác giữ 94,5%, dưới mức 97%. H7 chưa được ủng hộ với dạng few-shot đã thử. H8: duyệt tay 200 lỗi của B2 cho thấy chỉ khoảng 7% là hallucination thật; nhưng H8 so sánh với zero-shot, nên cần đo thêm B1 ở tuần 11 — vì vậy vẫn để Đang chờ. H3 đến H6 thuộc kế hoạch W8 đến W12.</a:t>
             </a:r>
             <a:endParaRPr lang="en-US" dirty="0"/>
           </a:p>
@@ -2572,7 +2572,7 @@
           <a:p>
             <a:r>
               <a:rPr lang="en-US" dirty="0"/>
-              <a:t>Phân loại tự động 4.988 câu B2 còn sai trên full test ViTextVQA. 9% chỉ sai dấu thanh, ví dụ thủy và thúy — đây là thách thức riêng của tiếng Việt. 17% chỉ lệch một hai ký tự, thường là đọc chữ hoặc số. Khoảng 27% sai về độ dài: thừa hoặc thiếu chữ so với gold. 47% còn lại sai về nội dung hoặc vùng ảnh, cần duyệt tay để tách hallucination; nhóm đang duyệt tay 400 mẫu.</a:t>
+              <a:t>Phân loại tự động 4.988 câu B2 còn sai trên full test ViTextVQA. 9% chỉ sai dấu thanh, ví dụ thủy và thúy — đây là thách thức riêng của tiếng Việt. 17% chỉ lệch một hai ký tự, thường là đọc chữ hoặc số. Khoảng 27% sai về độ dài: thừa hoặc thiếu chữ so với gold. 47% còn lại sai về nội dung hoặc vùng ảnh. Nhóm đã duyệt tay 200 lỗi của B2 có xem ảnh, 4 người cùng nhãn gợi ý của AI, trưởng nhóm phân xử các chỗ lệch. Kết quả: 54% câu bị EM chấm sai thực ra đúng ý — EM quá khắt khe; 12,5% do gold nhiễu; ở ViTextVQA lỗi thật chủ yếu là đọc sai chữ 28% và đọc nhầm vùng chữ 23%; hallucination thật chỉ 7%. Độ đồng thuận giữa hai người gán nhãn độc lập kappa 0,62; bỏ 42 dòng có AI hỗ trợ thì kết luận không đổi.</a:t>
             </a:r>
             <a:endParaRPr lang="en-US" dirty="0"/>
           </a:p>
@@ -8836,7 +8836,7 @@
                           <a:ea typeface="Calibri" pitchFamily="34" charset="-122"/>
                           <a:cs typeface="Calibri" pitchFamily="34" charset="-120"/>
                         </a:rPr>
-                        <a:t>Manual audit of B2 errors in progress</a:t>
+                        <a:t>Audit: 7% of B2 errors are hallucinations (CI 4–11%); B1 comparison in W11</a:t>
                       </a:r>
                       <a:endParaRPr lang="en-US" sz="1400" dirty="0">
                         <a:latin typeface="Calibri" charset="0"/>
@@ -10276,7 +10276,7 @@
                 <a:ea typeface="Calibri" pitchFamily="34" charset="-122"/>
                 <a:cs typeface="Calibri" pitchFamily="34" charset="-120"/>
               </a:rPr>
-              <a:t>Manual audit (400 samples, in progress)</a:t>
+              <a:t>Manual audit: 200 B2 errors (adjudicated)</a:t>
             </a:r>
             <a:endParaRPr lang="en-US" sz="1600" dirty="0"/>
           </a:p>
@@ -10290,8 +10290,8 @@
         </p:nvSpPr>
         <p:spPr>
           <a:xfrm>
-            <a:off x="7589520" y="2286000"/>
-            <a:ext cx="3779215" cy="3840480"/>
+            <a:off x="7589520" y="2194560"/>
+            <a:ext cx="3779215" cy="3977640"/>
           </a:xfrm>
           <a:prstGeom prst="rect">
             <a:avLst/>
@@ -10311,7 +10311,7 @@
               <a:buChar char="•"/>
             </a:pPr>
             <a:r>
-              <a:rPr lang="en-US" sz="1400" dirty="0">
+              <a:rPr lang="en-US" sz="1500" dirty="0">
                 <a:solidFill>
                   <a:schemeClr val="tx1"/>
                 </a:solidFill>
@@ -10319,9 +10319,9 @@
                 <a:ea typeface="Calibri" pitchFamily="34" charset="-122"/>
                 <a:cs typeface="Calibri" pitchFamily="34" charset="-120"/>
               </a:rPr>
-              <a:t>200 B2 errors: format, synonym, OCR, tone marks, wrong region / hallucination, code-switching, counting, noisy gold</a:t>
+              <a:t>54% are correct in meaning: EM is too strict (ViVQA 62%, ViTextVQA 46%)</a:t>
             </a:r>
-            <a:endParaRPr lang="en-US" sz="1400" dirty="0"/>
+            <a:endParaRPr lang="en-US" sz="1500" dirty="0"/>
           </a:p>
           <a:p>
             <a:pPr marL="177800" indent="-177800">
@@ -10332,7 +10332,7 @@
               <a:buChar char="•"/>
             </a:pPr>
             <a:r>
-              <a:rPr lang="en-US" sz="1400" dirty="0">
+              <a:rPr lang="en-US" sz="1500" dirty="0">
                 <a:solidFill>
                   <a:schemeClr val="tx1"/>
                 </a:solidFill>
@@ -10340,9 +10340,9 @@
                 <a:ea typeface="Calibri" pitchFamily="34" charset="-122"/>
                 <a:cs typeface="Calibri" pitchFamily="34" charset="-120"/>
               </a:rPr>
-              <a:t>200 train labels: correct / wrong / ambiguous + noise type</a:t>
+              <a:t>Noisy gold: 12.5% (ViVQA 19%)</a:t>
             </a:r>
-            <a:endParaRPr lang="en-US" sz="1400" dirty="0"/>
+            <a:endParaRPr lang="en-US" sz="1500" dirty="0"/>
           </a:p>
           <a:p>
             <a:pPr marL="177800" indent="-177800">
@@ -10353,7 +10353,7 @@
               <a:buChar char="•"/>
             </a:pPr>
             <a:r>
-              <a:rPr lang="en-US" sz="1400" dirty="0">
+              <a:rPr lang="en-US" sz="1500" dirty="0">
                 <a:solidFill>
                   <a:schemeClr val="tx1"/>
                 </a:solidFill>
@@ -10361,9 +10361,9 @@
                 <a:ea typeface="Calibri" pitchFamily="34" charset="-122"/>
                 <a:cs typeface="Calibri" pitchFamily="34" charset="-120"/>
               </a:rPr>
-              <a:t>Separates hallucination inside the 47% “other” bucket → evidence for H8</a:t>
+              <a:t>ViTextVQA real errors: OCR 28%, wrong text region 23%, tone marks 8%</a:t>
             </a:r>
-            <a:endParaRPr lang="en-US" sz="1400" dirty="0"/>
+            <a:endParaRPr lang="en-US" sz="1500" dirty="0"/>
           </a:p>
           <a:p>
             <a:pPr marL="177800" indent="-177800">
@@ -10374,7 +10374,7 @@
               <a:buChar char="•"/>
             </a:pPr>
             <a:r>
-              <a:rPr lang="en-US" sz="1400" dirty="0">
+              <a:rPr lang="en-US" sz="1500" dirty="0">
                 <a:solidFill>
                   <a:schemeClr val="tx1"/>
                 </a:solidFill>
@@ -10382,9 +10382,30 @@
                 <a:ea typeface="Calibri" pitchFamily="34" charset="-122"/>
                 <a:cs typeface="Calibri" pitchFamily="34" charset="-120"/>
               </a:rPr>
-              <a:t>Deterministic sample (seed 42), images attached</a:t>
+              <a:t>Hallucination (not in the image): 7% of errors (95% CI 4–11%)</a:t>
             </a:r>
-            <a:endParaRPr lang="en-US" sz="1400" dirty="0"/>
+            <a:endParaRPr lang="en-US" sz="1500" dirty="0"/>
+          </a:p>
+          <a:p>
+            <a:pPr marL="177800" indent="-177800">
+              <a:spcAft>
+                <a:spcPts val="600"/>
+              </a:spcAft>
+              <a:buSzPct val="100000"/>
+              <a:buChar char="•"/>
+            </a:pPr>
+            <a:r>
+              <a:rPr lang="en-US" sz="1500" dirty="0">
+                <a:solidFill>
+                  <a:schemeClr val="tx1"/>
+                </a:solidFill>
+                <a:latin typeface="Calibri" pitchFamily="34" charset="0"/>
+                <a:ea typeface="Calibri" pitchFamily="34" charset="-122"/>
+                <a:cs typeface="Calibri" pitchFamily="34" charset="-120"/>
+              </a:rPr>
+              <a:t>4 annotators + AI pre-labels; κ = 0.62 (2 independent annotators); same conclusions without the 42 AI-assisted rows</a:t>
+            </a:r>
+            <a:endParaRPr lang="en-US" sz="1500" dirty="0"/>
           </a:p>
         </p:txBody>
       </p:sp>

--- a/docs/W07/ViVQA-VLM_Review2_EN.pptx
+++ b/docs/W07/ViVQA-VLM_Review2_EN.pptx
@@ -126,36 +126,36 @@
   <p:extLst>
     <p:ext uri="{521415D9-36F7-43E2-AB2F-B90AF26B5E84}">
       <p14:sectionLst xmlns:p14="http://schemas.microsoft.com/office/powerpoint/2010/main">
-        <p14:section name="Opening" id="{be74f817-0a59-5cc1-26c3-d58731a6bab7}">
+        <p14:section name="Opening" id="{b342503a-f970-5d44-fcb4-993182da0dab}">
           <p14:sldIdLst>
             <p14:sldId id="256"/>
           </p14:sldIdLst>
         </p14:section>
-        <p14:section name="Summary" id="{f1072e48-8469-a1af-a9cd-ae718bb981f2}">
+        <p14:section name="Summary" id="{df72d96d-0612-742e-c074-5ceb6831e722}">
           <p14:sldIdLst>
             <p14:sldId id="257"/>
           </p14:sldIdLst>
         </p14:section>
-        <p14:section name="Feedback" id="{dc632f28-2f38-9856-d6a4-449dd64f875d}">
+        <p14:section name="Feedback" id="{e76d6e5c-0bd3-3019-6fd8-72b1d4eaa12b}">
           <p14:sldIdLst>
             <p14:sldId id="258"/>
           </p14:sldIdLst>
         </p14:section>
-        <p14:section name="Data &amp; baseline" id="{b1893a6e-bcad-3781-c44d-35ce3423b43f}">
+        <p14:section name="Data &amp; baseline" id="{f7298292-9659-8944-23fb-526e371fe31f}">
           <p14:sldIdLst>
             <p14:sldId id="259"/>
             <p14:sldId id="260"/>
             <p14:sldId id="261"/>
           </p14:sldIdLst>
         </p14:section>
-        <p14:section name="Results" id="{58ce38aa-1582-6556-06a6-1005b0e51aeb}">
+        <p14:section name="Results" id="{8e304242-2c0c-7cec-56ca-734564eb0854}">
           <p14:sldIdLst>
             <p14:sldId id="262"/>
             <p14:sldId id="263"/>
             <p14:sldId id="264"/>
           </p14:sldIdLst>
         </p14:section>
-        <p14:section name="Improvement" id="{d76c3b3d-21ce-df14-4b39-1fc709706fcc}">
+        <p14:section name="Improvement" id="{7f6391ee-5d80-d7e0-bf40-b060a956a865}">
           <p14:sldIdLst>
             <p14:sldId id="265"/>
             <p14:sldId id="266"/>
@@ -163,7 +163,7 @@
             <p14:sldId id="268"/>
           </p14:sldIdLst>
         </p14:section>
-        <p14:section name="OCR-aware QLoRA" id="{9e2504bd-8294-6ec2-dd3c-d502f81c1f26}">
+        <p14:section name="OCR-aware QLoRA" id="{f3dd4afb-689b-a679-4a65-a57930a9ea94}">
           <p14:sldIdLst>
             <p14:sldId id="269"/>
             <p14:sldId id="270"/>
@@ -171,7 +171,7 @@
             <p14:sldId id="272"/>
           </p14:sldIdLst>
         </p14:section>
-        <p14:section name="Analysis &amp; plan" id="{3850f793-0b9f-fcb6-965e-472057ff18a3}">
+        <p14:section name="Analysis &amp; plan" id="{56ae33bd-7bd2-d980-225b-8eb8b7b4a12a}">
           <p14:sldIdLst>
             <p14:sldId id="273"/>
             <p14:sldId id="274"/>
@@ -17788,7 +17788,7 @@
                 <a:ea typeface="Calibri" pitchFamily="34" charset="-122"/>
                 <a:cs typeface="Calibri" pitchFamily="34" charset="-120"/>
               </a:rPr>
-              <a:t>Code, configs and every run log: github.com/PLHGNAOH/ViVQA-VLM</a:t>
+              <a:t>Every number in this talk comes from a logged, reproducible run (fixed seed, config and evaluation protocol).</a:t>
             </a:r>
             <a:endParaRPr lang="en-US" sz="1800" dirty="0"/>
           </a:p>

--- a/docs/W07/ViVQA-VLM_Review2_EN.pptx
+++ b/docs/W07/ViVQA-VLM_Review2_EN.pptx
@@ -25,9 +25,10 @@
     <p:sldId id="273" r:id="rId19"/>
     <p:sldId id="274" r:id="rId20"/>
     <p:sldId id="275" r:id="rId21"/>
+    <p:sldId id="276" r:id="rId22"/>
   </p:sldIdLst>
   <p:notesMasterIdLst>
-    <p:notesMasterId r:id="rId22"/>
+    <p:notesMasterId r:id="rId23"/>
   </p:notesMasterIdLst>
   <p:sldSz cx="12192000" cy="6858000"/>
   <p:notesSz cx="6858000" cy="12192000"/>
@@ -126,56 +127,57 @@
   <p:extLst>
     <p:ext uri="{521415D9-36F7-43E2-AB2F-B90AF26B5E84}">
       <p14:sectionLst xmlns:p14="http://schemas.microsoft.com/office/powerpoint/2010/main">
-        <p14:section name="Opening" id="{b342503a-f970-5d44-fcb4-993182da0dab}">
+        <p14:section name="Opening" id="{f4d31336-1483-f772-303d-9eca77bee076}">
           <p14:sldIdLst>
             <p14:sldId id="256"/>
           </p14:sldIdLst>
         </p14:section>
-        <p14:section name="Summary" id="{df72d96d-0612-742e-c074-5ceb6831e722}">
+        <p14:section name="Summary" id="{88de5b05-74a9-e450-805c-71de4635bede}">
           <p14:sldIdLst>
             <p14:sldId id="257"/>
           </p14:sldIdLst>
         </p14:section>
-        <p14:section name="Feedback" id="{e76d6e5c-0bd3-3019-6fd8-72b1d4eaa12b}">
+        <p14:section name="Feedback" id="{2aafca7b-a07f-badc-24c2-c59c5dfd4ab8}">
           <p14:sldIdLst>
             <p14:sldId id="258"/>
           </p14:sldIdLst>
         </p14:section>
-        <p14:section name="Data &amp; baseline" id="{f7298292-9659-8944-23fb-526e371fe31f}">
+        <p14:section name="Data &amp; baseline" id="{f572b23e-f640-8719-aab9-1605c6ae8987}">
           <p14:sldIdLst>
             <p14:sldId id="259"/>
             <p14:sldId id="260"/>
             <p14:sldId id="261"/>
           </p14:sldIdLst>
         </p14:section>
-        <p14:section name="Results" id="{8e304242-2c0c-7cec-56ca-734564eb0854}">
+        <p14:section name="Results" id="{31599c63-dd53-58dd-2955-503c20920f41}">
           <p14:sldIdLst>
             <p14:sldId id="262"/>
             <p14:sldId id="263"/>
             <p14:sldId id="264"/>
           </p14:sldIdLst>
         </p14:section>
-        <p14:section name="Improvement" id="{7f6391ee-5d80-d7e0-bf40-b060a956a865}">
+        <p14:section name="Improvement" id="{e7779ccd-79f8-58d4-2213-07dc89341f94}">
           <p14:sldIdLst>
             <p14:sldId id="265"/>
             <p14:sldId id="266"/>
             <p14:sldId id="267"/>
             <p14:sldId id="268"/>
+            <p14:sldId id="269"/>
           </p14:sldIdLst>
         </p14:section>
-        <p14:section name="OCR-aware QLoRA" id="{f3dd4afb-689b-a679-4a65-a57930a9ea94}">
+        <p14:section name="OCR-aware QLoRA" id="{bff3339b-1dce-bceb-7b44-cb1dbb48a4d2}">
           <p14:sldIdLst>
-            <p14:sldId id="269"/>
             <p14:sldId id="270"/>
             <p14:sldId id="271"/>
             <p14:sldId id="272"/>
+            <p14:sldId id="273"/>
           </p14:sldIdLst>
         </p14:section>
-        <p14:section name="Analysis &amp; plan" id="{56ae33bd-7bd2-d980-225b-8eb8b7b4a12a}">
+        <p14:section name="Analysis &amp; plan" id="{db9092e6-e4e1-3f23-1c25-1e00e3161bea}">
           <p14:sldIdLst>
-            <p14:sldId id="273"/>
             <p14:sldId id="274"/>
             <p14:sldId id="275"/>
+            <p14:sldId id="276"/>
           </p14:sldIdLst>
         </p14:section>
       </p14:sectionLst>
@@ -3163,7 +3165,7 @@
           <a:p>
             <a:r>
               <a:rPr lang="en-US" dirty="0"/>
-              <a:t>Phân loại tự động 4.988 câu B2 còn sai trên full test ViTextVQA. 9% chỉ sai dấu thanh, ví dụ thủy và thúy — đây là thách thức riêng của tiếng Việt. 17% chỉ lệch một hai ký tự, thường là đọc chữ hoặc số. Khoảng 27% sai về độ dài: thừa hoặc thiếu chữ so với gold. 47% còn lại sai về nội dung hoặc vùng ảnh. Nhóm đã duyệt tay 200 lỗi của B2 có xem ảnh, 4 người cùng nhãn gợi ý của AI, trưởng nhóm phân xử các chỗ lệch. Kết quả: 54% câu bị EM chấm sai thực ra đúng ý — EM quá khắt khe; 12,5% do gold nhiễu; ở ViTextVQA lỗi thật chủ yếu là đọc sai chữ 28% và đọc nhầm vùng chữ 23%; hallucination thật chỉ 7%. Chính các lỗi đọc chữ này dẫn tới phương pháp đề xuất ở phần sau. Độ đồng thuận giữa hai người gán nhãn độc lập kappa 0,62; bỏ 42 dòng có AI hỗ trợ thì kết luận không đổi.</a:t>
+              <a:t>Đây là quy trình của SOTA. ViTextBLIP-2 giữ đóng băng một Vision Transformer, một hệ OCR là SwinTextSpotter dùng nguyên không fine-tune, và mô hình ngôn ngữ tiếng Việt ViT5; phần duy nhất được train là Q-Former khởi tạo từ BLIP-2, có nhiệm vụ trộn đặc trưng ảnh, câu hỏi và chữ OCR. Paper cũng chỉ ra sắp xếp chữ OCR từ trái-trên xuống phải-dưới giúp hầu hết các model. Nhóm khác ở ba điểm. Một: dùng một VLM đã được pretrain sẵn khả năng đọc chữ, Qwen2.5-VL-3B, lượng tử 4-bit. Hai: chỉ gắn LoRA, 0,2% tham số. Ba: B2 không dùng OCR ngoài — model tự đọc chữ từ ảnh; OCR được đưa vào ở B3, phần 06, dưới dạng một dòng văn bản trong prompt. Về đánh giá, paper báo EM và F1 nhưng không công bố cách chuẩn hoá; nhóm báo thêm ANLS và công khai hàm chuẩn hoá. Một lưu ý khi đọc paper: con số 25,48 / 53,95 nằm ở cột sắp xếp theo độ tin cậy OCR của Table 10, còn bảng ablation lại báo 24,83 / 52,51 cho model đầy đủ — paper không giải thích chênh lệch này.</a:t>
             </a:r>
             <a:endParaRPr lang="en-US" dirty="0"/>
           </a:p>
@@ -3251,7 +3253,7 @@
           <a:p>
             <a:r>
               <a:rPr lang="en-US" dirty="0"/>
-              <a:t>Từ phân tích lỗi, nhóm đề xuất B3: QLoRA nhận biết OCR. Ảnh được chạy OCR trước — PaddleOCR dò vùng chữ, VietOCR đọc chữ tiếng Việt — rồi đúng một dòng 'Văn bản đọc được trong ảnh' được chèn trước câu hỏi. Điểm mấu chốt: dòng OCR có mặt cả lúc train lẫn lúc test, nên model học khi nào tin OCR, khi nào tin ảnh. Backend OCR được chọn trên dev300 bằng luật chốt trước: PaddleOCR bản Latin làm rơi dấu tiếng Việt, ví dụ 'Kiểu Thẩm' thành 'Kiu Thm'; VietOCR giữ được đáp án trong văn bản OCR ở 37,7% câu so với 27,0%.</a:t>
+              <a:t>Phân loại tự động 4.988 câu B2 còn sai trên full test ViTextVQA. 9% chỉ sai dấu thanh, ví dụ thủy và thúy — đây là thách thức riêng của tiếng Việt. 17% chỉ lệch một hai ký tự, thường là đọc chữ hoặc số. Khoảng 27% sai về độ dài: thừa hoặc thiếu chữ so với gold. 47% còn lại sai về nội dung hoặc vùng ảnh. Nhóm đã duyệt tay 200 lỗi của B2 có xem ảnh, 4 người cùng nhãn gợi ý của AI, trưởng nhóm phân xử các chỗ lệch. Kết quả: 54% câu bị EM chấm sai thực ra đúng ý — EM quá khắt khe; 12,5% do gold nhiễu; ở ViTextVQA lỗi thật chủ yếu là đọc sai chữ 28% và đọc nhầm vùng chữ 23%; hallucination thật chỉ 7%. Chính các lỗi đọc chữ này dẫn tới phương pháp đề xuất ở phần sau. Độ đồng thuận giữa hai người gán nhãn độc lập kappa 0,62; bỏ 42 dòng có AI hỗ trợ thì kết luận không đổi. Nguồn từng con số ghi ở chân trang: lệnh tái tạo phân loại tự động và file kết quả duyệt tay trong repo.</a:t>
             </a:r>
             <a:endParaRPr lang="en-US" dirty="0"/>
           </a:p>
@@ -3339,7 +3341,7 @@
           <a:p>
             <a:r>
               <a:rPr lang="en-US" dirty="0"/>
-              <a:t>Đây là ablation bắt buộc có và không có OCR, làm thành bảng hai nhân hai trên cùng tập con và cùng 2.000 câu test. Chỉ chèn OCR lúc test cho model chưa train cùng OCR: không tăng, kể cả với zero-shot B1 và B2 ở tuần 8. Train cùng OCR mà lúc test bỏ OCR: cũng không tăng. Chỉ khi có cả hai thì EM tăng 4,35 điểm, p cỡ 10 mũ trừ 8. Tương tác là 4,9 điểm, khoảng tin cậy 3,2 đến 6,6. Vậy đóng góp không phải là thêm OCR vào prompt, mà là dạy model cách dùng OCR.</a:t>
+              <a:t>Từ phân tích lỗi, nhóm đề xuất B3: QLoRA nhận biết OCR. Ảnh được chạy OCR trước — PaddleOCR dò vùng chữ, VietOCR đọc chữ tiếng Việt — rồi đúng một dòng 'Văn bản đọc được trong ảnh' được chèn trước câu hỏi. Điểm mấu chốt: dòng OCR có mặt cả lúc train lẫn lúc test, nên model học khi nào tin OCR, khi nào tin ảnh. Backend OCR được chọn trên dev300 bằng luật chốt trước: PaddleOCR bản Latin làm rơi dấu tiếng Việt, ví dụ 'Kiểu Thẩm' thành 'Kiu Thm'; VietOCR giữ được đáp án trong văn bản OCR ở 37,7% câu so với 27,0%.</a:t>
             </a:r>
             <a:endParaRPr lang="en-US" dirty="0"/>
           </a:p>
@@ -3427,7 +3429,7 @@
           <a:p>
             <a:r>
               <a:rPr lang="en-US" dirty="0"/>
-              <a:t>Hai câu hỏi hội đồng hay đặt: một seed có phải may mắn không, và tập con có đại diện không. Ba seed huấn luyện 42, 43, 44, cùng tập con: cả ba seed B3 đều thắng B2-sub có ý nghĩa, trung bình cộng 3,57 điểm EM, độ lệch chuẩn 0,76. Trên toàn bộ 10.028 câu test, B3 thắng B2-sub 2,54 điểm, p cỡ 10 mũ trừ 14, và cao hơn ViTextBLIP-2 ở cả EM lẫn F1. Nhóm cũng đính chính: B3 dùng 23% dữ liệu vẫn thấp hơn B2 train toàn bộ 1,16 điểm; OCR bù được khoảng 69% phần mất do cắt dữ liệu. Về ANLS, mức tăng là 1,55 điểm, dưới ngưỡng 3 điểm của H6.</a:t>
+              <a:t>Đây là ablation bắt buộc có và không có OCR, làm thành bảng hai nhân hai trên cùng tập con và cùng 2.000 câu test. Chỉ chèn OCR lúc test cho model chưa train cùng OCR: không tăng, kể cả với zero-shot B1 và B2 ở tuần 8. Train cùng OCR mà lúc test bỏ OCR: cũng không tăng. Chỉ khi có cả hai thì EM tăng 4,35 điểm, p cỡ 10 mũ trừ 8. Tương tác là 4,9 điểm, khoảng tin cậy 3,2 đến 6,6. Vậy đóng góp không phải là thêm OCR vào prompt, mà là dạy model cách dùng OCR.</a:t>
             </a:r>
             <a:endParaRPr lang="en-US" dirty="0"/>
           </a:p>
@@ -3515,7 +3517,7 @@
           <a:p>
             <a:r>
               <a:rPr lang="en-US" dirty="0"/>
-              <a:t>Với ViVQA, câu hỏi là train một hay hai epoch. Val của ViVQA được tách theo câu hỏi nên 43% câu val dùng chung ảnh với train; train lâu hơn dễ nhớ ảnh và làm val đẹp giả. Vì vậy nhóm chỉ chọn epoch trên 688 câu val có ảnh chưa từng xuất hiện trong train. Lịch hai epoch sau epoch 2 hơn B2 một epoch 3,9 điểm, có ý nghĩa, nên được chọn. Chỉ khi đó mới chấm test, một lần: EM tăng từ 73,8 lên 76,6, p cỡ 10 mũ trừ 9. Kiểm tra thêm sau khi có kết quả: trên phần test sạch, ảnh và cặp hỏi đáp chưa từng thấy, mức tăng vẫn là 3,2 điểm — nên đây không phải do model nhớ ảnh. Chi phí: gấp đôi thời gian train, 6,1 giờ.</a:t>
+              <a:t>Hai câu hỏi hội đồng hay đặt: một seed có phải may mắn không, và tập con có đại diện không. Ba seed huấn luyện 42, 43, 44, cùng tập con: cả ba seed B3 đều thắng B2-sub có ý nghĩa, trung bình cộng 3,57 điểm EM, độ lệch chuẩn 0,76. Trên toàn bộ 10.028 câu test, B3 thắng B2-sub 2,54 điểm, p cỡ 10 mũ trừ 14, và cao hơn ViTextBLIP-2 ở cả EM lẫn F1. Nhóm cũng đính chính: B3 dùng 23% dữ liệu vẫn thấp hơn B2 train toàn bộ 1,16 điểm; OCR bù được khoảng 69% phần mất do cắt dữ liệu. Về ANLS, mức tăng là 1,55 điểm, dưới ngưỡng 3 điểm của H6.</a:t>
             </a:r>
             <a:endParaRPr lang="en-US" dirty="0"/>
           </a:p>
@@ -3603,7 +3605,7 @@
           <a:p>
             <a:r>
               <a:rPr lang="en-US" dirty="0"/>
-              <a:t>Đối chiếu với các giả thuyết đã nêu ở Review 1. H1 được ủng hộ mạnh. H2 chỉ đạt một nửa: VRAM giảm nhiều nhưng độ chính xác giữ 94,5%, dưới mức 97%. H7 chưa được ủng hộ với dạng few-shot đã thử. H8: duyệt tay 200 lỗi của B2 cho thấy chỉ khoảng 7% là hallucination thật; nhưng H8 so sánh với zero-shot, nên cần đo thêm B1 ở tuần 11 — vì vậy vẫn để Đang chờ. H6 chỉ ủng hộ một phần: OCR cộng hưởng mạnh với QLoRA, nhưng ANLS chỉ tăng 1,55 điểm, dưới ngưỡng 3 điểm đã đặt — nhóm báo đúng như vậy. H3 đến H5 thuộc kế hoạch tuần 10 đến 12.</a:t>
+              <a:t>Với ViVQA, câu hỏi là train một hay hai epoch. Val của ViVQA được tách theo câu hỏi nên 43% câu val dùng chung ảnh với train; train lâu hơn dễ nhớ ảnh và làm val đẹp giả. Vì vậy nhóm chỉ chọn epoch trên 688 câu val có ảnh chưa từng xuất hiện trong train. Lịch hai epoch sau epoch 2 hơn B2 một epoch 3,9 điểm, có ý nghĩa, nên được chọn. Chỉ khi đó mới chấm test, một lần: EM tăng từ 73,8 lên 76,6, p cỡ 10 mũ trừ 9. Kiểm tra thêm sau khi có kết quả: trên phần test sạch, ảnh và cặp hỏi đáp chưa từng thấy, mức tăng vẫn là 3,2 điểm — nên đây không phải do model nhớ ảnh. Chi phí: gấp đôi thời gian train, 6,1 giờ.</a:t>
             </a:r>
             <a:endParaRPr lang="en-US" dirty="0"/>
           </a:p>
@@ -3691,7 +3693,7 @@
           <a:p>
             <a:r>
               <a:rPr lang="en-US" dirty="0"/>
-              <a:t>Từ tuần 10 đến tuần 13: train QLoRA nhận biết OCR trên toàn bộ dữ liệu ViTextVQA để xem có vượt B2 không, ablation rank và module gắn LoRA, adapter dùng chung cho hai dataset, đo hallucination có hệ thống kể cả B3, rồi dựng prototype web: tải ảnh, chạy OCR, hỏi bằng tiếng Việt — cho Review 3.</a:t>
+              <a:t>Đối chiếu với các giả thuyết đã nêu ở Review 1. H1 được ủng hộ mạnh. H2 chỉ đạt một nửa: VRAM giảm nhiều nhưng độ chính xác giữ 94,5%, dưới mức 97%. H7 chưa được ủng hộ với dạng few-shot đã thử. H8: duyệt tay 200 lỗi của B2 cho thấy chỉ khoảng 7% là hallucination thật; nhưng H8 so sánh với zero-shot, nên cần đo thêm B1 ở tuần 11 — vì vậy vẫn để Đang chờ. H6 chỉ ủng hộ một phần: OCR cộng hưởng mạnh với QLoRA, nhưng ANLS chỉ tăng 1,55 điểm, dưới ngưỡng 3 điểm đã đặt — nhóm báo đúng như vậy. H3 đến H5 thuộc kế hoạch tuần 10 đến 12.</a:t>
             </a:r>
             <a:endParaRPr lang="en-US" dirty="0"/>
           </a:p>
@@ -3867,7 +3869,7 @@
           <a:p>
             <a:r>
               <a:rPr lang="en-US" dirty="0"/>
-              <a:t>Cảm ơn hội đồng đã lắng nghe. Nhóm sẵn sàng trả lời câu hỏi.</a:t>
+              <a:t>Từ tuần 10 đến tuần 13: train QLoRA nhận biết OCR trên toàn bộ dữ liệu ViTextVQA để xem có vượt B2 không, ablation rank và module gắn LoRA, adapter dùng chung cho hai dataset, đo hallucination có hệ thống kể cả B3, rồi dựng prototype web: tải ảnh, chạy OCR, hỏi bằng tiếng Việt — cho Review 3.</a:t>
             </a:r>
             <a:endParaRPr lang="en-US" dirty="0"/>
           </a:p>
@@ -3891,6 +3893,94 @@
             <a:fld id="{F7021451-1387-4CA6-816F-3879F97B5CBC}" type="slidenum">
               <a:rPr lang="en-US"/>
               <a:t>20</a:t>
+            </a:fld>
+            <a:endParaRPr lang="en-US"/>
+          </a:p>
+        </p:txBody>
+      </p:sp>
+    </p:spTree>
+    <p:extLst>
+      <p:ext uri="{BB962C8B-B14F-4D97-AF65-F5344CB8AC3E}">
+        <p14:creationId xmlns:p14="http://schemas.microsoft.com/office/powerpoint/2010/main" val="1024086991"/>
+      </p:ext>
+    </p:extLst>
+  </p:cSld>
+  <p:clrMapOvr>
+    <a:masterClrMapping/>
+  </p:clrMapOvr>
+</p:notes>
+</file>
+
+<file path=ppt/notesSlides/notesSlide21.xml><?xml version="1.0" encoding="utf-8"?>
+<p:notes xmlns:a="http://schemas.openxmlformats.org/drawingml/2006/main" xmlns:r="http://schemas.openxmlformats.org/officeDocument/2006/relationships" xmlns:p="http://schemas.openxmlformats.org/presentationml/2006/main">
+  <p:cSld>
+    <p:spTree>
+      <p:nvGrpSpPr>
+        <p:cNvPr id="1" name=""/>
+        <p:cNvGrpSpPr/>
+        <p:nvPr/>
+      </p:nvGrpSpPr>
+      <p:grpSpPr>
+        <a:xfrm>
+          <a:off x="0" y="0"/>
+          <a:ext cx="0" cy="0"/>
+          <a:chOff x="0" y="0"/>
+          <a:chExt cx="0" cy="0"/>
+        </a:xfrm>
+      </p:grpSpPr>
+      <p:sp>
+        <p:nvSpPr>
+          <p:cNvPr id="2" name="Slide Image Placeholder 1"/>
+          <p:cNvSpPr>
+            <a:spLocks noGrp="1" noRot="1" noChangeAspect="1"/>
+          </p:cNvSpPr>
+          <p:nvPr>
+            <p:ph type="sldImg"/>
+          </p:nvPr>
+        </p:nvSpPr>
+        <p:spPr/>
+      </p:sp>
+      <p:sp>
+        <p:nvSpPr>
+          <p:cNvPr id="3" name="Notes Placeholder 2"/>
+          <p:cNvSpPr>
+            <a:spLocks noGrp="1"/>
+          </p:cNvSpPr>
+          <p:nvPr>
+            <p:ph type="body" idx="1"/>
+          </p:nvPr>
+        </p:nvSpPr>
+        <p:spPr/>
+        <p:txBody>
+          <a:bodyPr/>
+          <a:lstStyle/>
+          <a:p>
+            <a:r>
+              <a:rPr lang="en-US" dirty="0"/>
+              <a:t>Cảm ơn hội đồng đã lắng nghe. Nhóm sẵn sàng trả lời câu hỏi.</a:t>
+            </a:r>
+            <a:endParaRPr lang="en-US" dirty="0"/>
+          </a:p>
+        </p:txBody>
+      </p:sp>
+      <p:sp>
+        <p:nvSpPr>
+          <p:cNvPr id="4" name="Slide Number Placeholder 3"/>
+          <p:cNvSpPr>
+            <a:spLocks noGrp="1"/>
+          </p:cNvSpPr>
+          <p:nvPr>
+            <p:ph type="sldNum" sz="quarter" idx="10"/>
+          </p:nvPr>
+        </p:nvSpPr>
+        <p:spPr/>
+        <p:txBody>
+          <a:bodyPr/>
+          <a:lstStyle/>
+          <a:p>
+            <a:fld id="{F7021451-1387-4CA6-816F-3879F97B5CBC}" type="slidenum">
+              <a:rPr lang="en-US"/>
+              <a:t>21</a:t>
             </a:fld>
             <a:endParaRPr lang="en-US"/>
           </a:p>
@@ -4131,7 +4221,7 @@
           <a:p>
             <a:r>
               <a:rPr lang="en-US" dirty="0"/>
-              <a:t>Đây là sơ đồ baseline mà thầy yêu cầu. Ảnh đi qua vision encoder 32 khối, được gộp còn 256 đến 512 token, rồi ghép với câu hỏi đưa vào decoder 36 lớp. Toàn bộ trọng số gốc đóng băng và lượng tử 4-bit. Phần duy nhất được train là LoRA ở 4 phép chiếu q, k, v, o của self-attention — ô màu cam.</a:t>
+              <a:t>Đây là sơ đồ baseline mà thầy yêu cầu. Ảnh đi qua vision encoder 32 khối, được gộp còn 256 đến 512 token, rồi ghép với câu hỏi đưa vào decoder 36 lớp. Toàn bộ trọng số gốc đóng băng và lượng tử 4-bit. Phần duy nhất được train là LoRA ở 4 phép chiếu q, k, v, o của self-attention — ô màu cam. Khung bên phải tóm tắt đầu vào và đầu ra của từng khối: ảnh được resize tối đa 401.408 điểm ảnh rồi cắt thành patch 14 nhân 14; patch merger gộp 2 nhân 2 patch thành 1 token 2048 chiều, ra 256 đến 512 token ảnh; prompt P0 ghép token ảnh với câu hỏi theo chat template; decoder sinh đáp án tham lam, tối đa 32 token. Lưu ý: baseline KHÔNG dùng OCR — OCR là phần cải tiến B3 ở phần 06.</a:t>
             </a:r>
             <a:endParaRPr lang="en-US" dirty="0"/>
           </a:p>
@@ -4219,7 +4309,7 @@
           <a:p>
             <a:r>
               <a:rPr lang="en-US" dirty="0"/>
-              <a:t>Mọi run dùng chung một giao thức: split và seed cố định, cùng prompt, cấu hình khoá trong file config, cùng hàm chuẩn hoá và metric, và log đầy đủ commit, GPU, thời gian. So sánh hai run luôn dùng kiểm định ghép cặp McNemar cho EM và bootstrap cho ANLS. Luật kết luận được chốt trước khi chạy để tránh chọn kết quả có lợi.</a:t>
+              <a:t>Mọi run dùng chung một giao thức: split và seed cố định, cùng prompt, cấu hình khoá trong file config, cùng hàm chuẩn hoá và metric, và log đầy đủ commit, GPU, thời gian. So sánh hai run luôn dùng kiểm định ghép cặp McNemar cho EM và bootstrap cho ANLS. Luật kết luận được chốt trước khi chạy để tránh chọn kết quả có lợi. Dòng chân trang giải thích các từ viết tắt.</a:t>
             </a:r>
             <a:endParaRPr lang="en-US" dirty="0"/>
           </a:p>
@@ -4483,7 +4573,7 @@
           <a:p>
             <a:r>
               <a:rPr lang="en-US" dirty="0"/>
-              <a:t>Table 7 của paper ViTextVQA có dòng QwenVL-7b đạt EM 28 trên 100 câu. Nhóm chạy Qwen2-VL-7B trong đúng điều kiện của baseline. Kết quả 7B kém 3B 12,6 điểm EM, p rất nhỏ, chậm hơn và tốn VRAM hơn. Nguyên nhân chính là 7B trả lời dài, trung bình 8,2 từ. Table 7 chỉ có 100 câu nên sai số khoảng ±9 điểm, không đủ để chọn giữa 3B và 7B. Vì vậy nhóm giữ Qwen2.5-VL-3B.</a:t>
+              <a:t>Table 7 của paper ViTextVQA có dòng QwenVL-7b đạt EM 28 trên 100 câu. Nhóm chạy Qwen2-VL-7B trong đúng điều kiện của baseline. Kết quả 7B kém 3B 12,6 điểm EM, p rất nhỏ, chậm hơn và tốn VRAM hơn. Nguyên nhân chính là 7B trả lời dài, trung bình 8,2 từ. Table 7 chỉ có 100 câu nên sai số khoảng ±9 điểm, không đủ để chọn giữa 3B và 7B. Vì vậy nhóm giữ Qwen2.5-VL-3B. Nguồn của từng model và paper ghi ở chân trang, kèm thư mục run trong repo.</a:t>
             </a:r>
             <a:endParaRPr lang="en-US" dirty="0"/>
           </a:p>
@@ -5556,7 +5646,7 @@
       </p:sp>
       <p:graphicFrame>
         <p:nvGraphicFramePr>
-          <p:cNvPr id="5" name="chart_62" descr=""/>
+          <p:cNvPr id="5" name="chart_65" descr=""/>
           <p:cNvGraphicFramePr/>
           <p:nvPr/>
         </p:nvGraphicFramePr>
@@ -5572,7 +5662,7 @@
       </p:graphicFrame>
       <p:graphicFrame>
         <p:nvGraphicFramePr>
-          <p:cNvPr id="11" name="table_63"/>
+          <p:cNvPr id="11" name="table_66"/>
           <p:cNvGraphicFramePr>
             <a:graphicFrameLocks noGrp="1"/>
           </p:cNvGraphicFramePr>
@@ -6597,7 +6687,7 @@
       </p:graphicFrame>
       <p:sp>
         <p:nvSpPr>
-          <p:cNvPr id="7" name="card_64"/>
+          <p:cNvPr id="7" name="card_67"/>
           <p:cNvSpPr/>
           <p:nvPr/>
         </p:nvSpPr>
@@ -6624,7 +6714,7 @@
       </p:sp>
       <p:sp>
         <p:nvSpPr>
-          <p:cNvPr id="8" name="text_65"/>
+          <p:cNvPr id="8" name="text_68"/>
           <p:cNvSpPr txBox="1"/>
           <p:nvPr/>
         </p:nvSpPr>
@@ -6663,7 +6753,7 @@
       </p:sp>
       <p:sp>
         <p:nvSpPr>
-          <p:cNvPr id="9" name="text_66"/>
+          <p:cNvPr id="9" name="text_69"/>
           <p:cNvSpPr txBox="1"/>
           <p:nvPr/>
         </p:nvSpPr>
@@ -6857,7 +6947,7 @@
       </p:sp>
       <p:sp>
         <p:nvSpPr>
-          <p:cNvPr id="5" name="card_67"/>
+          <p:cNvPr id="5" name="card_70"/>
           <p:cNvSpPr/>
           <p:nvPr/>
         </p:nvSpPr>
@@ -6884,7 +6974,7 @@
       </p:sp>
       <p:sp>
         <p:nvSpPr>
-          <p:cNvPr id="6" name="text_68"/>
+          <p:cNvPr id="6" name="text_71"/>
           <p:cNvSpPr txBox="1"/>
           <p:nvPr/>
         </p:nvSpPr>
@@ -6923,7 +7013,7 @@
       </p:sp>
       <p:sp>
         <p:nvSpPr>
-          <p:cNvPr id="7" name="text_69"/>
+          <p:cNvPr id="7" name="text_72"/>
           <p:cNvSpPr txBox="1"/>
           <p:nvPr/>
         </p:nvSpPr>
@@ -6993,7 +7083,7 @@
       </p:sp>
       <p:sp>
         <p:nvSpPr>
-          <p:cNvPr id="8" name="card_70"/>
+          <p:cNvPr id="8" name="card_73"/>
           <p:cNvSpPr/>
           <p:nvPr/>
         </p:nvSpPr>
@@ -7020,7 +7110,7 @@
       </p:sp>
       <p:sp>
         <p:nvSpPr>
-          <p:cNvPr id="9" name="text_71"/>
+          <p:cNvPr id="9" name="text_74"/>
           <p:cNvSpPr txBox="1"/>
           <p:nvPr/>
         </p:nvSpPr>
@@ -7059,7 +7149,7 @@
       </p:sp>
       <p:sp>
         <p:nvSpPr>
-          <p:cNvPr id="10" name="text_72"/>
+          <p:cNvPr id="10" name="text_75"/>
           <p:cNvSpPr txBox="1"/>
           <p:nvPr/>
         </p:nvSpPr>
@@ -7112,7 +7202,7 @@
       </p:sp>
       <p:sp>
         <p:nvSpPr>
-          <p:cNvPr id="11" name="card_73"/>
+          <p:cNvPr id="11" name="card_76"/>
           <p:cNvSpPr/>
           <p:nvPr/>
         </p:nvSpPr>
@@ -7139,7 +7229,7 @@
       </p:sp>
       <p:sp>
         <p:nvSpPr>
-          <p:cNvPr id="12" name="text_74"/>
+          <p:cNvPr id="12" name="text_77"/>
           <p:cNvSpPr txBox="1"/>
           <p:nvPr/>
         </p:nvSpPr>
@@ -7178,7 +7268,7 @@
       </p:sp>
       <p:graphicFrame>
         <p:nvGraphicFramePr>
-          <p:cNvPr id="13" name="chart_75" descr=""/>
+          <p:cNvPr id="13" name="chart_78" descr=""/>
           <p:cNvGraphicFramePr/>
           <p:nvPr/>
         </p:nvGraphicFramePr>
@@ -7194,7 +7284,7 @@
       </p:graphicFrame>
       <p:sp>
         <p:nvSpPr>
-          <p:cNvPr id="14" name="text_76"/>
+          <p:cNvPr id="14" name="text_79"/>
           <p:cNvSpPr txBox="1"/>
           <p:nvPr/>
         </p:nvSpPr>
@@ -7388,7 +7478,7 @@
       </p:sp>
       <p:graphicFrame>
         <p:nvGraphicFramePr>
-          <p:cNvPr id="13" name="table_77"/>
+          <p:cNvPr id="13" name="table_80"/>
           <p:cNvGraphicFramePr>
             <a:graphicFrameLocks noGrp="1"/>
           </p:cNvGraphicFramePr>
@@ -7706,7 +7796,7 @@
                           <a:ea typeface="Calibri" pitchFamily="34" charset="-122"/>
                           <a:cs typeface="Calibri" pitchFamily="34" charset="-120"/>
                         </a:rPr>
-                        <a:t>ViTextBLIP-2 · paper Table 6 (trained)</a:t>
+                        <a:t>ViTextBLIP-2 · Nguyen et al. [3], Table 6 (trained)</a:t>
                       </a:r>
                       <a:endParaRPr lang="en-US" sz="1400" dirty="0">
                         <a:latin typeface="Calibri" charset="0"/>
@@ -8492,18 +8582,18 @@
       </p:graphicFrame>
       <p:sp>
         <p:nvSpPr>
-          <p:cNvPr id="6" name="card_78"/>
+          <p:cNvPr id="6" name="card_81"/>
           <p:cNvSpPr/>
           <p:nvPr/>
         </p:nvSpPr>
         <p:spPr>
           <a:xfrm>
-            <a:off x="548640" y="3931920"/>
-            <a:ext cx="3454298" cy="1783080"/>
+            <a:off x="548640" y="3886200"/>
+            <a:ext cx="3454298" cy="1691640"/>
           </a:xfrm>
           <a:prstGeom prst="roundRect">
             <a:avLst>
-              <a:gd name="adj" fmla="val 4103"/>
+              <a:gd name="adj" fmla="val 4324"/>
             </a:avLst>
           </a:prstGeom>
           <a:solidFill>
@@ -8519,13 +8609,13 @@
       </p:sp>
       <p:sp>
         <p:nvSpPr>
-          <p:cNvPr id="7" name="text_79"/>
+          <p:cNvPr id="7" name="text_82"/>
           <p:cNvSpPr txBox="1"/>
           <p:nvPr/>
         </p:nvSpPr>
         <p:spPr>
           <a:xfrm>
-            <a:off x="777240" y="4069080"/>
+            <a:off x="777240" y="4023360"/>
             <a:ext cx="2997098" cy="411480"/>
           </a:xfrm>
           <a:prstGeom prst="rect">
@@ -8558,14 +8648,14 @@
       </p:sp>
       <p:sp>
         <p:nvSpPr>
-          <p:cNvPr id="8" name="text_80"/>
+          <p:cNvPr id="8" name="text_83"/>
           <p:cNvSpPr txBox="1"/>
           <p:nvPr/>
         </p:nvSpPr>
         <p:spPr>
           <a:xfrm>
-            <a:off x="777240" y="4526280"/>
-            <a:ext cx="2997098" cy="1051560"/>
+            <a:off x="777240" y="4480560"/>
+            <a:ext cx="2997098" cy="960120"/>
           </a:xfrm>
           <a:prstGeom prst="rect">
             <a:avLst/>
@@ -8597,18 +8687,18 @@
       </p:sp>
       <p:sp>
         <p:nvSpPr>
-          <p:cNvPr id="9" name="card_81"/>
+          <p:cNvPr id="9" name="card_84"/>
           <p:cNvSpPr/>
           <p:nvPr/>
         </p:nvSpPr>
         <p:spPr>
           <a:xfrm>
-            <a:off x="4368698" y="3931920"/>
-            <a:ext cx="3454298" cy="1783080"/>
+            <a:off x="4368698" y="3886200"/>
+            <a:ext cx="3454298" cy="1691640"/>
           </a:xfrm>
           <a:prstGeom prst="roundRect">
             <a:avLst>
-              <a:gd name="adj" fmla="val 4103"/>
+              <a:gd name="adj" fmla="val 4324"/>
             </a:avLst>
           </a:prstGeom>
           <a:solidFill>
@@ -8624,13 +8714,13 @@
       </p:sp>
       <p:sp>
         <p:nvSpPr>
-          <p:cNvPr id="10" name="text_82"/>
+          <p:cNvPr id="10" name="text_85"/>
           <p:cNvSpPr txBox="1"/>
           <p:nvPr/>
         </p:nvSpPr>
         <p:spPr>
           <a:xfrm>
-            <a:off x="4597298" y="4069080"/>
+            <a:off x="4597298" y="4023360"/>
             <a:ext cx="2997098" cy="411480"/>
           </a:xfrm>
           <a:prstGeom prst="rect">
@@ -8663,14 +8753,14 @@
       </p:sp>
       <p:sp>
         <p:nvSpPr>
-          <p:cNvPr id="11" name="text_83"/>
+          <p:cNvPr id="11" name="text_86"/>
           <p:cNvSpPr txBox="1"/>
           <p:nvPr/>
         </p:nvSpPr>
         <p:spPr>
           <a:xfrm>
-            <a:off x="4597298" y="4526280"/>
-            <a:ext cx="2997098" cy="1051560"/>
+            <a:off x="4597298" y="4480560"/>
+            <a:ext cx="2997098" cy="960120"/>
           </a:xfrm>
           <a:prstGeom prst="rect">
             <a:avLst/>
@@ -8702,18 +8792,18 @@
       </p:sp>
       <p:sp>
         <p:nvSpPr>
-          <p:cNvPr id="12" name="card_84"/>
+          <p:cNvPr id="12" name="card_87"/>
           <p:cNvSpPr/>
           <p:nvPr/>
         </p:nvSpPr>
         <p:spPr>
           <a:xfrm>
-            <a:off x="8188757" y="3931920"/>
-            <a:ext cx="3454298" cy="1783080"/>
+            <a:off x="8188757" y="3886200"/>
+            <a:ext cx="3454298" cy="1691640"/>
           </a:xfrm>
           <a:prstGeom prst="roundRect">
             <a:avLst>
-              <a:gd name="adj" fmla="val 4103"/>
+              <a:gd name="adj" fmla="val 4324"/>
             </a:avLst>
           </a:prstGeom>
           <a:solidFill>
@@ -8729,13 +8819,13 @@
       </p:sp>
       <p:sp>
         <p:nvSpPr>
-          <p:cNvPr id="13" name="text_85"/>
+          <p:cNvPr id="13" name="text_88"/>
           <p:cNvSpPr txBox="1"/>
           <p:nvPr/>
         </p:nvSpPr>
         <p:spPr>
           <a:xfrm>
-            <a:off x="8417357" y="4069080"/>
+            <a:off x="8417357" y="4023360"/>
             <a:ext cx="2997098" cy="411480"/>
           </a:xfrm>
           <a:prstGeom prst="rect">
@@ -8768,14 +8858,14 @@
       </p:sp>
       <p:sp>
         <p:nvSpPr>
-          <p:cNvPr id="14" name="text_86"/>
+          <p:cNvPr id="14" name="text_89"/>
           <p:cNvSpPr txBox="1"/>
           <p:nvPr/>
         </p:nvSpPr>
         <p:spPr>
           <a:xfrm>
-            <a:off x="8417357" y="4526280"/>
-            <a:ext cx="2997098" cy="1051560"/>
+            <a:off x="8417357" y="4480560"/>
+            <a:ext cx="2997098" cy="960120"/>
           </a:xfrm>
           <a:prstGeom prst="rect">
             <a:avLst/>
@@ -8802,6 +8892,45 @@
               <a:t>The paper does not publish its answer normalization; the comparison assumes equivalent scoring.</a:t>
             </a:r>
             <a:endParaRPr lang="en-US" sz="1400" dirty="0"/>
+          </a:p>
+        </p:txBody>
+      </p:sp>
+      <p:sp>
+        <p:nvSpPr>
+          <p:cNvPr id="15" name="text_90"/>
+          <p:cNvSpPr txBox="1"/>
+          <p:nvPr/>
+        </p:nvSpPr>
+        <p:spPr>
+          <a:xfrm>
+            <a:off x="548640" y="5760720"/>
+            <a:ext cx="11094415" cy="457200"/>
+          </a:xfrm>
+          <a:prstGeom prst="rect">
+            <a:avLst/>
+          </a:prstGeom>
+          <a:noFill/>
+          <a:ln/>
+        </p:spPr>
+        <p:txBody>
+          <a:bodyPr wrap="square" lIns="0" tIns="0" rIns="0" bIns="0" rtlCol="0" anchor="b"/>
+          <a:lstStyle/>
+          <a:p>
+            <a:pPr indent="0" marL="0">
+              <a:buNone/>
+            </a:pPr>
+            <a:r>
+              <a:rPr lang="en-US" sz="1000" dirty="0">
+                <a:solidFill>
+                  <a:schemeClr val="accent3"/>
+                </a:solidFill>
+                <a:latin typeface="Calibri" pitchFamily="34" charset="0"/>
+                <a:ea typeface="Calibri" pitchFamily="34" charset="-122"/>
+                <a:cs typeface="Calibri" pitchFamily="34" charset="-120"/>
+              </a:rPr>
+              <a:t>[3] Nguyen et al., ViTextVQA, arXiv:2404.10652, 2024. CI95 = paired bootstrap, 10,000 resamples, seed 42. Our numbers: experiments/W07_B1_zeroshot_…_testfull, W07_B2_eval_…_testfull, W07_fulltest_summary_L4_seed42.</a:t>
+            </a:r>
+            <a:endParaRPr lang="en-US" sz="1000" dirty="0"/>
           </a:p>
         </p:txBody>
       </p:sp>
@@ -8913,6 +9042,2022 @@
                 <a:ea typeface="Calibri" pitchFamily="34" charset="-122"/>
                 <a:cs typeface="Calibri" pitchFamily="34" charset="-120"/>
               </a:rPr>
+              <a:t>PART 05 · SOTA APPROACH VS OURS</a:t>
+            </a:r>
+            <a:endParaRPr lang="en-US" sz="1100" dirty="0"/>
+          </a:p>
+        </p:txBody>
+      </p:sp>
+      <p:sp>
+        <p:nvSpPr>
+          <p:cNvPr id="3" name="Text 0"/>
+          <p:cNvSpPr/>
+          <p:nvPr>
+            <p:ph idx="101" type="title" hasCustomPrompt="1"/>
+          </p:nvPr>
+        </p:nvSpPr>
+        <p:spPr>
+          <a:xfrm>
+            <a:off x="548640" y="566928"/>
+            <a:ext cx="11094415" cy="640080"/>
+          </a:xfrm>
+          <a:prstGeom prst="rect">
+            <a:avLst/>
+          </a:prstGeom>
+          <a:noFill/>
+          <a:ln/>
+        </p:spPr>
+        <p:txBody>
+          <a:bodyPr wrap="square" lIns="0" tIns="0" rIns="0" bIns="0" rtlCol="0" anchor="t"/>
+          <a:lstStyle/>
+          <a:p>
+            <a:pPr algn="l" indent="0" marL="0">
+              <a:buNone/>
+            </a:pPr>
+            <a:r>
+              <a:rPr lang="en-US" sz="3200" b="1" dirty="0">
+                <a:solidFill>
+                  <a:schemeClr val="tx2"/>
+                </a:solidFill>
+                <a:latin typeface="Cambria" pitchFamily="34" charset="0"/>
+                <a:ea typeface="Cambria" pitchFamily="34" charset="-122"/>
+                <a:cs typeface="Cambria" pitchFamily="34" charset="-120"/>
+              </a:rPr>
+              <a:t>How ViTextBLIP-2 works — and how we differ</a:t>
+            </a:r>
+            <a:endParaRPr lang="en-US" sz="3200" dirty="0"/>
+          </a:p>
+        </p:txBody>
+      </p:sp>
+      <p:graphicFrame>
+        <p:nvGraphicFramePr>
+          <p:cNvPr id="14" name="table_91"/>
+          <p:cNvGraphicFramePr>
+            <a:graphicFrameLocks noGrp="1"/>
+          </p:cNvGraphicFramePr>
+          <p:nvPr>
+            <p:extLst>
+              <p:ext uri="{D42A27DB-BD31-4B8C-83A1-F6EECF244321}">
+                <p14:modId xmlns:p14="http://schemas.microsoft.com/office/powerpoint/2010/main" val="1579011935"/>
+              </p:ext>
+            </p:extLst>
+          </p:nvPr>
+        </p:nvGraphicFramePr>
+        <p:xfrm>
+          <a:off x="548640" y="1325880"/>
+          <a:ext cx="11094415" cy="914400"/>
+        </p:xfrm>
+        <a:graphic>
+          <a:graphicData uri="http://schemas.openxmlformats.org/drawingml/2006/table">
+            <a:tbl>
+              <a:tblPr/>
+              <a:tblGrid>
+                <a:gridCol w="2011680"/>
+                <a:gridCol w="4572000"/>
+                <a:gridCol w="4507992"/>
+              </a:tblGrid>
+              <a:tr h="457200">
+                <a:tc>
+                  <a:txBody>
+                    <a:bodyPr/>
+                    <a:lstStyle/>
+                    <a:p>
+                      <a:pPr indent="0" marL="0">
+                        <a:buNone/>
+                      </a:pPr>
+                      <a:r>
+                        <a:rPr lang="en-US" sz="1300" b="1" dirty="0">
+                          <a:solidFill>
+                            <a:srgbClr val="FFFFFF"/>
+                          </a:solidFill>
+                          <a:latin typeface="Calibri" pitchFamily="34" charset="0"/>
+                          <a:ea typeface="Calibri" pitchFamily="34" charset="-122"/>
+                          <a:cs typeface="Calibri" pitchFamily="34" charset="-120"/>
+                        </a:rPr>
+                        <a:t>Aspect</a:t>
+                      </a:r>
+                      <a:endParaRPr lang="en-US" sz="1300" dirty="0">
+                        <a:latin typeface="Calibri" charset="0"/>
+                        <a:ea typeface="Calibri" charset="0"/>
+                        <a:cs typeface="Calibri" charset="0"/>
+                      </a:endParaRPr>
+                    </a:p>
+                  </a:txBody>
+                  <a:tcPr marL="76200" marR="76200" marT="38100" marB="38100" anchor="ctr">
+                    <a:lnL w="9525" cap="flat" cmpd="sng" algn="ctr">
+                      <a:solidFill>
+                        <a:srgbClr val="E2E7EE"/>
+                      </a:solidFill>
+                      <a:prstDash val="solid"/>
+                      <a:round/>
+                      <a:headEnd type="none" w="med" len="med"/>
+                      <a:tailEnd type="none" w="med" len="med"/>
+                    </a:lnL>
+                    <a:lnR w="9525" cap="flat" cmpd="sng" algn="ctr">
+                      <a:solidFill>
+                        <a:srgbClr val="E2E7EE"/>
+                      </a:solidFill>
+                      <a:prstDash val="solid"/>
+                      <a:round/>
+                      <a:headEnd type="none" w="med" len="med"/>
+                      <a:tailEnd type="none" w="med" len="med"/>
+                    </a:lnR>
+                    <a:lnT w="9525" cap="flat" cmpd="sng" algn="ctr">
+                      <a:solidFill>
+                        <a:srgbClr val="E2E7EE"/>
+                      </a:solidFill>
+                      <a:prstDash val="solid"/>
+                      <a:round/>
+                      <a:headEnd type="none" w="med" len="med"/>
+                      <a:tailEnd type="none" w="med" len="med"/>
+                    </a:lnT>
+                    <a:lnB w="9525" cap="flat" cmpd="sng" algn="ctr">
+                      <a:solidFill>
+                        <a:srgbClr val="E2E7EE"/>
+                      </a:solidFill>
+                      <a:prstDash val="solid"/>
+                      <a:round/>
+                      <a:headEnd type="none" w="med" len="med"/>
+                      <a:tailEnd type="none" w="med" len="med"/>
+                    </a:lnB>
+                    <a:solidFill>
+                      <a:srgbClr val="13294B"/>
+                    </a:solidFill>
+                  </a:tcPr>
+                </a:tc>
+                <a:tc>
+                  <a:txBody>
+                    <a:bodyPr/>
+                    <a:lstStyle/>
+                    <a:p>
+                      <a:pPr indent="0" marL="0">
+                        <a:buNone/>
+                      </a:pPr>
+                      <a:r>
+                        <a:rPr lang="en-US" sz="1300" b="1" dirty="0">
+                          <a:solidFill>
+                            <a:srgbClr val="FFFFFF"/>
+                          </a:solidFill>
+                          <a:latin typeface="Calibri" pitchFamily="34" charset="0"/>
+                          <a:ea typeface="Calibri" pitchFamily="34" charset="-122"/>
+                          <a:cs typeface="Calibri" pitchFamily="34" charset="-120"/>
+                        </a:rPr>
+                        <a:t>ViTextBLIP-2 (SOTA, paper [3])</a:t>
+                      </a:r>
+                      <a:endParaRPr lang="en-US" sz="1300" dirty="0">
+                        <a:latin typeface="Calibri" charset="0"/>
+                        <a:ea typeface="Calibri" charset="0"/>
+                        <a:cs typeface="Calibri" charset="0"/>
+                      </a:endParaRPr>
+                    </a:p>
+                  </a:txBody>
+                  <a:tcPr marL="76200" marR="76200" marT="38100" marB="38100" anchor="ctr">
+                    <a:lnL w="9525" cap="flat" cmpd="sng" algn="ctr">
+                      <a:solidFill>
+                        <a:srgbClr val="E2E7EE"/>
+                      </a:solidFill>
+                      <a:prstDash val="solid"/>
+                      <a:round/>
+                      <a:headEnd type="none" w="med" len="med"/>
+                      <a:tailEnd type="none" w="med" len="med"/>
+                    </a:lnL>
+                    <a:lnR w="9525" cap="flat" cmpd="sng" algn="ctr">
+                      <a:solidFill>
+                        <a:srgbClr val="E2E7EE"/>
+                      </a:solidFill>
+                      <a:prstDash val="solid"/>
+                      <a:round/>
+                      <a:headEnd type="none" w="med" len="med"/>
+                      <a:tailEnd type="none" w="med" len="med"/>
+                    </a:lnR>
+                    <a:lnT w="9525" cap="flat" cmpd="sng" algn="ctr">
+                      <a:solidFill>
+                        <a:srgbClr val="E2E7EE"/>
+                      </a:solidFill>
+                      <a:prstDash val="solid"/>
+                      <a:round/>
+                      <a:headEnd type="none" w="med" len="med"/>
+                      <a:tailEnd type="none" w="med" len="med"/>
+                    </a:lnT>
+                    <a:lnB w="9525" cap="flat" cmpd="sng" algn="ctr">
+                      <a:solidFill>
+                        <a:srgbClr val="E2E7EE"/>
+                      </a:solidFill>
+                      <a:prstDash val="solid"/>
+                      <a:round/>
+                      <a:headEnd type="none" w="med" len="med"/>
+                      <a:tailEnd type="none" w="med" len="med"/>
+                    </a:lnB>
+                    <a:solidFill>
+                      <a:srgbClr val="13294B"/>
+                    </a:solidFill>
+                  </a:tcPr>
+                </a:tc>
+                <a:tc>
+                  <a:txBody>
+                    <a:bodyPr/>
+                    <a:lstStyle/>
+                    <a:p>
+                      <a:pPr indent="0" marL="0">
+                        <a:buNone/>
+                      </a:pPr>
+                      <a:r>
+                        <a:rPr lang="en-US" sz="1300" b="1" dirty="0">
+                          <a:solidFill>
+                            <a:srgbClr val="FFFFFF"/>
+                          </a:solidFill>
+                          <a:latin typeface="Calibri" pitchFamily="34" charset="0"/>
+                          <a:ea typeface="Calibri" pitchFamily="34" charset="-122"/>
+                          <a:cs typeface="Calibri" pitchFamily="34" charset="-120"/>
+                        </a:rPr>
+                        <a:t>Ours: B2 = Qwen2.5-VL-3B + QLoRA</a:t>
+                      </a:r>
+                      <a:endParaRPr lang="en-US" sz="1300" dirty="0">
+                        <a:latin typeface="Calibri" charset="0"/>
+                        <a:ea typeface="Calibri" charset="0"/>
+                        <a:cs typeface="Calibri" charset="0"/>
+                      </a:endParaRPr>
+                    </a:p>
+                  </a:txBody>
+                  <a:tcPr marL="76200" marR="76200" marT="38100" marB="38100" anchor="ctr">
+                    <a:lnL w="9525" cap="flat" cmpd="sng" algn="ctr">
+                      <a:solidFill>
+                        <a:srgbClr val="E2E7EE"/>
+                      </a:solidFill>
+                      <a:prstDash val="solid"/>
+                      <a:round/>
+                      <a:headEnd type="none" w="med" len="med"/>
+                      <a:tailEnd type="none" w="med" len="med"/>
+                    </a:lnL>
+                    <a:lnR w="9525" cap="flat" cmpd="sng" algn="ctr">
+                      <a:solidFill>
+                        <a:srgbClr val="E2E7EE"/>
+                      </a:solidFill>
+                      <a:prstDash val="solid"/>
+                      <a:round/>
+                      <a:headEnd type="none" w="med" len="med"/>
+                      <a:tailEnd type="none" w="med" len="med"/>
+                    </a:lnR>
+                    <a:lnT w="9525" cap="flat" cmpd="sng" algn="ctr">
+                      <a:solidFill>
+                        <a:srgbClr val="E2E7EE"/>
+                      </a:solidFill>
+                      <a:prstDash val="solid"/>
+                      <a:round/>
+                      <a:headEnd type="none" w="med" len="med"/>
+                      <a:tailEnd type="none" w="med" len="med"/>
+                    </a:lnT>
+                    <a:lnB w="9525" cap="flat" cmpd="sng" algn="ctr">
+                      <a:solidFill>
+                        <a:srgbClr val="E2E7EE"/>
+                      </a:solidFill>
+                      <a:prstDash val="solid"/>
+                      <a:round/>
+                      <a:headEnd type="none" w="med" len="med"/>
+                      <a:tailEnd type="none" w="med" len="med"/>
+                    </a:lnB>
+                    <a:solidFill>
+                      <a:srgbClr val="13294B"/>
+                    </a:solidFill>
+                  </a:tcPr>
+                </a:tc>
+              </a:tr>
+              <a:tr h="457200">
+                <a:tc>
+                  <a:txBody>
+                    <a:bodyPr/>
+                    <a:lstStyle/>
+                    <a:p>
+                      <a:pPr indent="0" marL="0">
+                        <a:buNone/>
+                      </a:pPr>
+                      <a:r>
+                        <a:rPr lang="en-US" sz="1200" b="1" dirty="0">
+                          <a:solidFill>
+                            <a:srgbClr val="13294B"/>
+                          </a:solidFill>
+                          <a:latin typeface="Calibri" pitchFamily="34" charset="0"/>
+                          <a:ea typeface="Calibri" pitchFamily="34" charset="-122"/>
+                          <a:cs typeface="Calibri" pitchFamily="34" charset="-120"/>
+                        </a:rPr>
+                        <a:t>Vision</a:t>
+                      </a:r>
+                      <a:endParaRPr lang="en-US" sz="1200" dirty="0">
+                        <a:latin typeface="Calibri" charset="0"/>
+                        <a:ea typeface="Calibri" charset="0"/>
+                        <a:cs typeface="Calibri" charset="0"/>
+                      </a:endParaRPr>
+                    </a:p>
+                  </a:txBody>
+                  <a:tcPr marL="76200" marR="76200" marT="38100" marB="38100" anchor="ctr">
+                    <a:lnL w="9525" cap="flat" cmpd="sng" algn="ctr">
+                      <a:solidFill>
+                        <a:srgbClr val="E2E7EE"/>
+                      </a:solidFill>
+                      <a:prstDash val="solid"/>
+                      <a:round/>
+                      <a:headEnd type="none" w="med" len="med"/>
+                      <a:tailEnd type="none" w="med" len="med"/>
+                    </a:lnL>
+                    <a:lnR w="9525" cap="flat" cmpd="sng" algn="ctr">
+                      <a:solidFill>
+                        <a:srgbClr val="E2E7EE"/>
+                      </a:solidFill>
+                      <a:prstDash val="solid"/>
+                      <a:round/>
+                      <a:headEnd type="none" w="med" len="med"/>
+                      <a:tailEnd type="none" w="med" len="med"/>
+                    </a:lnR>
+                    <a:lnT w="9525" cap="flat" cmpd="sng" algn="ctr">
+                      <a:solidFill>
+                        <a:srgbClr val="E2E7EE"/>
+                      </a:solidFill>
+                      <a:prstDash val="solid"/>
+                      <a:round/>
+                      <a:headEnd type="none" w="med" len="med"/>
+                      <a:tailEnd type="none" w="med" len="med"/>
+                    </a:lnT>
+                    <a:lnB w="9525" cap="flat" cmpd="sng" algn="ctr">
+                      <a:solidFill>
+                        <a:srgbClr val="E2E7EE"/>
+                      </a:solidFill>
+                      <a:prstDash val="solid"/>
+                      <a:round/>
+                      <a:headEnd type="none" w="med" len="med"/>
+                      <a:tailEnd type="none" w="med" len="med"/>
+                    </a:lnB>
+                  </a:tcPr>
+                </a:tc>
+                <a:tc>
+                  <a:txBody>
+                    <a:bodyPr/>
+                    <a:lstStyle/>
+                    <a:p>
+                      <a:pPr indent="0" marL="0">
+                        <a:buNone/>
+                      </a:pPr>
+                      <a:r>
+                        <a:rPr lang="en-US" sz="1200" dirty="0">
+                          <a:solidFill>
+                            <a:srgbClr val="243044"/>
+                          </a:solidFill>
+                          <a:latin typeface="Calibri" pitchFamily="34" charset="0"/>
+                          <a:ea typeface="Calibri" pitchFamily="34" charset="-122"/>
+                          <a:cs typeface="Calibri" pitchFamily="34" charset="-120"/>
+                        </a:rPr>
+                        <a:t>Frozen pre-trained ViT</a:t>
+                      </a:r>
+                      <a:endParaRPr lang="en-US" sz="1200" dirty="0">
+                        <a:latin typeface="Calibri" charset="0"/>
+                        <a:ea typeface="Calibri" charset="0"/>
+                        <a:cs typeface="Calibri" charset="0"/>
+                      </a:endParaRPr>
+                    </a:p>
+                  </a:txBody>
+                  <a:tcPr marL="76200" marR="76200" marT="38100" marB="38100" anchor="ctr">
+                    <a:lnL w="9525" cap="flat" cmpd="sng" algn="ctr">
+                      <a:solidFill>
+                        <a:srgbClr val="E2E7EE"/>
+                      </a:solidFill>
+                      <a:prstDash val="solid"/>
+                      <a:round/>
+                      <a:headEnd type="none" w="med" len="med"/>
+                      <a:tailEnd type="none" w="med" len="med"/>
+                    </a:lnL>
+                    <a:lnR w="9525" cap="flat" cmpd="sng" algn="ctr">
+                      <a:solidFill>
+                        <a:srgbClr val="E2E7EE"/>
+                      </a:solidFill>
+                      <a:prstDash val="solid"/>
+                      <a:round/>
+                      <a:headEnd type="none" w="med" len="med"/>
+                      <a:tailEnd type="none" w="med" len="med"/>
+                    </a:lnR>
+                    <a:lnT w="9525" cap="flat" cmpd="sng" algn="ctr">
+                      <a:solidFill>
+                        <a:srgbClr val="E2E7EE"/>
+                      </a:solidFill>
+                      <a:prstDash val="solid"/>
+                      <a:round/>
+                      <a:headEnd type="none" w="med" len="med"/>
+                      <a:tailEnd type="none" w="med" len="med"/>
+                    </a:lnT>
+                    <a:lnB w="9525" cap="flat" cmpd="sng" algn="ctr">
+                      <a:solidFill>
+                        <a:srgbClr val="E2E7EE"/>
+                      </a:solidFill>
+                      <a:prstDash val="solid"/>
+                      <a:round/>
+                      <a:headEnd type="none" w="med" len="med"/>
+                      <a:tailEnd type="none" w="med" len="med"/>
+                    </a:lnB>
+                  </a:tcPr>
+                </a:tc>
+                <a:tc>
+                  <a:txBody>
+                    <a:bodyPr/>
+                    <a:lstStyle/>
+                    <a:p>
+                      <a:pPr indent="0" marL="0">
+                        <a:buNone/>
+                      </a:pPr>
+                      <a:r>
+                        <a:rPr lang="en-US" sz="1200" dirty="0">
+                          <a:solidFill>
+                            <a:srgbClr val="243044"/>
+                          </a:solidFill>
+                          <a:latin typeface="Calibri" pitchFamily="34" charset="0"/>
+                          <a:ea typeface="Calibri" pitchFamily="34" charset="-122"/>
+                          <a:cs typeface="Calibri" pitchFamily="34" charset="-120"/>
+                        </a:rPr>
+                        <a:t>Qwen2.5-VL ViT (32 blocks), frozen</a:t>
+                      </a:r>
+                      <a:endParaRPr lang="en-US" sz="1200" dirty="0">
+                        <a:latin typeface="Calibri" charset="0"/>
+                        <a:ea typeface="Calibri" charset="0"/>
+                        <a:cs typeface="Calibri" charset="0"/>
+                      </a:endParaRPr>
+                    </a:p>
+                  </a:txBody>
+                  <a:tcPr marL="76200" marR="76200" marT="38100" marB="38100" anchor="ctr">
+                    <a:lnL w="9525" cap="flat" cmpd="sng" algn="ctr">
+                      <a:solidFill>
+                        <a:srgbClr val="E2E7EE"/>
+                      </a:solidFill>
+                      <a:prstDash val="solid"/>
+                      <a:round/>
+                      <a:headEnd type="none" w="med" len="med"/>
+                      <a:tailEnd type="none" w="med" len="med"/>
+                    </a:lnL>
+                    <a:lnR w="9525" cap="flat" cmpd="sng" algn="ctr">
+                      <a:solidFill>
+                        <a:srgbClr val="E2E7EE"/>
+                      </a:solidFill>
+                      <a:prstDash val="solid"/>
+                      <a:round/>
+                      <a:headEnd type="none" w="med" len="med"/>
+                      <a:tailEnd type="none" w="med" len="med"/>
+                    </a:lnR>
+                    <a:lnT w="9525" cap="flat" cmpd="sng" algn="ctr">
+                      <a:solidFill>
+                        <a:srgbClr val="E2E7EE"/>
+                      </a:solidFill>
+                      <a:prstDash val="solid"/>
+                      <a:round/>
+                      <a:headEnd type="none" w="med" len="med"/>
+                      <a:tailEnd type="none" w="med" len="med"/>
+                    </a:lnT>
+                    <a:lnB w="9525" cap="flat" cmpd="sng" algn="ctr">
+                      <a:solidFill>
+                        <a:srgbClr val="E2E7EE"/>
+                      </a:solidFill>
+                      <a:prstDash val="solid"/>
+                      <a:round/>
+                      <a:headEnd type="none" w="med" len="med"/>
+                      <a:tailEnd type="none" w="med" len="med"/>
+                    </a:lnB>
+                  </a:tcPr>
+                </a:tc>
+              </a:tr>
+              <a:tr h="457200">
+                <a:tc>
+                  <a:txBody>
+                    <a:bodyPr/>
+                    <a:lstStyle/>
+                    <a:p>
+                      <a:pPr indent="0" marL="0">
+                        <a:buNone/>
+                      </a:pPr>
+                      <a:r>
+                        <a:rPr lang="en-US" sz="1200" b="1" dirty="0">
+                          <a:solidFill>
+                            <a:srgbClr val="13294B"/>
+                          </a:solidFill>
+                          <a:latin typeface="Calibri" pitchFamily="34" charset="0"/>
+                          <a:ea typeface="Calibri" pitchFamily="34" charset="-122"/>
+                          <a:cs typeface="Calibri" pitchFamily="34" charset="-120"/>
+                        </a:rPr>
+                        <a:t>Scene text (OCR)</a:t>
+                      </a:r>
+                      <a:endParaRPr lang="en-US" sz="1200" dirty="0">
+                        <a:latin typeface="Calibri" charset="0"/>
+                        <a:ea typeface="Calibri" charset="0"/>
+                        <a:cs typeface="Calibri" charset="0"/>
+                      </a:endParaRPr>
+                    </a:p>
+                  </a:txBody>
+                  <a:tcPr marL="76200" marR="76200" marT="38100" marB="38100" anchor="ctr">
+                    <a:lnL w="9525" cap="flat" cmpd="sng" algn="ctr">
+                      <a:solidFill>
+                        <a:srgbClr val="E2E7EE"/>
+                      </a:solidFill>
+                      <a:prstDash val="solid"/>
+                      <a:round/>
+                      <a:headEnd type="none" w="med" len="med"/>
+                      <a:tailEnd type="none" w="med" len="med"/>
+                    </a:lnL>
+                    <a:lnR w="9525" cap="flat" cmpd="sng" algn="ctr">
+                      <a:solidFill>
+                        <a:srgbClr val="E2E7EE"/>
+                      </a:solidFill>
+                      <a:prstDash val="solid"/>
+                      <a:round/>
+                      <a:headEnd type="none" w="med" len="med"/>
+                      <a:tailEnd type="none" w="med" len="med"/>
+                    </a:lnR>
+                    <a:lnT w="9525" cap="flat" cmpd="sng" algn="ctr">
+                      <a:solidFill>
+                        <a:srgbClr val="E2E7EE"/>
+                      </a:solidFill>
+                      <a:prstDash val="solid"/>
+                      <a:round/>
+                      <a:headEnd type="none" w="med" len="med"/>
+                      <a:tailEnd type="none" w="med" len="med"/>
+                    </a:lnT>
+                    <a:lnB w="9525" cap="flat" cmpd="sng" algn="ctr">
+                      <a:solidFill>
+                        <a:srgbClr val="E2E7EE"/>
+                      </a:solidFill>
+                      <a:prstDash val="solid"/>
+                      <a:round/>
+                      <a:headEnd type="none" w="med" len="med"/>
+                      <a:tailEnd type="none" w="med" len="med"/>
+                    </a:lnB>
+                  </a:tcPr>
+                </a:tc>
+                <a:tc>
+                  <a:txBody>
+                    <a:bodyPr/>
+                    <a:lstStyle/>
+                    <a:p>
+                      <a:pPr indent="0" marL="0">
+                        <a:buNone/>
+                      </a:pPr>
+                      <a:r>
+                        <a:rPr lang="en-US" sz="1200" dirty="0">
+                          <a:solidFill>
+                            <a:srgbClr val="243044"/>
+                          </a:solidFill>
+                          <a:latin typeface="Calibri" pitchFamily="34" charset="0"/>
+                          <a:ea typeface="Calibri" pitchFamily="34" charset="-122"/>
+                          <a:cs typeface="Calibri" pitchFamily="34" charset="-120"/>
+                        </a:rPr>
+                        <a:t>SwinTextSpotter [4], not fine-tuned, Vietnamese charset; OCR tokens fused as features</a:t>
+                      </a:r>
+                      <a:endParaRPr lang="en-US" sz="1200" dirty="0">
+                        <a:latin typeface="Calibri" charset="0"/>
+                        <a:ea typeface="Calibri" charset="0"/>
+                        <a:cs typeface="Calibri" charset="0"/>
+                      </a:endParaRPr>
+                    </a:p>
+                  </a:txBody>
+                  <a:tcPr marL="76200" marR="76200" marT="38100" marB="38100" anchor="ctr">
+                    <a:lnL w="9525" cap="flat" cmpd="sng" algn="ctr">
+                      <a:solidFill>
+                        <a:srgbClr val="E2E7EE"/>
+                      </a:solidFill>
+                      <a:prstDash val="solid"/>
+                      <a:round/>
+                      <a:headEnd type="none" w="med" len="med"/>
+                      <a:tailEnd type="none" w="med" len="med"/>
+                    </a:lnL>
+                    <a:lnR w="9525" cap="flat" cmpd="sng" algn="ctr">
+                      <a:solidFill>
+                        <a:srgbClr val="E2E7EE"/>
+                      </a:solidFill>
+                      <a:prstDash val="solid"/>
+                      <a:round/>
+                      <a:headEnd type="none" w="med" len="med"/>
+                      <a:tailEnd type="none" w="med" len="med"/>
+                    </a:lnR>
+                    <a:lnT w="9525" cap="flat" cmpd="sng" algn="ctr">
+                      <a:solidFill>
+                        <a:srgbClr val="E2E7EE"/>
+                      </a:solidFill>
+                      <a:prstDash val="solid"/>
+                      <a:round/>
+                      <a:headEnd type="none" w="med" len="med"/>
+                      <a:tailEnd type="none" w="med" len="med"/>
+                    </a:lnT>
+                    <a:lnB w="9525" cap="flat" cmpd="sng" algn="ctr">
+                      <a:solidFill>
+                        <a:srgbClr val="E2E7EE"/>
+                      </a:solidFill>
+                      <a:prstDash val="solid"/>
+                      <a:round/>
+                      <a:headEnd type="none" w="med" len="med"/>
+                      <a:tailEnd type="none" w="med" len="med"/>
+                    </a:lnB>
+                  </a:tcPr>
+                </a:tc>
+                <a:tc>
+                  <a:txBody>
+                    <a:bodyPr/>
+                    <a:lstStyle/>
+                    <a:p>
+                      <a:pPr indent="0" marL="0">
+                        <a:buNone/>
+                      </a:pPr>
+                      <a:r>
+                        <a:rPr lang="en-US" sz="1200" dirty="0">
+                          <a:solidFill>
+                            <a:srgbClr val="243044"/>
+                          </a:solidFill>
+                          <a:latin typeface="Calibri" pitchFamily="34" charset="0"/>
+                          <a:ea typeface="Calibri" pitchFamily="34" charset="-122"/>
+                          <a:cs typeface="Calibri" pitchFamily="34" charset="-120"/>
+                        </a:rPr>
+                        <a:t>No external OCR — the VLM reads text from pixels (OCR added in B3, Part 06)</a:t>
+                      </a:r>
+                      <a:endParaRPr lang="en-US" sz="1200" dirty="0">
+                        <a:latin typeface="Calibri" charset="0"/>
+                        <a:ea typeface="Calibri" charset="0"/>
+                        <a:cs typeface="Calibri" charset="0"/>
+                      </a:endParaRPr>
+                    </a:p>
+                  </a:txBody>
+                  <a:tcPr marL="76200" marR="76200" marT="38100" marB="38100" anchor="ctr">
+                    <a:lnL w="9525" cap="flat" cmpd="sng" algn="ctr">
+                      <a:solidFill>
+                        <a:srgbClr val="E2E7EE"/>
+                      </a:solidFill>
+                      <a:prstDash val="solid"/>
+                      <a:round/>
+                      <a:headEnd type="none" w="med" len="med"/>
+                      <a:tailEnd type="none" w="med" len="med"/>
+                    </a:lnL>
+                    <a:lnR w="9525" cap="flat" cmpd="sng" algn="ctr">
+                      <a:solidFill>
+                        <a:srgbClr val="E2E7EE"/>
+                      </a:solidFill>
+                      <a:prstDash val="solid"/>
+                      <a:round/>
+                      <a:headEnd type="none" w="med" len="med"/>
+                      <a:tailEnd type="none" w="med" len="med"/>
+                    </a:lnR>
+                    <a:lnT w="9525" cap="flat" cmpd="sng" algn="ctr">
+                      <a:solidFill>
+                        <a:srgbClr val="E2E7EE"/>
+                      </a:solidFill>
+                      <a:prstDash val="solid"/>
+                      <a:round/>
+                      <a:headEnd type="none" w="med" len="med"/>
+                      <a:tailEnd type="none" w="med" len="med"/>
+                    </a:lnT>
+                    <a:lnB w="9525" cap="flat" cmpd="sng" algn="ctr">
+                      <a:solidFill>
+                        <a:srgbClr val="E2E7EE"/>
+                      </a:solidFill>
+                      <a:prstDash val="solid"/>
+                      <a:round/>
+                      <a:headEnd type="none" w="med" len="med"/>
+                      <a:tailEnd type="none" w="med" len="med"/>
+                    </a:lnB>
+                  </a:tcPr>
+                </a:tc>
+              </a:tr>
+              <a:tr h="457200">
+                <a:tc>
+                  <a:txBody>
+                    <a:bodyPr/>
+                    <a:lstStyle/>
+                    <a:p>
+                      <a:pPr indent="0" marL="0">
+                        <a:buNone/>
+                      </a:pPr>
+                      <a:r>
+                        <a:rPr lang="en-US" sz="1200" b="1" dirty="0">
+                          <a:solidFill>
+                            <a:srgbClr val="13294B"/>
+                          </a:solidFill>
+                          <a:latin typeface="Calibri" pitchFamily="34" charset="0"/>
+                          <a:ea typeface="Calibri" pitchFamily="34" charset="-122"/>
+                          <a:cs typeface="Calibri" pitchFamily="34" charset="-120"/>
+                        </a:rPr>
+                        <a:t>Language model</a:t>
+                      </a:r>
+                      <a:endParaRPr lang="en-US" sz="1200" dirty="0">
+                        <a:latin typeface="Calibri" charset="0"/>
+                        <a:ea typeface="Calibri" charset="0"/>
+                        <a:cs typeface="Calibri" charset="0"/>
+                      </a:endParaRPr>
+                    </a:p>
+                  </a:txBody>
+                  <a:tcPr marL="76200" marR="76200" marT="38100" marB="38100" anchor="ctr">
+                    <a:lnL w="9525" cap="flat" cmpd="sng" algn="ctr">
+                      <a:solidFill>
+                        <a:srgbClr val="E2E7EE"/>
+                      </a:solidFill>
+                      <a:prstDash val="solid"/>
+                      <a:round/>
+                      <a:headEnd type="none" w="med" len="med"/>
+                      <a:tailEnd type="none" w="med" len="med"/>
+                    </a:lnL>
+                    <a:lnR w="9525" cap="flat" cmpd="sng" algn="ctr">
+                      <a:solidFill>
+                        <a:srgbClr val="E2E7EE"/>
+                      </a:solidFill>
+                      <a:prstDash val="solid"/>
+                      <a:round/>
+                      <a:headEnd type="none" w="med" len="med"/>
+                      <a:tailEnd type="none" w="med" len="med"/>
+                    </a:lnR>
+                    <a:lnT w="9525" cap="flat" cmpd="sng" algn="ctr">
+                      <a:solidFill>
+                        <a:srgbClr val="E2E7EE"/>
+                      </a:solidFill>
+                      <a:prstDash val="solid"/>
+                      <a:round/>
+                      <a:headEnd type="none" w="med" len="med"/>
+                      <a:tailEnd type="none" w="med" len="med"/>
+                    </a:lnT>
+                    <a:lnB w="9525" cap="flat" cmpd="sng" algn="ctr">
+                      <a:solidFill>
+                        <a:srgbClr val="E2E7EE"/>
+                      </a:solidFill>
+                      <a:prstDash val="solid"/>
+                      <a:round/>
+                      <a:headEnd type="none" w="med" len="med"/>
+                      <a:tailEnd type="none" w="med" len="med"/>
+                    </a:lnB>
+                  </a:tcPr>
+                </a:tc>
+                <a:tc>
+                  <a:txBody>
+                    <a:bodyPr/>
+                    <a:lstStyle/>
+                    <a:p>
+                      <a:pPr indent="0" marL="0">
+                        <a:buNone/>
+                      </a:pPr>
+                      <a:r>
+                        <a:rPr lang="en-US" sz="1200" dirty="0">
+                          <a:solidFill>
+                            <a:srgbClr val="243044"/>
+                          </a:solidFill>
+                          <a:latin typeface="Calibri" pitchFamily="34" charset="0"/>
+                          <a:ea typeface="Calibri" pitchFamily="34" charset="-122"/>
+                          <a:cs typeface="Calibri" pitchFamily="34" charset="-120"/>
+                        </a:rPr>
+                        <a:t>ViT5 [5] (Vietnamese T5), frozen</a:t>
+                      </a:r>
+                      <a:endParaRPr lang="en-US" sz="1200" dirty="0">
+                        <a:latin typeface="Calibri" charset="0"/>
+                        <a:ea typeface="Calibri" charset="0"/>
+                        <a:cs typeface="Calibri" charset="0"/>
+                      </a:endParaRPr>
+                    </a:p>
+                  </a:txBody>
+                  <a:tcPr marL="76200" marR="76200" marT="38100" marB="38100" anchor="ctr">
+                    <a:lnL w="9525" cap="flat" cmpd="sng" algn="ctr">
+                      <a:solidFill>
+                        <a:srgbClr val="E2E7EE"/>
+                      </a:solidFill>
+                      <a:prstDash val="solid"/>
+                      <a:round/>
+                      <a:headEnd type="none" w="med" len="med"/>
+                      <a:tailEnd type="none" w="med" len="med"/>
+                    </a:lnL>
+                    <a:lnR w="9525" cap="flat" cmpd="sng" algn="ctr">
+                      <a:solidFill>
+                        <a:srgbClr val="E2E7EE"/>
+                      </a:solidFill>
+                      <a:prstDash val="solid"/>
+                      <a:round/>
+                      <a:headEnd type="none" w="med" len="med"/>
+                      <a:tailEnd type="none" w="med" len="med"/>
+                    </a:lnR>
+                    <a:lnT w="9525" cap="flat" cmpd="sng" algn="ctr">
+                      <a:solidFill>
+                        <a:srgbClr val="E2E7EE"/>
+                      </a:solidFill>
+                      <a:prstDash val="solid"/>
+                      <a:round/>
+                      <a:headEnd type="none" w="med" len="med"/>
+                      <a:tailEnd type="none" w="med" len="med"/>
+                    </a:lnT>
+                    <a:lnB w="9525" cap="flat" cmpd="sng" algn="ctr">
+                      <a:solidFill>
+                        <a:srgbClr val="E2E7EE"/>
+                      </a:solidFill>
+                      <a:prstDash val="solid"/>
+                      <a:round/>
+                      <a:headEnd type="none" w="med" len="med"/>
+                      <a:tailEnd type="none" w="med" len="med"/>
+                    </a:lnB>
+                  </a:tcPr>
+                </a:tc>
+                <a:tc>
+                  <a:txBody>
+                    <a:bodyPr/>
+                    <a:lstStyle/>
+                    <a:p>
+                      <a:pPr indent="0" marL="0">
+                        <a:buNone/>
+                      </a:pPr>
+                      <a:r>
+                        <a:rPr lang="en-US" sz="1200" dirty="0">
+                          <a:solidFill>
+                            <a:srgbClr val="243044"/>
+                          </a:solidFill>
+                          <a:latin typeface="Calibri" pitchFamily="34" charset="0"/>
+                          <a:ea typeface="Calibri" pitchFamily="34" charset="-122"/>
+                          <a:cs typeface="Calibri" pitchFamily="34" charset="-120"/>
+                        </a:rPr>
+                        <a:t>Qwen2.5-3B decoder, 36 layers, 4-bit NF4</a:t>
+                      </a:r>
+                      <a:endParaRPr lang="en-US" sz="1200" dirty="0">
+                        <a:latin typeface="Calibri" charset="0"/>
+                        <a:ea typeface="Calibri" charset="0"/>
+                        <a:cs typeface="Calibri" charset="0"/>
+                      </a:endParaRPr>
+                    </a:p>
+                  </a:txBody>
+                  <a:tcPr marL="76200" marR="76200" marT="38100" marB="38100" anchor="ctr">
+                    <a:lnL w="9525" cap="flat" cmpd="sng" algn="ctr">
+                      <a:solidFill>
+                        <a:srgbClr val="E2E7EE"/>
+                      </a:solidFill>
+                      <a:prstDash val="solid"/>
+                      <a:round/>
+                      <a:headEnd type="none" w="med" len="med"/>
+                      <a:tailEnd type="none" w="med" len="med"/>
+                    </a:lnL>
+                    <a:lnR w="9525" cap="flat" cmpd="sng" algn="ctr">
+                      <a:solidFill>
+                        <a:srgbClr val="E2E7EE"/>
+                      </a:solidFill>
+                      <a:prstDash val="solid"/>
+                      <a:round/>
+                      <a:headEnd type="none" w="med" len="med"/>
+                      <a:tailEnd type="none" w="med" len="med"/>
+                    </a:lnR>
+                    <a:lnT w="9525" cap="flat" cmpd="sng" algn="ctr">
+                      <a:solidFill>
+                        <a:srgbClr val="E2E7EE"/>
+                      </a:solidFill>
+                      <a:prstDash val="solid"/>
+                      <a:round/>
+                      <a:headEnd type="none" w="med" len="med"/>
+                      <a:tailEnd type="none" w="med" len="med"/>
+                    </a:lnT>
+                    <a:lnB w="9525" cap="flat" cmpd="sng" algn="ctr">
+                      <a:solidFill>
+                        <a:srgbClr val="E2E7EE"/>
+                      </a:solidFill>
+                      <a:prstDash val="solid"/>
+                      <a:round/>
+                      <a:headEnd type="none" w="med" len="med"/>
+                      <a:tailEnd type="none" w="med" len="med"/>
+                    </a:lnB>
+                  </a:tcPr>
+                </a:tc>
+              </a:tr>
+              <a:tr h="457200">
+                <a:tc>
+                  <a:txBody>
+                    <a:bodyPr/>
+                    <a:lstStyle/>
+                    <a:p>
+                      <a:pPr indent="0" marL="0">
+                        <a:buNone/>
+                      </a:pPr>
+                      <a:r>
+                        <a:rPr lang="en-US" sz="1200" b="1" dirty="0">
+                          <a:solidFill>
+                            <a:srgbClr val="13294B"/>
+                          </a:solidFill>
+                          <a:latin typeface="Calibri" pitchFamily="34" charset="0"/>
+                          <a:ea typeface="Calibri" pitchFamily="34" charset="-122"/>
+                          <a:cs typeface="Calibri" pitchFamily="34" charset="-120"/>
+                        </a:rPr>
+                        <a:t>What is trained</a:t>
+                      </a:r>
+                      <a:endParaRPr lang="en-US" sz="1200" dirty="0">
+                        <a:latin typeface="Calibri" charset="0"/>
+                        <a:ea typeface="Calibri" charset="0"/>
+                        <a:cs typeface="Calibri" charset="0"/>
+                      </a:endParaRPr>
+                    </a:p>
+                  </a:txBody>
+                  <a:tcPr marL="76200" marR="76200" marT="38100" marB="38100" anchor="ctr">
+                    <a:lnL w="9525" cap="flat" cmpd="sng" algn="ctr">
+                      <a:solidFill>
+                        <a:srgbClr val="E2E7EE"/>
+                      </a:solidFill>
+                      <a:prstDash val="solid"/>
+                      <a:round/>
+                      <a:headEnd type="none" w="med" len="med"/>
+                      <a:tailEnd type="none" w="med" len="med"/>
+                    </a:lnL>
+                    <a:lnR w="9525" cap="flat" cmpd="sng" algn="ctr">
+                      <a:solidFill>
+                        <a:srgbClr val="E2E7EE"/>
+                      </a:solidFill>
+                      <a:prstDash val="solid"/>
+                      <a:round/>
+                      <a:headEnd type="none" w="med" len="med"/>
+                      <a:tailEnd type="none" w="med" len="med"/>
+                    </a:lnR>
+                    <a:lnT w="9525" cap="flat" cmpd="sng" algn="ctr">
+                      <a:solidFill>
+                        <a:srgbClr val="E2E7EE"/>
+                      </a:solidFill>
+                      <a:prstDash val="solid"/>
+                      <a:round/>
+                      <a:headEnd type="none" w="med" len="med"/>
+                      <a:tailEnd type="none" w="med" len="med"/>
+                    </a:lnT>
+                    <a:lnB w="9525" cap="flat" cmpd="sng" algn="ctr">
+                      <a:solidFill>
+                        <a:srgbClr val="E2E7EE"/>
+                      </a:solidFill>
+                      <a:prstDash val="solid"/>
+                      <a:round/>
+                      <a:headEnd type="none" w="med" len="med"/>
+                      <a:tailEnd type="none" w="med" len="med"/>
+                    </a:lnB>
+                  </a:tcPr>
+                </a:tc>
+                <a:tc>
+                  <a:txBody>
+                    <a:bodyPr/>
+                    <a:lstStyle/>
+                    <a:p>
+                      <a:pPr indent="0" marL="0">
+                        <a:buNone/>
+                      </a:pPr>
+                      <a:r>
+                        <a:rPr lang="en-US" sz="1200" dirty="0">
+                          <a:solidFill>
+                            <a:srgbClr val="243044"/>
+                          </a:solidFill>
+                          <a:latin typeface="Calibri" pitchFamily="34" charset="0"/>
+                          <a:ea typeface="Calibri" pitchFamily="34" charset="-122"/>
+                          <a:cs typeface="Calibri" pitchFamily="34" charset="-120"/>
+                        </a:rPr>
+                        <a:t>Q-Former (initialized from BLIP-2) fusing image, question and OCR</a:t>
+                      </a:r>
+                      <a:endParaRPr lang="en-US" sz="1200" dirty="0">
+                        <a:latin typeface="Calibri" charset="0"/>
+                        <a:ea typeface="Calibri" charset="0"/>
+                        <a:cs typeface="Calibri" charset="0"/>
+                      </a:endParaRPr>
+                    </a:p>
+                  </a:txBody>
+                  <a:tcPr marL="76200" marR="76200" marT="38100" marB="38100" anchor="ctr">
+                    <a:lnL w="9525" cap="flat" cmpd="sng" algn="ctr">
+                      <a:solidFill>
+                        <a:srgbClr val="E2E7EE"/>
+                      </a:solidFill>
+                      <a:prstDash val="solid"/>
+                      <a:round/>
+                      <a:headEnd type="none" w="med" len="med"/>
+                      <a:tailEnd type="none" w="med" len="med"/>
+                    </a:lnL>
+                    <a:lnR w="9525" cap="flat" cmpd="sng" algn="ctr">
+                      <a:solidFill>
+                        <a:srgbClr val="E2E7EE"/>
+                      </a:solidFill>
+                      <a:prstDash val="solid"/>
+                      <a:round/>
+                      <a:headEnd type="none" w="med" len="med"/>
+                      <a:tailEnd type="none" w="med" len="med"/>
+                    </a:lnR>
+                    <a:lnT w="9525" cap="flat" cmpd="sng" algn="ctr">
+                      <a:solidFill>
+                        <a:srgbClr val="E2E7EE"/>
+                      </a:solidFill>
+                      <a:prstDash val="solid"/>
+                      <a:round/>
+                      <a:headEnd type="none" w="med" len="med"/>
+                      <a:tailEnd type="none" w="med" len="med"/>
+                    </a:lnT>
+                    <a:lnB w="9525" cap="flat" cmpd="sng" algn="ctr">
+                      <a:solidFill>
+                        <a:srgbClr val="E2E7EE"/>
+                      </a:solidFill>
+                      <a:prstDash val="solid"/>
+                      <a:round/>
+                      <a:headEnd type="none" w="med" len="med"/>
+                      <a:tailEnd type="none" w="med" len="med"/>
+                    </a:lnB>
+                  </a:tcPr>
+                </a:tc>
+                <a:tc>
+                  <a:txBody>
+                    <a:bodyPr/>
+                    <a:lstStyle/>
+                    <a:p>
+                      <a:pPr indent="0" marL="0">
+                        <a:buNone/>
+                      </a:pPr>
+                      <a:r>
+                        <a:rPr lang="en-US" sz="1200" dirty="0">
+                          <a:solidFill>
+                            <a:srgbClr val="243044"/>
+                          </a:solidFill>
+                          <a:latin typeface="Calibri" pitchFamily="34" charset="0"/>
+                          <a:ea typeface="Calibri" pitchFamily="34" charset="-122"/>
+                          <a:cs typeface="Calibri" pitchFamily="34" charset="-120"/>
+                        </a:rPr>
+                        <a:t>LoRA on q, k, v, o: 7.37 M params (0.196%)</a:t>
+                      </a:r>
+                      <a:endParaRPr lang="en-US" sz="1200" dirty="0">
+                        <a:latin typeface="Calibri" charset="0"/>
+                        <a:ea typeface="Calibri" charset="0"/>
+                        <a:cs typeface="Calibri" charset="0"/>
+                      </a:endParaRPr>
+                    </a:p>
+                  </a:txBody>
+                  <a:tcPr marL="76200" marR="76200" marT="38100" marB="38100" anchor="ctr">
+                    <a:lnL w="9525" cap="flat" cmpd="sng" algn="ctr">
+                      <a:solidFill>
+                        <a:srgbClr val="E2E7EE"/>
+                      </a:solidFill>
+                      <a:prstDash val="solid"/>
+                      <a:round/>
+                      <a:headEnd type="none" w="med" len="med"/>
+                      <a:tailEnd type="none" w="med" len="med"/>
+                    </a:lnL>
+                    <a:lnR w="9525" cap="flat" cmpd="sng" algn="ctr">
+                      <a:solidFill>
+                        <a:srgbClr val="E2E7EE"/>
+                      </a:solidFill>
+                      <a:prstDash val="solid"/>
+                      <a:round/>
+                      <a:headEnd type="none" w="med" len="med"/>
+                      <a:tailEnd type="none" w="med" len="med"/>
+                    </a:lnR>
+                    <a:lnT w="9525" cap="flat" cmpd="sng" algn="ctr">
+                      <a:solidFill>
+                        <a:srgbClr val="E2E7EE"/>
+                      </a:solidFill>
+                      <a:prstDash val="solid"/>
+                      <a:round/>
+                      <a:headEnd type="none" w="med" len="med"/>
+                      <a:tailEnd type="none" w="med" len="med"/>
+                    </a:lnT>
+                    <a:lnB w="9525" cap="flat" cmpd="sng" algn="ctr">
+                      <a:solidFill>
+                        <a:srgbClr val="E2E7EE"/>
+                      </a:solidFill>
+                      <a:prstDash val="solid"/>
+                      <a:round/>
+                      <a:headEnd type="none" w="med" len="med"/>
+                      <a:tailEnd type="none" w="med" len="med"/>
+                    </a:lnB>
+                  </a:tcPr>
+                </a:tc>
+              </a:tr>
+              <a:tr h="457200">
+                <a:tc>
+                  <a:txBody>
+                    <a:bodyPr/>
+                    <a:lstStyle/>
+                    <a:p>
+                      <a:pPr indent="0" marL="0">
+                        <a:buNone/>
+                      </a:pPr>
+                      <a:r>
+                        <a:rPr lang="en-US" sz="1200" b="1" dirty="0">
+                          <a:solidFill>
+                            <a:srgbClr val="13294B"/>
+                          </a:solidFill>
+                          <a:latin typeface="Calibri" pitchFamily="34" charset="0"/>
+                          <a:ea typeface="Calibri" pitchFamily="34" charset="-122"/>
+                          <a:cs typeface="Calibri" pitchFamily="34" charset="-120"/>
+                        </a:rPr>
+                        <a:t>Data handling</a:t>
+                      </a:r>
+                      <a:endParaRPr lang="en-US" sz="1200" dirty="0">
+                        <a:latin typeface="Calibri" charset="0"/>
+                        <a:ea typeface="Calibri" charset="0"/>
+                        <a:cs typeface="Calibri" charset="0"/>
+                      </a:endParaRPr>
+                    </a:p>
+                  </a:txBody>
+                  <a:tcPr marL="76200" marR="76200" marT="38100" marB="38100" anchor="ctr">
+                    <a:lnL w="9525" cap="flat" cmpd="sng" algn="ctr">
+                      <a:solidFill>
+                        <a:srgbClr val="E2E7EE"/>
+                      </a:solidFill>
+                      <a:prstDash val="solid"/>
+                      <a:round/>
+                      <a:headEnd type="none" w="med" len="med"/>
+                      <a:tailEnd type="none" w="med" len="med"/>
+                    </a:lnL>
+                    <a:lnR w="9525" cap="flat" cmpd="sng" algn="ctr">
+                      <a:solidFill>
+                        <a:srgbClr val="E2E7EE"/>
+                      </a:solidFill>
+                      <a:prstDash val="solid"/>
+                      <a:round/>
+                      <a:headEnd type="none" w="med" len="med"/>
+                      <a:tailEnd type="none" w="med" len="med"/>
+                    </a:lnR>
+                    <a:lnT w="9525" cap="flat" cmpd="sng" algn="ctr">
+                      <a:solidFill>
+                        <a:srgbClr val="E2E7EE"/>
+                      </a:solidFill>
+                      <a:prstDash val="solid"/>
+                      <a:round/>
+                      <a:headEnd type="none" w="med" len="med"/>
+                      <a:tailEnd type="none" w="med" len="med"/>
+                    </a:lnT>
+                    <a:lnB w="9525" cap="flat" cmpd="sng" algn="ctr">
+                      <a:solidFill>
+                        <a:srgbClr val="E2E7EE"/>
+                      </a:solidFill>
+                      <a:prstDash val="solid"/>
+                      <a:round/>
+                      <a:headEnd type="none" w="med" len="med"/>
+                      <a:tailEnd type="none" w="med" len="med"/>
+                    </a:lnB>
+                  </a:tcPr>
+                </a:tc>
+                <a:tc>
+                  <a:txBody>
+                    <a:bodyPr/>
+                    <a:lstStyle/>
+                    <a:p>
+                      <a:pPr indent="0" marL="0">
+                        <a:buNone/>
+                      </a:pPr>
+                      <a:r>
+                        <a:rPr lang="en-US" sz="1200" dirty="0">
+                          <a:solidFill>
+                            <a:srgbClr val="243044"/>
+                          </a:solidFill>
+                          <a:latin typeface="Calibri" pitchFamily="34" charset="0"/>
+                          <a:ea typeface="Calibri" pitchFamily="34" charset="-122"/>
+                          <a:cs typeface="Calibri" pitchFamily="34" charset="-120"/>
+                        </a:rPr>
+                        <a:t>OCR tokens ordered top-left → bottom-right (helps most models)</a:t>
+                      </a:r>
+                      <a:endParaRPr lang="en-US" sz="1200" dirty="0">
+                        <a:latin typeface="Calibri" charset="0"/>
+                        <a:ea typeface="Calibri" charset="0"/>
+                        <a:cs typeface="Calibri" charset="0"/>
+                      </a:endParaRPr>
+                    </a:p>
+                  </a:txBody>
+                  <a:tcPr marL="76200" marR="76200" marT="38100" marB="38100" anchor="ctr">
+                    <a:lnL w="9525" cap="flat" cmpd="sng" algn="ctr">
+                      <a:solidFill>
+                        <a:srgbClr val="E2E7EE"/>
+                      </a:solidFill>
+                      <a:prstDash val="solid"/>
+                      <a:round/>
+                      <a:headEnd type="none" w="med" len="med"/>
+                      <a:tailEnd type="none" w="med" len="med"/>
+                    </a:lnL>
+                    <a:lnR w="9525" cap="flat" cmpd="sng" algn="ctr">
+                      <a:solidFill>
+                        <a:srgbClr val="E2E7EE"/>
+                      </a:solidFill>
+                      <a:prstDash val="solid"/>
+                      <a:round/>
+                      <a:headEnd type="none" w="med" len="med"/>
+                      <a:tailEnd type="none" w="med" len="med"/>
+                    </a:lnR>
+                    <a:lnT w="9525" cap="flat" cmpd="sng" algn="ctr">
+                      <a:solidFill>
+                        <a:srgbClr val="E2E7EE"/>
+                      </a:solidFill>
+                      <a:prstDash val="solid"/>
+                      <a:round/>
+                      <a:headEnd type="none" w="med" len="med"/>
+                      <a:tailEnd type="none" w="med" len="med"/>
+                    </a:lnT>
+                    <a:lnB w="9525" cap="flat" cmpd="sng" algn="ctr">
+                      <a:solidFill>
+                        <a:srgbClr val="E2E7EE"/>
+                      </a:solidFill>
+                      <a:prstDash val="solid"/>
+                      <a:round/>
+                      <a:headEnd type="none" w="med" len="med"/>
+                      <a:tailEnd type="none" w="med" len="med"/>
+                    </a:lnB>
+                  </a:tcPr>
+                </a:tc>
+                <a:tc>
+                  <a:txBody>
+                    <a:bodyPr/>
+                    <a:lstStyle/>
+                    <a:p>
+                      <a:pPr indent="0" marL="0">
+                        <a:buNone/>
+                      </a:pPr>
+                      <a:r>
+                        <a:rPr lang="en-US" sz="1200" dirty="0">
+                          <a:solidFill>
+                            <a:srgbClr val="243044"/>
+                          </a:solidFill>
+                          <a:latin typeface="Calibri" pitchFamily="34" charset="0"/>
+                          <a:ea typeface="Calibri" pitchFamily="34" charset="-122"/>
+                          <a:cs typeface="Calibri" pitchFamily="34" charset="-120"/>
+                        </a:rPr>
+                        <a:t>Official split; Vietnamese normalization (NFC, lowercase, tone marks kept)</a:t>
+                      </a:r>
+                      <a:endParaRPr lang="en-US" sz="1200" dirty="0">
+                        <a:latin typeface="Calibri" charset="0"/>
+                        <a:ea typeface="Calibri" charset="0"/>
+                        <a:cs typeface="Calibri" charset="0"/>
+                      </a:endParaRPr>
+                    </a:p>
+                  </a:txBody>
+                  <a:tcPr marL="76200" marR="76200" marT="38100" marB="38100" anchor="ctr">
+                    <a:lnL w="9525" cap="flat" cmpd="sng" algn="ctr">
+                      <a:solidFill>
+                        <a:srgbClr val="E2E7EE"/>
+                      </a:solidFill>
+                      <a:prstDash val="solid"/>
+                      <a:round/>
+                      <a:headEnd type="none" w="med" len="med"/>
+                      <a:tailEnd type="none" w="med" len="med"/>
+                    </a:lnL>
+                    <a:lnR w="9525" cap="flat" cmpd="sng" algn="ctr">
+                      <a:solidFill>
+                        <a:srgbClr val="E2E7EE"/>
+                      </a:solidFill>
+                      <a:prstDash val="solid"/>
+                      <a:round/>
+                      <a:headEnd type="none" w="med" len="med"/>
+                      <a:tailEnd type="none" w="med" len="med"/>
+                    </a:lnR>
+                    <a:lnT w="9525" cap="flat" cmpd="sng" algn="ctr">
+                      <a:solidFill>
+                        <a:srgbClr val="E2E7EE"/>
+                      </a:solidFill>
+                      <a:prstDash val="solid"/>
+                      <a:round/>
+                      <a:headEnd type="none" w="med" len="med"/>
+                      <a:tailEnd type="none" w="med" len="med"/>
+                    </a:lnT>
+                    <a:lnB w="9525" cap="flat" cmpd="sng" algn="ctr">
+                      <a:solidFill>
+                        <a:srgbClr val="E2E7EE"/>
+                      </a:solidFill>
+                      <a:prstDash val="solid"/>
+                      <a:round/>
+                      <a:headEnd type="none" w="med" len="med"/>
+                      <a:tailEnd type="none" w="med" len="med"/>
+                    </a:lnB>
+                  </a:tcPr>
+                </a:tc>
+              </a:tr>
+              <a:tr h="457200">
+                <a:tc>
+                  <a:txBody>
+                    <a:bodyPr/>
+                    <a:lstStyle/>
+                    <a:p>
+                      <a:pPr indent="0" marL="0">
+                        <a:buNone/>
+                      </a:pPr>
+                      <a:r>
+                        <a:rPr lang="en-US" sz="1200" b="1" dirty="0">
+                          <a:solidFill>
+                            <a:srgbClr val="13294B"/>
+                          </a:solidFill>
+                          <a:latin typeface="Calibri" pitchFamily="34" charset="0"/>
+                          <a:ea typeface="Calibri" pitchFamily="34" charset="-122"/>
+                          <a:cs typeface="Calibri" pitchFamily="34" charset="-120"/>
+                        </a:rPr>
+                        <a:t>Training data</a:t>
+                      </a:r>
+                      <a:endParaRPr lang="en-US" sz="1200" dirty="0">
+                        <a:latin typeface="Calibri" charset="0"/>
+                        <a:ea typeface="Calibri" charset="0"/>
+                        <a:cs typeface="Calibri" charset="0"/>
+                      </a:endParaRPr>
+                    </a:p>
+                  </a:txBody>
+                  <a:tcPr marL="76200" marR="76200" marT="38100" marB="38100" anchor="ctr">
+                    <a:lnL w="9525" cap="flat" cmpd="sng" algn="ctr">
+                      <a:solidFill>
+                        <a:srgbClr val="E2E7EE"/>
+                      </a:solidFill>
+                      <a:prstDash val="solid"/>
+                      <a:round/>
+                      <a:headEnd type="none" w="med" len="med"/>
+                      <a:tailEnd type="none" w="med" len="med"/>
+                    </a:lnL>
+                    <a:lnR w="9525" cap="flat" cmpd="sng" algn="ctr">
+                      <a:solidFill>
+                        <a:srgbClr val="E2E7EE"/>
+                      </a:solidFill>
+                      <a:prstDash val="solid"/>
+                      <a:round/>
+                      <a:headEnd type="none" w="med" len="med"/>
+                      <a:tailEnd type="none" w="med" len="med"/>
+                    </a:lnR>
+                    <a:lnT w="9525" cap="flat" cmpd="sng" algn="ctr">
+                      <a:solidFill>
+                        <a:srgbClr val="E2E7EE"/>
+                      </a:solidFill>
+                      <a:prstDash val="solid"/>
+                      <a:round/>
+                      <a:headEnd type="none" w="med" len="med"/>
+                      <a:tailEnd type="none" w="med" len="med"/>
+                    </a:lnT>
+                    <a:lnB w="9525" cap="flat" cmpd="sng" algn="ctr">
+                      <a:solidFill>
+                        <a:srgbClr val="E2E7EE"/>
+                      </a:solidFill>
+                      <a:prstDash val="solid"/>
+                      <a:round/>
+                      <a:headEnd type="none" w="med" len="med"/>
+                      <a:tailEnd type="none" w="med" len="med"/>
+                    </a:lnB>
+                  </a:tcPr>
+                </a:tc>
+                <a:tc>
+                  <a:txBody>
+                    <a:bodyPr/>
+                    <a:lstStyle/>
+                    <a:p>
+                      <a:pPr indent="0" marL="0">
+                        <a:buNone/>
+                      </a:pPr>
+                      <a:r>
+                        <a:rPr lang="en-US" sz="1200" dirty="0">
+                          <a:solidFill>
+                            <a:srgbClr val="243044"/>
+                          </a:solidFill>
+                          <a:latin typeface="Calibri" pitchFamily="34" charset="0"/>
+                          <a:ea typeface="Calibri" pitchFamily="34" charset="-122"/>
+                          <a:cs typeface="Calibri" pitchFamily="34" charset="-120"/>
+                        </a:rPr>
+                        <a:t>Full ViTextVQA train</a:t>
+                      </a:r>
+                      <a:endParaRPr lang="en-US" sz="1200" dirty="0">
+                        <a:latin typeface="Calibri" charset="0"/>
+                        <a:ea typeface="Calibri" charset="0"/>
+                        <a:cs typeface="Calibri" charset="0"/>
+                      </a:endParaRPr>
+                    </a:p>
+                  </a:txBody>
+                  <a:tcPr marL="76200" marR="76200" marT="38100" marB="38100" anchor="ctr">
+                    <a:lnL w="9525" cap="flat" cmpd="sng" algn="ctr">
+                      <a:solidFill>
+                        <a:srgbClr val="E2E7EE"/>
+                      </a:solidFill>
+                      <a:prstDash val="solid"/>
+                      <a:round/>
+                      <a:headEnd type="none" w="med" len="med"/>
+                      <a:tailEnd type="none" w="med" len="med"/>
+                    </a:lnL>
+                    <a:lnR w="9525" cap="flat" cmpd="sng" algn="ctr">
+                      <a:solidFill>
+                        <a:srgbClr val="E2E7EE"/>
+                      </a:solidFill>
+                      <a:prstDash val="solid"/>
+                      <a:round/>
+                      <a:headEnd type="none" w="med" len="med"/>
+                      <a:tailEnd type="none" w="med" len="med"/>
+                    </a:lnR>
+                    <a:lnT w="9525" cap="flat" cmpd="sng" algn="ctr">
+                      <a:solidFill>
+                        <a:srgbClr val="E2E7EE"/>
+                      </a:solidFill>
+                      <a:prstDash val="solid"/>
+                      <a:round/>
+                      <a:headEnd type="none" w="med" len="med"/>
+                      <a:tailEnd type="none" w="med" len="med"/>
+                    </a:lnT>
+                    <a:lnB w="9525" cap="flat" cmpd="sng" algn="ctr">
+                      <a:solidFill>
+                        <a:srgbClr val="E2E7EE"/>
+                      </a:solidFill>
+                      <a:prstDash val="solid"/>
+                      <a:round/>
+                      <a:headEnd type="none" w="med" len="med"/>
+                      <a:tailEnd type="none" w="med" len="med"/>
+                    </a:lnB>
+                  </a:tcPr>
+                </a:tc>
+                <a:tc>
+                  <a:txBody>
+                    <a:bodyPr/>
+                    <a:lstStyle/>
+                    <a:p>
+                      <a:pPr indent="0" marL="0">
+                        <a:buNone/>
+                      </a:pPr>
+                      <a:r>
+                        <a:rPr lang="en-US" sz="1200" dirty="0">
+                          <a:solidFill>
+                            <a:srgbClr val="243044"/>
+                          </a:solidFill>
+                          <a:latin typeface="Calibri" pitchFamily="34" charset="0"/>
+                          <a:ea typeface="Calibri" pitchFamily="34" charset="-122"/>
+                          <a:cs typeface="Calibri" pitchFamily="34" charset="-120"/>
+                        </a:rPr>
+                        <a:t>Full ViTextVQA train, 1 epoch (3.03 h on one L4)</a:t>
+                      </a:r>
+                      <a:endParaRPr lang="en-US" sz="1200" dirty="0">
+                        <a:latin typeface="Calibri" charset="0"/>
+                        <a:ea typeface="Calibri" charset="0"/>
+                        <a:cs typeface="Calibri" charset="0"/>
+                      </a:endParaRPr>
+                    </a:p>
+                  </a:txBody>
+                  <a:tcPr marL="76200" marR="76200" marT="38100" marB="38100" anchor="ctr">
+                    <a:lnL w="9525" cap="flat" cmpd="sng" algn="ctr">
+                      <a:solidFill>
+                        <a:srgbClr val="E2E7EE"/>
+                      </a:solidFill>
+                      <a:prstDash val="solid"/>
+                      <a:round/>
+                      <a:headEnd type="none" w="med" len="med"/>
+                      <a:tailEnd type="none" w="med" len="med"/>
+                    </a:lnL>
+                    <a:lnR w="9525" cap="flat" cmpd="sng" algn="ctr">
+                      <a:solidFill>
+                        <a:srgbClr val="E2E7EE"/>
+                      </a:solidFill>
+                      <a:prstDash val="solid"/>
+                      <a:round/>
+                      <a:headEnd type="none" w="med" len="med"/>
+                      <a:tailEnd type="none" w="med" len="med"/>
+                    </a:lnR>
+                    <a:lnT w="9525" cap="flat" cmpd="sng" algn="ctr">
+                      <a:solidFill>
+                        <a:srgbClr val="E2E7EE"/>
+                      </a:solidFill>
+                      <a:prstDash val="solid"/>
+                      <a:round/>
+                      <a:headEnd type="none" w="med" len="med"/>
+                      <a:tailEnd type="none" w="med" len="med"/>
+                    </a:lnT>
+                    <a:lnB w="9525" cap="flat" cmpd="sng" algn="ctr">
+                      <a:solidFill>
+                        <a:srgbClr val="E2E7EE"/>
+                      </a:solidFill>
+                      <a:prstDash val="solid"/>
+                      <a:round/>
+                      <a:headEnd type="none" w="med" len="med"/>
+                      <a:tailEnd type="none" w="med" len="med"/>
+                    </a:lnB>
+                  </a:tcPr>
+                </a:tc>
+              </a:tr>
+              <a:tr h="457200">
+                <a:tc>
+                  <a:txBody>
+                    <a:bodyPr/>
+                    <a:lstStyle/>
+                    <a:p>
+                      <a:pPr indent="0" marL="0">
+                        <a:buNone/>
+                      </a:pPr>
+                      <a:r>
+                        <a:rPr lang="en-US" sz="1200" b="1" dirty="0">
+                          <a:solidFill>
+                            <a:srgbClr val="13294B"/>
+                          </a:solidFill>
+                          <a:latin typeface="Calibri" pitchFamily="34" charset="0"/>
+                          <a:ea typeface="Calibri" pitchFamily="34" charset="-122"/>
+                          <a:cs typeface="Calibri" pitchFamily="34" charset="-120"/>
+                        </a:rPr>
+                        <a:t>Metrics</a:t>
+                      </a:r>
+                      <a:endParaRPr lang="en-US" sz="1200" dirty="0">
+                        <a:latin typeface="Calibri" charset="0"/>
+                        <a:ea typeface="Calibri" charset="0"/>
+                        <a:cs typeface="Calibri" charset="0"/>
+                      </a:endParaRPr>
+                    </a:p>
+                  </a:txBody>
+                  <a:tcPr marL="76200" marR="76200" marT="38100" marB="38100" anchor="ctr">
+                    <a:lnL w="9525" cap="flat" cmpd="sng" algn="ctr">
+                      <a:solidFill>
+                        <a:srgbClr val="E2E7EE"/>
+                      </a:solidFill>
+                      <a:prstDash val="solid"/>
+                      <a:round/>
+                      <a:headEnd type="none" w="med" len="med"/>
+                      <a:tailEnd type="none" w="med" len="med"/>
+                    </a:lnL>
+                    <a:lnR w="9525" cap="flat" cmpd="sng" algn="ctr">
+                      <a:solidFill>
+                        <a:srgbClr val="E2E7EE"/>
+                      </a:solidFill>
+                      <a:prstDash val="solid"/>
+                      <a:round/>
+                      <a:headEnd type="none" w="med" len="med"/>
+                      <a:tailEnd type="none" w="med" len="med"/>
+                    </a:lnR>
+                    <a:lnT w="9525" cap="flat" cmpd="sng" algn="ctr">
+                      <a:solidFill>
+                        <a:srgbClr val="E2E7EE"/>
+                      </a:solidFill>
+                      <a:prstDash val="solid"/>
+                      <a:round/>
+                      <a:headEnd type="none" w="med" len="med"/>
+                      <a:tailEnd type="none" w="med" len="med"/>
+                    </a:lnT>
+                    <a:lnB w="9525" cap="flat" cmpd="sng" algn="ctr">
+                      <a:solidFill>
+                        <a:srgbClr val="E2E7EE"/>
+                      </a:solidFill>
+                      <a:prstDash val="solid"/>
+                      <a:round/>
+                      <a:headEnd type="none" w="med" len="med"/>
+                      <a:tailEnd type="none" w="med" len="med"/>
+                    </a:lnB>
+                  </a:tcPr>
+                </a:tc>
+                <a:tc>
+                  <a:txBody>
+                    <a:bodyPr/>
+                    <a:lstStyle/>
+                    <a:p>
+                      <a:pPr indent="0" marL="0">
+                        <a:buNone/>
+                      </a:pPr>
+                      <a:r>
+                        <a:rPr lang="en-US" sz="1200" dirty="0">
+                          <a:solidFill>
+                            <a:srgbClr val="243044"/>
+                          </a:solidFill>
+                          <a:latin typeface="Calibri" pitchFamily="34" charset="0"/>
+                          <a:ea typeface="Calibri" pitchFamily="34" charset="-122"/>
+                          <a:cs typeface="Calibri" pitchFamily="34" charset="-120"/>
+                        </a:rPr>
+                        <a:t>EM, F1; answer normalization not published</a:t>
+                      </a:r>
+                      <a:endParaRPr lang="en-US" sz="1200" dirty="0">
+                        <a:latin typeface="Calibri" charset="0"/>
+                        <a:ea typeface="Calibri" charset="0"/>
+                        <a:cs typeface="Calibri" charset="0"/>
+                      </a:endParaRPr>
+                    </a:p>
+                  </a:txBody>
+                  <a:tcPr marL="76200" marR="76200" marT="38100" marB="38100" anchor="ctr">
+                    <a:lnL w="9525" cap="flat" cmpd="sng" algn="ctr">
+                      <a:solidFill>
+                        <a:srgbClr val="E2E7EE"/>
+                      </a:solidFill>
+                      <a:prstDash val="solid"/>
+                      <a:round/>
+                      <a:headEnd type="none" w="med" len="med"/>
+                      <a:tailEnd type="none" w="med" len="med"/>
+                    </a:lnL>
+                    <a:lnR w="9525" cap="flat" cmpd="sng" algn="ctr">
+                      <a:solidFill>
+                        <a:srgbClr val="E2E7EE"/>
+                      </a:solidFill>
+                      <a:prstDash val="solid"/>
+                      <a:round/>
+                      <a:headEnd type="none" w="med" len="med"/>
+                      <a:tailEnd type="none" w="med" len="med"/>
+                    </a:lnR>
+                    <a:lnT w="9525" cap="flat" cmpd="sng" algn="ctr">
+                      <a:solidFill>
+                        <a:srgbClr val="E2E7EE"/>
+                      </a:solidFill>
+                      <a:prstDash val="solid"/>
+                      <a:round/>
+                      <a:headEnd type="none" w="med" len="med"/>
+                      <a:tailEnd type="none" w="med" len="med"/>
+                    </a:lnT>
+                    <a:lnB w="9525" cap="flat" cmpd="sng" algn="ctr">
+                      <a:solidFill>
+                        <a:srgbClr val="E2E7EE"/>
+                      </a:solidFill>
+                      <a:prstDash val="solid"/>
+                      <a:round/>
+                      <a:headEnd type="none" w="med" len="med"/>
+                      <a:tailEnd type="none" w="med" len="med"/>
+                    </a:lnB>
+                  </a:tcPr>
+                </a:tc>
+                <a:tc>
+                  <a:txBody>
+                    <a:bodyPr/>
+                    <a:lstStyle/>
+                    <a:p>
+                      <a:pPr indent="0" marL="0">
+                        <a:buNone/>
+                      </a:pPr>
+                      <a:r>
+                        <a:rPr lang="en-US" sz="1200" dirty="0">
+                          <a:solidFill>
+                            <a:srgbClr val="243044"/>
+                          </a:solidFill>
+                          <a:latin typeface="Calibri" pitchFamily="34" charset="0"/>
+                          <a:ea typeface="Calibri" pitchFamily="34" charset="-122"/>
+                          <a:cs typeface="Calibri" pitchFamily="34" charset="-120"/>
+                        </a:rPr>
+                        <a:t>EM, ANLS (+ F1 to compare); normalization published in code</a:t>
+                      </a:r>
+                      <a:endParaRPr lang="en-US" sz="1200" dirty="0">
+                        <a:latin typeface="Calibri" charset="0"/>
+                        <a:ea typeface="Calibri" charset="0"/>
+                        <a:cs typeface="Calibri" charset="0"/>
+                      </a:endParaRPr>
+                    </a:p>
+                  </a:txBody>
+                  <a:tcPr marL="76200" marR="76200" marT="38100" marB="38100" anchor="ctr">
+                    <a:lnL w="9525" cap="flat" cmpd="sng" algn="ctr">
+                      <a:solidFill>
+                        <a:srgbClr val="E2E7EE"/>
+                      </a:solidFill>
+                      <a:prstDash val="solid"/>
+                      <a:round/>
+                      <a:headEnd type="none" w="med" len="med"/>
+                      <a:tailEnd type="none" w="med" len="med"/>
+                    </a:lnL>
+                    <a:lnR w="9525" cap="flat" cmpd="sng" algn="ctr">
+                      <a:solidFill>
+                        <a:srgbClr val="E2E7EE"/>
+                      </a:solidFill>
+                      <a:prstDash val="solid"/>
+                      <a:round/>
+                      <a:headEnd type="none" w="med" len="med"/>
+                      <a:tailEnd type="none" w="med" len="med"/>
+                    </a:lnR>
+                    <a:lnT w="9525" cap="flat" cmpd="sng" algn="ctr">
+                      <a:solidFill>
+                        <a:srgbClr val="E2E7EE"/>
+                      </a:solidFill>
+                      <a:prstDash val="solid"/>
+                      <a:round/>
+                      <a:headEnd type="none" w="med" len="med"/>
+                      <a:tailEnd type="none" w="med" len="med"/>
+                    </a:lnT>
+                    <a:lnB w="9525" cap="flat" cmpd="sng" algn="ctr">
+                      <a:solidFill>
+                        <a:srgbClr val="E2E7EE"/>
+                      </a:solidFill>
+                      <a:prstDash val="solid"/>
+                      <a:round/>
+                      <a:headEnd type="none" w="med" len="med"/>
+                      <a:tailEnd type="none" w="med" len="med"/>
+                    </a:lnB>
+                  </a:tcPr>
+                </a:tc>
+              </a:tr>
+              <a:tr h="457200">
+                <a:tc>
+                  <a:txBody>
+                    <a:bodyPr/>
+                    <a:lstStyle/>
+                    <a:p>
+                      <a:pPr indent="0" marL="0">
+                        <a:buNone/>
+                      </a:pPr>
+                      <a:r>
+                        <a:rPr lang="en-US" sz="1200" b="1" dirty="0">
+                          <a:solidFill>
+                            <a:srgbClr val="13294B"/>
+                          </a:solidFill>
+                          <a:latin typeface="Calibri" pitchFamily="34" charset="0"/>
+                          <a:ea typeface="Calibri" pitchFamily="34" charset="-122"/>
+                          <a:cs typeface="Calibri" pitchFamily="34" charset="-120"/>
+                        </a:rPr>
+                        <a:t>Full test (EM / F1)</a:t>
+                      </a:r>
+                      <a:endParaRPr lang="en-US" sz="1200" dirty="0">
+                        <a:latin typeface="Calibri" charset="0"/>
+                        <a:ea typeface="Calibri" charset="0"/>
+                        <a:cs typeface="Calibri" charset="0"/>
+                      </a:endParaRPr>
+                    </a:p>
+                  </a:txBody>
+                  <a:tcPr marL="76200" marR="76200" marT="38100" marB="38100" anchor="ctr">
+                    <a:lnL w="9525" cap="flat" cmpd="sng" algn="ctr">
+                      <a:solidFill>
+                        <a:srgbClr val="E2E7EE"/>
+                      </a:solidFill>
+                      <a:prstDash val="solid"/>
+                      <a:round/>
+                      <a:headEnd type="none" w="med" len="med"/>
+                      <a:tailEnd type="none" w="med" len="med"/>
+                    </a:lnL>
+                    <a:lnR w="9525" cap="flat" cmpd="sng" algn="ctr">
+                      <a:solidFill>
+                        <a:srgbClr val="E2E7EE"/>
+                      </a:solidFill>
+                      <a:prstDash val="solid"/>
+                      <a:round/>
+                      <a:headEnd type="none" w="med" len="med"/>
+                      <a:tailEnd type="none" w="med" len="med"/>
+                    </a:lnR>
+                    <a:lnT w="9525" cap="flat" cmpd="sng" algn="ctr">
+                      <a:solidFill>
+                        <a:srgbClr val="E2E7EE"/>
+                      </a:solidFill>
+                      <a:prstDash val="solid"/>
+                      <a:round/>
+                      <a:headEnd type="none" w="med" len="med"/>
+                      <a:tailEnd type="none" w="med" len="med"/>
+                    </a:lnT>
+                    <a:lnB w="9525" cap="flat" cmpd="sng" algn="ctr">
+                      <a:solidFill>
+                        <a:srgbClr val="E2E7EE"/>
+                      </a:solidFill>
+                      <a:prstDash val="solid"/>
+                      <a:round/>
+                      <a:headEnd type="none" w="med" len="med"/>
+                      <a:tailEnd type="none" w="med" len="med"/>
+                    </a:lnB>
+                    <a:solidFill>
+                      <a:srgbClr val="E7F0F3"/>
+                    </a:solidFill>
+                  </a:tcPr>
+                </a:tc>
+                <a:tc>
+                  <a:txBody>
+                    <a:bodyPr/>
+                    <a:lstStyle/>
+                    <a:p>
+                      <a:pPr indent="0" marL="0">
+                        <a:buNone/>
+                      </a:pPr>
+                      <a:r>
+                        <a:rPr lang="en-US" sz="1200" b="1" dirty="0">
+                          <a:solidFill>
+                            <a:srgbClr val="243044"/>
+                          </a:solidFill>
+                          <a:latin typeface="Calibri" pitchFamily="34" charset="0"/>
+                          <a:ea typeface="Calibri" pitchFamily="34" charset="-122"/>
+                          <a:cs typeface="Calibri" pitchFamily="34" charset="-120"/>
+                        </a:rPr>
+                        <a:t>25.48 / 53.95</a:t>
+                      </a:r>
+                      <a:endParaRPr lang="en-US" sz="1200" dirty="0">
+                        <a:latin typeface="Calibri" charset="0"/>
+                        <a:ea typeface="Calibri" charset="0"/>
+                        <a:cs typeface="Calibri" charset="0"/>
+                      </a:endParaRPr>
+                    </a:p>
+                  </a:txBody>
+                  <a:tcPr marL="76200" marR="76200" marT="38100" marB="38100" anchor="ctr">
+                    <a:lnL w="9525" cap="flat" cmpd="sng" algn="ctr">
+                      <a:solidFill>
+                        <a:srgbClr val="E2E7EE"/>
+                      </a:solidFill>
+                      <a:prstDash val="solid"/>
+                      <a:round/>
+                      <a:headEnd type="none" w="med" len="med"/>
+                      <a:tailEnd type="none" w="med" len="med"/>
+                    </a:lnL>
+                    <a:lnR w="9525" cap="flat" cmpd="sng" algn="ctr">
+                      <a:solidFill>
+                        <a:srgbClr val="E2E7EE"/>
+                      </a:solidFill>
+                      <a:prstDash val="solid"/>
+                      <a:round/>
+                      <a:headEnd type="none" w="med" len="med"/>
+                      <a:tailEnd type="none" w="med" len="med"/>
+                    </a:lnR>
+                    <a:lnT w="9525" cap="flat" cmpd="sng" algn="ctr">
+                      <a:solidFill>
+                        <a:srgbClr val="E2E7EE"/>
+                      </a:solidFill>
+                      <a:prstDash val="solid"/>
+                      <a:round/>
+                      <a:headEnd type="none" w="med" len="med"/>
+                      <a:tailEnd type="none" w="med" len="med"/>
+                    </a:lnT>
+                    <a:lnB w="9525" cap="flat" cmpd="sng" algn="ctr">
+                      <a:solidFill>
+                        <a:srgbClr val="E2E7EE"/>
+                      </a:solidFill>
+                      <a:prstDash val="solid"/>
+                      <a:round/>
+                      <a:headEnd type="none" w="med" len="med"/>
+                      <a:tailEnd type="none" w="med" len="med"/>
+                    </a:lnB>
+                    <a:solidFill>
+                      <a:srgbClr val="E7F0F3"/>
+                    </a:solidFill>
+                  </a:tcPr>
+                </a:tc>
+                <a:tc>
+                  <a:txBody>
+                    <a:bodyPr/>
+                    <a:lstStyle/>
+                    <a:p>
+                      <a:pPr indent="0" marL="0">
+                        <a:buNone/>
+                      </a:pPr>
+                      <a:r>
+                        <a:rPr lang="en-US" sz="1200" b="1" dirty="0">
+                          <a:solidFill>
+                            <a:srgbClr val="243044"/>
+                          </a:solidFill>
+                          <a:latin typeface="Calibri" pitchFamily="34" charset="0"/>
+                          <a:ea typeface="Calibri" pitchFamily="34" charset="-122"/>
+                          <a:cs typeface="Calibri" pitchFamily="34" charset="-120"/>
+                        </a:rPr>
+                        <a:t>50.26 / 71.16</a:t>
+                      </a:r>
+                      <a:endParaRPr lang="en-US" sz="1200" dirty="0">
+                        <a:latin typeface="Calibri" charset="0"/>
+                        <a:ea typeface="Calibri" charset="0"/>
+                        <a:cs typeface="Calibri" charset="0"/>
+                      </a:endParaRPr>
+                    </a:p>
+                  </a:txBody>
+                  <a:tcPr marL="76200" marR="76200" marT="38100" marB="38100" anchor="ctr">
+                    <a:lnL w="9525" cap="flat" cmpd="sng" algn="ctr">
+                      <a:solidFill>
+                        <a:srgbClr val="E2E7EE"/>
+                      </a:solidFill>
+                      <a:prstDash val="solid"/>
+                      <a:round/>
+                      <a:headEnd type="none" w="med" len="med"/>
+                      <a:tailEnd type="none" w="med" len="med"/>
+                    </a:lnL>
+                    <a:lnR w="9525" cap="flat" cmpd="sng" algn="ctr">
+                      <a:solidFill>
+                        <a:srgbClr val="E2E7EE"/>
+                      </a:solidFill>
+                      <a:prstDash val="solid"/>
+                      <a:round/>
+                      <a:headEnd type="none" w="med" len="med"/>
+                      <a:tailEnd type="none" w="med" len="med"/>
+                    </a:lnR>
+                    <a:lnT w="9525" cap="flat" cmpd="sng" algn="ctr">
+                      <a:solidFill>
+                        <a:srgbClr val="E2E7EE"/>
+                      </a:solidFill>
+                      <a:prstDash val="solid"/>
+                      <a:round/>
+                      <a:headEnd type="none" w="med" len="med"/>
+                      <a:tailEnd type="none" w="med" len="med"/>
+                    </a:lnT>
+                    <a:lnB w="9525" cap="flat" cmpd="sng" algn="ctr">
+                      <a:solidFill>
+                        <a:srgbClr val="E2E7EE"/>
+                      </a:solidFill>
+                      <a:prstDash val="solid"/>
+                      <a:round/>
+                      <a:headEnd type="none" w="med" len="med"/>
+                      <a:tailEnd type="none" w="med" len="med"/>
+                    </a:lnB>
+                    <a:solidFill>
+                      <a:srgbClr val="E7F0F3"/>
+                    </a:solidFill>
+                  </a:tcPr>
+                </a:tc>
+              </a:tr>
+            </a:tbl>
+          </a:graphicData>
+        </a:graphic>
+      </p:graphicFrame>
+      <p:sp>
+        <p:nvSpPr>
+          <p:cNvPr id="6" name="text_92"/>
+          <p:cNvSpPr txBox="1"/>
+          <p:nvPr/>
+        </p:nvSpPr>
+        <p:spPr>
+          <a:xfrm>
+            <a:off x="548640" y="5760720"/>
+            <a:ext cx="11094415" cy="566928"/>
+          </a:xfrm>
+          <a:prstGeom prst="rect">
+            <a:avLst/>
+          </a:prstGeom>
+          <a:noFill/>
+          <a:ln/>
+        </p:spPr>
+        <p:txBody>
+          <a:bodyPr wrap="square" lIns="0" tIns="0" rIns="0" bIns="0" rtlCol="0" anchor="b"/>
+          <a:lstStyle/>
+          <a:p>
+            <a:pPr indent="0" marL="0">
+              <a:buNone/>
+            </a:pPr>
+            <a:r>
+              <a:rPr lang="en-US" sz="1000" dirty="0">
+                <a:solidFill>
+                  <a:schemeClr val="accent3"/>
+                </a:solidFill>
+                <a:latin typeface="Calibri" pitchFamily="34" charset="0"/>
+                <a:ea typeface="Calibri" pitchFamily="34" charset="-122"/>
+                <a:cs typeface="Calibri" pitchFamily="34" charset="-120"/>
+              </a:rPr>
+              <a:t>[3] Nguyen et al., ViTextVQA, arXiv:2404.10652, 2024 (ext. ESWA 2025) · [4] Huang et al., SwinTextSpotter, CVPR 2022 · [5] Phan et al., ViT5, NAACL SRW 2022. Note: the paper's 25.48 / 53.95 is the “OCR confidence” column of its Table 10; its ablation reports 24.83 / 52.51 for the full model.</a:t>
+            </a:r>
+            <a:endParaRPr lang="en-US" sz="1000" dirty="0"/>
+          </a:p>
+        </p:txBody>
+      </p:sp>
+      <p:sp>
+        <p:nvSpPr>
+          <p:cNvPr id="25" name="Slide Number Placeholder 0"/>
+          <p:cNvSpPr>
+            <a:spLocks noGrp="1"/>
+          </p:cNvSpPr>
+          <p:nvPr>
+            <p:ph type="sldNum" sz="quarter" idx="4294967295"/>
+          </p:nvPr>
+        </p:nvSpPr>
+        <p:spPr>
+          <a:xfrm>
+            <a:off x="11094415" y="6446520"/>
+            <a:ext cx="548640" cy="274320"/>
+          </a:xfrm>
+          <a:prstGeom prst="rect">
+            <a:avLst/>
+          </a:prstGeom>
+          <a:extLst>
+            <a:ext uri="{C572A759-6A51-4108-AA02-DFA0A04FC94B}">
+              <ma14:wrappingTextBoxFlag xmlns:ma14="http://schemas.microsoft.com/office/mac/drawingml/2011/main" val="0"/>
+            </a:ext>
+          </a:extLst>
+        </p:spPr>
+        <p:txBody>
+          <a:bodyPr/>
+          <a:lstStyle>
+            <a:lvl1pPr>
+              <a:defRPr sz="1000">
+                <a:solidFill>
+                  <a:srgbClr val="6B7280"/>
+                </a:solidFill>
+                <a:latin typeface="Calibri"/>
+                <a:ea typeface="Calibri"/>
+                <a:cs typeface="Calibri"/>
+              </a:defRPr>
+            </a:lvl1pPr>
+          </a:lstStyle>
+          <a:p>
+            <a:pPr algn="r"/>
+            <a:fld id="{F7021451-1387-4CA6-816F-3879F97B5CBC}" type="slidenum">
+              <a:rPr b="0" lang="en-US"/>
+              <a:t>13</a:t>
+            </a:fld>
+            <a:endParaRPr lang="en-US"/>
+          </a:p>
+        </p:txBody>
+      </p:sp>
+    </p:spTree>
+  </p:cSld>
+  <p:clrMapOvr>
+    <a:masterClrMapping/>
+  </p:clrMapOvr>
+</p:sld>
+</file>
+
+<file path=ppt/slides/slide14.xml><?xml version="1.0" encoding="utf-8"?>
+<p:sld xmlns:a="http://schemas.openxmlformats.org/drawingml/2006/main" xmlns:r="http://schemas.openxmlformats.org/officeDocument/2006/relationships" xmlns:p="http://schemas.openxmlformats.org/presentationml/2006/main">
+  <p:cSld name="Slide 14">
+    <p:spTree>
+      <p:nvGrpSpPr>
+        <p:cNvPr id="1" name=""/>
+        <p:cNvGrpSpPr/>
+        <p:nvPr/>
+      </p:nvGrpSpPr>
+      <p:grpSpPr>
+        <a:xfrm>
+          <a:off x="0" y="0"/>
+          <a:ext cx="0" cy="0"/>
+          <a:chOff x="0" y="0"/>
+          <a:chExt cx="0" cy="0"/>
+        </a:xfrm>
+      </p:grpSpPr>
+      <p:sp>
+        <p:nvSpPr>
+          <p:cNvPr id="2" name="Text 0"/>
+          <p:cNvSpPr/>
+          <p:nvPr>
+            <p:ph idx="100" type="body" hasCustomPrompt="1"/>
+          </p:nvPr>
+        </p:nvSpPr>
+        <p:spPr>
+          <a:xfrm>
+            <a:off x="548640" y="292608"/>
+            <a:ext cx="8229600" cy="274320"/>
+          </a:xfrm>
+          <a:prstGeom prst="rect">
+            <a:avLst/>
+          </a:prstGeom>
+          <a:noFill/>
+          <a:ln/>
+        </p:spPr>
+        <p:txBody>
+          <a:bodyPr wrap="square" lIns="0" tIns="0" rIns="0" bIns="0" rtlCol="0"/>
+          <a:lstStyle/>
+          <a:p>
+            <a:pPr indent="0" marL="0">
+              <a:buNone/>
+            </a:pPr>
+            <a:r>
+              <a:rPr lang="en-US" sz="1100" b="1" spc="200" kern="0" dirty="0">
+                <a:solidFill>
+                  <a:schemeClr val="accent1"/>
+                </a:solidFill>
+                <a:latin typeface="Calibri" pitchFamily="34" charset="0"/>
+                <a:ea typeface="Calibri" pitchFamily="34" charset="-122"/>
+                <a:cs typeface="Calibri" pitchFamily="34" charset="-120"/>
+              </a:rPr>
               <a:t>PART 05 · ERROR &amp; HALLUCINATION ANALYSIS</a:t>
             </a:r>
             <a:endParaRPr lang="en-US" sz="1100" dirty="0"/>
@@ -8962,7 +11107,7 @@
       </p:sp>
       <p:graphicFrame>
         <p:nvGraphicFramePr>
-          <p:cNvPr id="5" name="chart_87" descr=""/>
+          <p:cNvPr id="5" name="chart_93" descr=""/>
           <p:cNvGraphicFramePr/>
           <p:nvPr/>
         </p:nvGraphicFramePr>
@@ -8978,7 +11123,7 @@
       </p:graphicFrame>
       <p:graphicFrame>
         <p:nvGraphicFramePr>
-          <p:cNvPr id="14" name="table_88"/>
+          <p:cNvPr id="15" name="table_94"/>
           <p:cNvGraphicFramePr>
             <a:graphicFrameLocks noGrp="1"/>
           </p:cNvGraphicFramePr>
@@ -8991,7 +11136,7 @@
           </p:nvPr>
         </p:nvGraphicFramePr>
         <p:xfrm>
-          <a:off x="548640" y="4343400"/>
+          <a:off x="548640" y="4224528"/>
           <a:ext cx="6400800" cy="914400"/>
         </p:xfrm>
         <a:graphic>
@@ -9003,7 +11148,7 @@
                 <a:gridCol w="2240280"/>
                 <a:gridCol w="2514600"/>
               </a:tblGrid>
-              <a:tr h="457200">
+              <a:tr h="402336">
                 <a:tc>
                   <a:txBody>
                     <a:bodyPr/>
@@ -9209,7 +11354,7 @@
                   </a:tcPr>
                 </a:tc>
               </a:tr>
-              <a:tr h="457200">
+              <a:tr h="402336">
                 <a:tc>
                   <a:txBody>
                     <a:bodyPr/>
@@ -9406,7 +11551,7 @@
                   </a:tcPr>
                 </a:tc>
               </a:tr>
-              <a:tr h="457200">
+              <a:tr h="402336">
                 <a:tc>
                   <a:txBody>
                     <a:bodyPr/>
@@ -9603,7 +11748,7 @@
                   </a:tcPr>
                 </a:tc>
               </a:tr>
-              <a:tr h="457200">
+              <a:tr h="402336">
                 <a:tc>
                   <a:txBody>
                     <a:bodyPr/>
@@ -9806,14 +11951,14 @@
       </p:graphicFrame>
       <p:sp>
         <p:nvSpPr>
-          <p:cNvPr id="7" name="card_89"/>
+          <p:cNvPr id="7" name="card_95"/>
           <p:cNvSpPr/>
           <p:nvPr/>
         </p:nvSpPr>
         <p:spPr>
           <a:xfrm>
             <a:off x="7315200" y="1371600"/>
-            <a:ext cx="4327855" cy="4892040"/>
+            <a:ext cx="4327855" cy="4526280"/>
           </a:xfrm>
           <a:prstGeom prst="roundRect">
             <a:avLst>
@@ -9833,7 +11978,7 @@
       </p:sp>
       <p:sp>
         <p:nvSpPr>
-          <p:cNvPr id="8" name="text_90"/>
+          <p:cNvPr id="8" name="text_96"/>
           <p:cNvSpPr txBox="1"/>
           <p:nvPr/>
         </p:nvSpPr>
@@ -9872,14 +12017,14 @@
       </p:sp>
       <p:sp>
         <p:nvSpPr>
-          <p:cNvPr id="9" name="list_91"/>
+          <p:cNvPr id="9" name="list_97"/>
           <p:cNvSpPr txBox="1"/>
           <p:nvPr/>
         </p:nvSpPr>
         <p:spPr>
           <a:xfrm>
             <a:off x="7589520" y="2194560"/>
-            <a:ext cx="3779215" cy="3977640"/>
+            <a:ext cx="3779215" cy="3611880"/>
           </a:xfrm>
           <a:prstGeom prst="rect">
             <a:avLst/>
@@ -9899,7 +12044,7 @@
               <a:buChar char="•"/>
             </a:pPr>
             <a:r>
-              <a:rPr lang="en-US" sz="1500" dirty="0">
+              <a:rPr lang="en-US" sz="1400" dirty="0">
                 <a:solidFill>
                   <a:schemeClr val="tx1"/>
                 </a:solidFill>
@@ -9909,7 +12054,7 @@
               </a:rPr>
               <a:t>54% are correct in meaning: EM is too strict (ViVQA 62%, ViTextVQA 46%)</a:t>
             </a:r>
-            <a:endParaRPr lang="en-US" sz="1500" dirty="0"/>
+            <a:endParaRPr lang="en-US" sz="1400" dirty="0"/>
           </a:p>
           <a:p>
             <a:pPr marL="177800" indent="-177800">
@@ -9920,7 +12065,7 @@
               <a:buChar char="•"/>
             </a:pPr>
             <a:r>
-              <a:rPr lang="en-US" sz="1500" dirty="0">
+              <a:rPr lang="en-US" sz="1400" dirty="0">
                 <a:solidFill>
                   <a:schemeClr val="tx1"/>
                 </a:solidFill>
@@ -9930,7 +12075,7 @@
               </a:rPr>
               <a:t>Noisy gold: 12.5% (ViVQA 19%)</a:t>
             </a:r>
-            <a:endParaRPr lang="en-US" sz="1500" dirty="0"/>
+            <a:endParaRPr lang="en-US" sz="1400" dirty="0"/>
           </a:p>
           <a:p>
             <a:pPr marL="177800" indent="-177800">
@@ -9941,7 +12086,7 @@
               <a:buChar char="•"/>
             </a:pPr>
             <a:r>
-              <a:rPr lang="en-US" sz="1500" dirty="0">
+              <a:rPr lang="en-US" sz="1400" dirty="0">
                 <a:solidFill>
                   <a:schemeClr val="tx1"/>
                 </a:solidFill>
@@ -9951,7 +12096,7 @@
               </a:rPr>
               <a:t>ViTextVQA real errors: OCR 28%, wrong text region 23%, tone marks 8%</a:t>
             </a:r>
-            <a:endParaRPr lang="en-US" sz="1500" dirty="0"/>
+            <a:endParaRPr lang="en-US" sz="1400" dirty="0"/>
           </a:p>
           <a:p>
             <a:pPr marL="177800" indent="-177800">
@@ -9962,7 +12107,7 @@
               <a:buChar char="•"/>
             </a:pPr>
             <a:r>
-              <a:rPr lang="en-US" sz="1500" dirty="0">
+              <a:rPr lang="en-US" sz="1400" dirty="0">
                 <a:solidFill>
                   <a:schemeClr val="tx1"/>
                 </a:solidFill>
@@ -9972,7 +12117,7 @@
               </a:rPr>
               <a:t>Hallucination (not in the image): 7% of errors (95% CI 4–11%)</a:t>
             </a:r>
-            <a:endParaRPr lang="en-US" sz="1500" dirty="0"/>
+            <a:endParaRPr lang="en-US" sz="1400" dirty="0"/>
           </a:p>
           <a:p>
             <a:pPr marL="177800" indent="-177800">
@@ -9983,7 +12128,7 @@
               <a:buChar char="•"/>
             </a:pPr>
             <a:r>
-              <a:rPr lang="en-US" sz="1500" dirty="0">
+              <a:rPr lang="en-US" sz="1400" dirty="0">
                 <a:solidFill>
                   <a:schemeClr val="tx1"/>
                 </a:solidFill>
@@ -9993,7 +12138,46 @@
               </a:rPr>
               <a:t>4 annotators + AI pre-labels; κ = 0.62 (2 independent annotators); same conclusions without the 42 AI-assisted rows</a:t>
             </a:r>
-            <a:endParaRPr lang="en-US" sz="1500" dirty="0"/>
+            <a:endParaRPr lang="en-US" sz="1400" dirty="0"/>
+          </a:p>
+        </p:txBody>
+      </p:sp>
+      <p:sp>
+        <p:nvSpPr>
+          <p:cNvPr id="10" name="text_98"/>
+          <p:cNvSpPr txBox="1"/>
+          <p:nvPr/>
+        </p:nvSpPr>
+        <p:spPr>
+          <a:xfrm>
+            <a:off x="548640" y="5852160"/>
+            <a:ext cx="11094415" cy="502920"/>
+          </a:xfrm>
+          <a:prstGeom prst="rect">
+            <a:avLst/>
+          </a:prstGeom>
+          <a:noFill/>
+          <a:ln/>
+        </p:spPr>
+        <p:txBody>
+          <a:bodyPr wrap="square" lIns="0" tIns="0" rIns="0" bIns="0" rtlCol="0" anchor="b"/>
+          <a:lstStyle/>
+          <a:p>
+            <a:pPr indent="0" marL="0">
+              <a:buNone/>
+            </a:pPr>
+            <a:r>
+              <a:rPr lang="en-US" sz="1000" dirty="0">
+                <a:solidFill>
+                  <a:schemeClr val="accent3"/>
+                </a:solidFill>
+                <a:latin typeface="Calibri" pitchFamily="34" charset="0"/>
+                <a:ea typeface="Calibri" pitchFamily="34" charset="-122"/>
+                <a:cs typeface="Calibri" pitchFamily="34" charset="-120"/>
+              </a:rPr>
+              <a:t>Sources — buckets: python -m src.eval.answer_format --buckets on experiments/W07_B2_eval_qlora_r16_ep1_vitextvqa_testfull_… (4,988 = 10,028 − 5,040 correct). Manual audit: docs/W07/audit/W07_error_audit_final.json (labels in docs/W07/audit/labels/, computed by compute_error_audit.py).</a:t>
+            </a:r>
+            <a:endParaRPr lang="en-US" sz="1000" dirty="0"/>
           </a:p>
         </p:txBody>
       </p:sp>
@@ -10039,7 +12223,7 @@
             <a:pPr algn="r"/>
             <a:fld id="{F7021451-1387-4CA6-816F-3879F97B5CBC}" type="slidenum">
               <a:rPr b="0" lang="en-US"/>
-              <a:t>13</a:t>
+              <a:t>14</a:t>
             </a:fld>
             <a:endParaRPr lang="en-US"/>
           </a:p>
@@ -10053,9 +12237,9 @@
 </p:sld>
 </file>
 
-<file path=ppt/slides/slide14.xml><?xml version="1.0" encoding="utf-8"?>
+<file path=ppt/slides/slide15.xml><?xml version="1.0" encoding="utf-8"?>
 <p:sld xmlns:a="http://schemas.openxmlformats.org/drawingml/2006/main" xmlns:r="http://schemas.openxmlformats.org/officeDocument/2006/relationships" xmlns:p="http://schemas.openxmlformats.org/presentationml/2006/main">
-  <p:cSld name="Slide 14">
+  <p:cSld name="Slide 15">
     <p:spTree>
       <p:nvGrpSpPr>
         <p:cNvPr id="1" name=""/>
@@ -10154,7 +12338,7 @@
       </p:sp>
       <p:sp>
         <p:nvSpPr>
-          <p:cNvPr id="5" name="card_92"/>
+          <p:cNvPr id="5" name="card_99"/>
           <p:cNvSpPr/>
           <p:nvPr/>
         </p:nvSpPr>
@@ -10181,7 +12365,7 @@
       </p:sp>
       <p:sp>
         <p:nvSpPr>
-          <p:cNvPr id="6" name="text_93"/>
+          <p:cNvPr id="6" name="text_100"/>
           <p:cNvSpPr txBox="1"/>
           <p:nvPr/>
         </p:nvSpPr>
@@ -10220,7 +12404,7 @@
       </p:sp>
       <p:sp>
         <p:nvSpPr>
-          <p:cNvPr id="7" name="text_94"/>
+          <p:cNvPr id="7" name="text_101"/>
           <p:cNvSpPr txBox="1"/>
           <p:nvPr/>
         </p:nvSpPr>
@@ -10259,7 +12443,7 @@
       </p:sp>
       <p:sp>
         <p:nvSpPr>
-          <p:cNvPr id="8" name="arrow_95"/>
+          <p:cNvPr id="8" name="arrow_102"/>
           <p:cNvSpPr/>
           <p:nvPr/>
         </p:nvSpPr>
@@ -10284,7 +12468,7 @@
       </p:sp>
       <p:sp>
         <p:nvSpPr>
-          <p:cNvPr id="9" name="card_96"/>
+          <p:cNvPr id="9" name="card_103"/>
           <p:cNvSpPr/>
           <p:nvPr/>
         </p:nvSpPr>
@@ -10311,7 +12495,7 @@
       </p:sp>
       <p:sp>
         <p:nvSpPr>
-          <p:cNvPr id="10" name="text_97"/>
+          <p:cNvPr id="10" name="text_104"/>
           <p:cNvSpPr txBox="1"/>
           <p:nvPr/>
         </p:nvSpPr>
@@ -10350,7 +12534,7 @@
       </p:sp>
       <p:sp>
         <p:nvSpPr>
-          <p:cNvPr id="11" name="text_98"/>
+          <p:cNvPr id="11" name="text_105"/>
           <p:cNvSpPr txBox="1"/>
           <p:nvPr/>
         </p:nvSpPr>
@@ -10389,7 +12573,7 @@
       </p:sp>
       <p:sp>
         <p:nvSpPr>
-          <p:cNvPr id="12" name="arrow_99"/>
+          <p:cNvPr id="12" name="arrow_106"/>
           <p:cNvSpPr/>
           <p:nvPr/>
         </p:nvSpPr>
@@ -10414,7 +12598,7 @@
       </p:sp>
       <p:sp>
         <p:nvSpPr>
-          <p:cNvPr id="13" name="card_100"/>
+          <p:cNvPr id="13" name="card_107"/>
           <p:cNvSpPr/>
           <p:nvPr/>
         </p:nvSpPr>
@@ -10441,7 +12625,7 @@
       </p:sp>
       <p:sp>
         <p:nvSpPr>
-          <p:cNvPr id="14" name="text_101"/>
+          <p:cNvPr id="14" name="text_108"/>
           <p:cNvSpPr txBox="1"/>
           <p:nvPr/>
         </p:nvSpPr>
@@ -10480,7 +12664,7 @@
       </p:sp>
       <p:sp>
         <p:nvSpPr>
-          <p:cNvPr id="15" name="text_102"/>
+          <p:cNvPr id="15" name="text_109"/>
           <p:cNvSpPr txBox="1"/>
           <p:nvPr/>
         </p:nvSpPr>
@@ -10519,7 +12703,7 @@
       </p:sp>
       <p:sp>
         <p:nvSpPr>
-          <p:cNvPr id="16" name="arrow_103"/>
+          <p:cNvPr id="16" name="arrow_110"/>
           <p:cNvSpPr/>
           <p:nvPr/>
         </p:nvSpPr>
@@ -10544,7 +12728,7 @@
       </p:sp>
       <p:sp>
         <p:nvSpPr>
-          <p:cNvPr id="17" name="card_104"/>
+          <p:cNvPr id="17" name="card_111"/>
           <p:cNvSpPr/>
           <p:nvPr/>
         </p:nvSpPr>
@@ -10571,7 +12755,7 @@
       </p:sp>
       <p:sp>
         <p:nvSpPr>
-          <p:cNvPr id="18" name="text_105"/>
+          <p:cNvPr id="18" name="text_112"/>
           <p:cNvSpPr txBox="1"/>
           <p:nvPr/>
         </p:nvSpPr>
@@ -10610,7 +12794,7 @@
       </p:sp>
       <p:sp>
         <p:nvSpPr>
-          <p:cNvPr id="19" name="text_106"/>
+          <p:cNvPr id="19" name="text_113"/>
           <p:cNvSpPr txBox="1"/>
           <p:nvPr/>
         </p:nvSpPr>
@@ -10649,7 +12833,7 @@
       </p:sp>
       <p:sp>
         <p:nvSpPr>
-          <p:cNvPr id="20" name="arrow_107"/>
+          <p:cNvPr id="20" name="arrow_114"/>
           <p:cNvSpPr/>
           <p:nvPr/>
         </p:nvSpPr>
@@ -10674,7 +12858,7 @@
       </p:sp>
       <p:sp>
         <p:nvSpPr>
-          <p:cNvPr id="21" name="card_108"/>
+          <p:cNvPr id="21" name="card_115"/>
           <p:cNvSpPr/>
           <p:nvPr/>
         </p:nvSpPr>
@@ -10701,7 +12885,7 @@
       </p:sp>
       <p:sp>
         <p:nvSpPr>
-          <p:cNvPr id="22" name="text_109"/>
+          <p:cNvPr id="22" name="text_116"/>
           <p:cNvSpPr txBox="1"/>
           <p:nvPr/>
         </p:nvSpPr>
@@ -10740,7 +12924,7 @@
       </p:sp>
       <p:sp>
         <p:nvSpPr>
-          <p:cNvPr id="23" name="text_110"/>
+          <p:cNvPr id="23" name="text_117"/>
           <p:cNvSpPr txBox="1"/>
           <p:nvPr/>
         </p:nvSpPr>
@@ -10779,7 +12963,7 @@
       </p:sp>
       <p:sp>
         <p:nvSpPr>
-          <p:cNvPr id="24" name="card_111"/>
+          <p:cNvPr id="24" name="card_118"/>
           <p:cNvSpPr/>
           <p:nvPr/>
         </p:nvSpPr>
@@ -10806,7 +12990,7 @@
       </p:sp>
       <p:sp>
         <p:nvSpPr>
-          <p:cNvPr id="25" name="text_112"/>
+          <p:cNvPr id="25" name="text_119"/>
           <p:cNvSpPr txBox="1"/>
           <p:nvPr/>
         </p:nvSpPr>
@@ -10859,7 +13043,7 @@
       </p:sp>
       <p:sp>
         <p:nvSpPr>
-          <p:cNvPr id="26" name="card_113"/>
+          <p:cNvPr id="26" name="card_120"/>
           <p:cNvSpPr/>
           <p:nvPr/>
         </p:nvSpPr>
@@ -10886,7 +13070,7 @@
       </p:sp>
       <p:sp>
         <p:nvSpPr>
-          <p:cNvPr id="27" name="text_114"/>
+          <p:cNvPr id="27" name="text_121"/>
           <p:cNvSpPr txBox="1"/>
           <p:nvPr/>
         </p:nvSpPr>
@@ -10925,7 +13109,7 @@
       </p:sp>
       <p:sp>
         <p:nvSpPr>
-          <p:cNvPr id="28" name="list_115"/>
+          <p:cNvPr id="28" name="list_122"/>
           <p:cNvSpPr txBox="1"/>
           <p:nvPr/>
         </p:nvSpPr>
@@ -10989,7 +13173,7 @@
       </p:sp>
       <p:sp>
         <p:nvSpPr>
-          <p:cNvPr id="29" name="card_116"/>
+          <p:cNvPr id="29" name="card_123"/>
           <p:cNvSpPr/>
           <p:nvPr/>
         </p:nvSpPr>
@@ -11016,7 +13200,7 @@
       </p:sp>
       <p:sp>
         <p:nvSpPr>
-          <p:cNvPr id="30" name="text_117"/>
+          <p:cNvPr id="30" name="text_124"/>
           <p:cNvSpPr txBox="1"/>
           <p:nvPr/>
         </p:nvSpPr>
@@ -11055,7 +13239,7 @@
       </p:sp>
       <p:sp>
         <p:nvSpPr>
-          <p:cNvPr id="31" name="list_118"/>
+          <p:cNvPr id="31" name="list_125"/>
           <p:cNvSpPr txBox="1"/>
           <p:nvPr/>
         </p:nvSpPr>
@@ -11119,7 +13303,7 @@
       </p:sp>
       <p:sp>
         <p:nvSpPr>
-          <p:cNvPr id="32" name="card_119"/>
+          <p:cNvPr id="32" name="card_126"/>
           <p:cNvSpPr/>
           <p:nvPr/>
         </p:nvSpPr>
@@ -11146,7 +13330,7 @@
       </p:sp>
       <p:sp>
         <p:nvSpPr>
-          <p:cNvPr id="33" name="text_120"/>
+          <p:cNvPr id="33" name="text_127"/>
           <p:cNvSpPr txBox="1"/>
           <p:nvPr/>
         </p:nvSpPr>
@@ -11185,7 +13369,7 @@
       </p:sp>
       <p:sp>
         <p:nvSpPr>
-          <p:cNvPr id="34" name="list_121"/>
+          <p:cNvPr id="34" name="list_128"/>
           <p:cNvSpPr txBox="1"/>
           <p:nvPr/>
         </p:nvSpPr>
@@ -11289,7 +13473,7 @@
             <a:pPr algn="r"/>
             <a:fld id="{F7021451-1387-4CA6-816F-3879F97B5CBC}" type="slidenum">
               <a:rPr b="0" lang="en-US"/>
-              <a:t>14</a:t>
+              <a:t>15</a:t>
             </a:fld>
             <a:endParaRPr lang="en-US"/>
           </a:p>
@@ -11303,9 +13487,9 @@
 </p:sld>
 </file>
 
-<file path=ppt/slides/slide15.xml><?xml version="1.0" encoding="utf-8"?>
+<file path=ppt/slides/slide16.xml><?xml version="1.0" encoding="utf-8"?>
 <p:sld xmlns:a="http://schemas.openxmlformats.org/drawingml/2006/main" xmlns:r="http://schemas.openxmlformats.org/officeDocument/2006/relationships" xmlns:p="http://schemas.openxmlformats.org/presentationml/2006/main">
-  <p:cSld name="Slide 15">
+  <p:cSld name="Slide 16">
     <p:spTree>
       <p:nvGrpSpPr>
         <p:cNvPr id="1" name=""/>
@@ -11404,7 +13588,7 @@
       </p:sp>
       <p:sp>
         <p:nvSpPr>
-          <p:cNvPr id="5" name="text_122"/>
+          <p:cNvPr id="5" name="text_129"/>
           <p:cNvSpPr txBox="1"/>
           <p:nvPr/>
         </p:nvSpPr>
@@ -11443,7 +13627,7 @@
       </p:sp>
       <p:sp>
         <p:nvSpPr>
-          <p:cNvPr id="6" name="text_123"/>
+          <p:cNvPr id="6" name="text_130"/>
           <p:cNvSpPr txBox="1"/>
           <p:nvPr/>
         </p:nvSpPr>
@@ -11482,7 +13666,7 @@
       </p:sp>
       <p:sp>
         <p:nvSpPr>
-          <p:cNvPr id="7" name="text_124"/>
+          <p:cNvPr id="7" name="text_131"/>
           <p:cNvSpPr txBox="1"/>
           <p:nvPr/>
         </p:nvSpPr>
@@ -11521,7 +13705,7 @@
       </p:sp>
       <p:sp>
         <p:nvSpPr>
-          <p:cNvPr id="8" name="text_125"/>
+          <p:cNvPr id="8" name="text_132"/>
           <p:cNvSpPr txBox="1"/>
           <p:nvPr/>
         </p:nvSpPr>
@@ -11560,7 +13744,7 @@
       </p:sp>
       <p:sp>
         <p:nvSpPr>
-          <p:cNvPr id="9" name="card_126"/>
+          <p:cNvPr id="9" name="card_133"/>
           <p:cNvSpPr/>
           <p:nvPr/>
         </p:nvSpPr>
@@ -11587,7 +13771,7 @@
       </p:sp>
       <p:sp>
         <p:nvSpPr>
-          <p:cNvPr id="10" name="text_127"/>
+          <p:cNvPr id="10" name="text_134"/>
           <p:cNvSpPr txBox="1"/>
           <p:nvPr/>
         </p:nvSpPr>
@@ -11626,7 +13810,7 @@
       </p:sp>
       <p:sp>
         <p:nvSpPr>
-          <p:cNvPr id="11" name="text_128"/>
+          <p:cNvPr id="11" name="text_135"/>
           <p:cNvSpPr txBox="1"/>
           <p:nvPr/>
         </p:nvSpPr>
@@ -11665,7 +13849,7 @@
       </p:sp>
       <p:sp>
         <p:nvSpPr>
-          <p:cNvPr id="12" name="card_129"/>
+          <p:cNvPr id="12" name="card_136"/>
           <p:cNvSpPr/>
           <p:nvPr/>
         </p:nvSpPr>
@@ -11692,7 +13876,7 @@
       </p:sp>
       <p:sp>
         <p:nvSpPr>
-          <p:cNvPr id="13" name="text_130"/>
+          <p:cNvPr id="13" name="text_137"/>
           <p:cNvSpPr txBox="1"/>
           <p:nvPr/>
         </p:nvSpPr>
@@ -11731,7 +13915,7 @@
       </p:sp>
       <p:sp>
         <p:nvSpPr>
-          <p:cNvPr id="14" name="text_131"/>
+          <p:cNvPr id="14" name="text_138"/>
           <p:cNvSpPr txBox="1"/>
           <p:nvPr/>
         </p:nvSpPr>
@@ -11770,7 +13954,7 @@
       </p:sp>
       <p:sp>
         <p:nvSpPr>
-          <p:cNvPr id="15" name="card_132"/>
+          <p:cNvPr id="15" name="card_139"/>
           <p:cNvSpPr/>
           <p:nvPr/>
         </p:nvSpPr>
@@ -11797,7 +13981,7 @@
       </p:sp>
       <p:sp>
         <p:nvSpPr>
-          <p:cNvPr id="16" name="text_133"/>
+          <p:cNvPr id="16" name="text_140"/>
           <p:cNvSpPr txBox="1"/>
           <p:nvPr/>
         </p:nvSpPr>
@@ -11836,7 +14020,7 @@
       </p:sp>
       <p:sp>
         <p:nvSpPr>
-          <p:cNvPr id="17" name="text_134"/>
+          <p:cNvPr id="17" name="text_141"/>
           <p:cNvSpPr txBox="1"/>
           <p:nvPr/>
         </p:nvSpPr>
@@ -11875,7 +14059,7 @@
       </p:sp>
       <p:sp>
         <p:nvSpPr>
-          <p:cNvPr id="18" name="card_135"/>
+          <p:cNvPr id="18" name="card_142"/>
           <p:cNvSpPr/>
           <p:nvPr/>
         </p:nvSpPr>
@@ -11902,7 +14086,7 @@
       </p:sp>
       <p:sp>
         <p:nvSpPr>
-          <p:cNvPr id="19" name="text_136"/>
+          <p:cNvPr id="19" name="text_143"/>
           <p:cNvSpPr txBox="1"/>
           <p:nvPr/>
         </p:nvSpPr>
@@ -11941,7 +14125,7 @@
       </p:sp>
       <p:sp>
         <p:nvSpPr>
-          <p:cNvPr id="20" name="text_137"/>
+          <p:cNvPr id="20" name="text_144"/>
           <p:cNvSpPr txBox="1"/>
           <p:nvPr/>
         </p:nvSpPr>
@@ -11980,7 +14164,7 @@
       </p:sp>
       <p:sp>
         <p:nvSpPr>
-          <p:cNvPr id="21" name="text_138"/>
+          <p:cNvPr id="21" name="text_145"/>
           <p:cNvSpPr txBox="1"/>
           <p:nvPr/>
         </p:nvSpPr>
@@ -12019,7 +14203,7 @@
       </p:sp>
       <p:sp>
         <p:nvSpPr>
-          <p:cNvPr id="22" name="card_139"/>
+          <p:cNvPr id="22" name="card_146"/>
           <p:cNvSpPr/>
           <p:nvPr/>
         </p:nvSpPr>
@@ -12046,7 +14230,7 @@
       </p:sp>
       <p:sp>
         <p:nvSpPr>
-          <p:cNvPr id="23" name="text_140"/>
+          <p:cNvPr id="23" name="text_147"/>
           <p:cNvSpPr txBox="1"/>
           <p:nvPr/>
         </p:nvSpPr>
@@ -12085,7 +14269,7 @@
       </p:sp>
       <p:sp>
         <p:nvSpPr>
-          <p:cNvPr id="24" name="list_141"/>
+          <p:cNvPr id="24" name="list_148"/>
           <p:cNvSpPr txBox="1"/>
           <p:nvPr/>
         </p:nvSpPr>
@@ -12191,7 +14375,7 @@
       </p:sp>
       <p:sp>
         <p:nvSpPr>
-          <p:cNvPr id="25" name="card_142"/>
+          <p:cNvPr id="25" name="card_149"/>
           <p:cNvSpPr/>
           <p:nvPr/>
         </p:nvSpPr>
@@ -12218,7 +14402,7 @@
       </p:sp>
       <p:sp>
         <p:nvSpPr>
-          <p:cNvPr id="26" name="text_143"/>
+          <p:cNvPr id="26" name="text_150"/>
           <p:cNvSpPr txBox="1"/>
           <p:nvPr/>
         </p:nvSpPr>
@@ -12271,7 +14455,7 @@
       </p:sp>
       <p:sp>
         <p:nvSpPr>
-          <p:cNvPr id="27" name="card_144"/>
+          <p:cNvPr id="27" name="card_151"/>
           <p:cNvSpPr/>
           <p:nvPr/>
         </p:nvSpPr>
@@ -12298,7 +14482,7 @@
       </p:sp>
       <p:sp>
         <p:nvSpPr>
-          <p:cNvPr id="28" name="text_145"/>
+          <p:cNvPr id="28" name="text_152"/>
           <p:cNvSpPr txBox="1"/>
           <p:nvPr/>
         </p:nvSpPr>
@@ -12391,7 +14575,7 @@
             <a:pPr algn="r"/>
             <a:fld id="{F7021451-1387-4CA6-816F-3879F97B5CBC}" type="slidenum">
               <a:rPr b="0" lang="en-US"/>
-              <a:t>15</a:t>
+              <a:t>16</a:t>
             </a:fld>
             <a:endParaRPr lang="en-US"/>
           </a:p>
@@ -12405,9 +14589,9 @@
 </p:sld>
 </file>
 
-<file path=ppt/slides/slide16.xml><?xml version="1.0" encoding="utf-8"?>
+<file path=ppt/slides/slide17.xml><?xml version="1.0" encoding="utf-8"?>
 <p:sld xmlns:a="http://schemas.openxmlformats.org/drawingml/2006/main" xmlns:r="http://schemas.openxmlformats.org/officeDocument/2006/relationships" xmlns:p="http://schemas.openxmlformats.org/presentationml/2006/main">
-  <p:cSld name="Slide 16">
+  <p:cSld name="Slide 17">
     <p:spTree>
       <p:nvGrpSpPr>
         <p:cNvPr id="1" name=""/>
@@ -12506,7 +14690,7 @@
       </p:sp>
       <p:graphicFrame>
         <p:nvGraphicFramePr>
-          <p:cNvPr id="5" name="chart_146" descr=""/>
+          <p:cNvPr id="5" name="chart_153" descr=""/>
           <p:cNvGraphicFramePr/>
           <p:nvPr/>
         </p:nvGraphicFramePr>
@@ -12522,7 +14706,7 @@
       </p:graphicFrame>
       <p:sp>
         <p:nvSpPr>
-          <p:cNvPr id="6" name="card_147"/>
+          <p:cNvPr id="6" name="card_154"/>
           <p:cNvSpPr/>
           <p:nvPr/>
         </p:nvSpPr>
@@ -12549,7 +14733,7 @@
       </p:sp>
       <p:sp>
         <p:nvSpPr>
-          <p:cNvPr id="7" name="text_148"/>
+          <p:cNvPr id="7" name="text_155"/>
           <p:cNvSpPr txBox="1"/>
           <p:nvPr/>
         </p:nvSpPr>
@@ -12602,7 +14786,7 @@
       </p:sp>
       <p:graphicFrame>
         <p:nvGraphicFramePr>
-          <p:cNvPr id="17" name="table_149"/>
+          <p:cNvPr id="18" name="table_156"/>
           <p:cNvGraphicFramePr>
             <a:graphicFrameLocks noGrp="1"/>
           </p:cNvGraphicFramePr>
@@ -13968,7 +16152,7 @@
       </p:graphicFrame>
       <p:sp>
         <p:nvSpPr>
-          <p:cNvPr id="9" name="card_150"/>
+          <p:cNvPr id="9" name="card_157"/>
           <p:cNvSpPr/>
           <p:nvPr/>
         </p:nvSpPr>
@@ -13995,7 +16179,7 @@
       </p:sp>
       <p:sp>
         <p:nvSpPr>
-          <p:cNvPr id="10" name="list_151"/>
+          <p:cNvPr id="10" name="list_158"/>
           <p:cNvSpPr txBox="1"/>
           <p:nvPr/>
         </p:nvSpPr>
@@ -14120,7 +16304,7 @@
             <a:pPr algn="r"/>
             <a:fld id="{F7021451-1387-4CA6-816F-3879F97B5CBC}" type="slidenum">
               <a:rPr b="0" lang="en-US"/>
-              <a:t>16</a:t>
+              <a:t>17</a:t>
             </a:fld>
             <a:endParaRPr lang="en-US"/>
           </a:p>
@@ -14134,9 +16318,9 @@
 </p:sld>
 </file>
 
-<file path=ppt/slides/slide17.xml><?xml version="1.0" encoding="utf-8"?>
+<file path=ppt/slides/slide18.xml><?xml version="1.0" encoding="utf-8"?>
 <p:sld xmlns:a="http://schemas.openxmlformats.org/drawingml/2006/main" xmlns:r="http://schemas.openxmlformats.org/officeDocument/2006/relationships" xmlns:p="http://schemas.openxmlformats.org/presentationml/2006/main">
-  <p:cSld name="Slide 17">
+  <p:cSld name="Slide 18">
     <p:spTree>
       <p:nvGrpSpPr>
         <p:cNvPr id="1" name=""/>
@@ -14235,7 +16419,7 @@
       </p:sp>
       <p:graphicFrame>
         <p:nvGraphicFramePr>
-          <p:cNvPr id="5" name="chart_152" descr=""/>
+          <p:cNvPr id="5" name="chart_159" descr=""/>
           <p:cNvGraphicFramePr/>
           <p:nvPr/>
         </p:nvGraphicFramePr>
@@ -14251,7 +16435,7 @@
       </p:graphicFrame>
       <p:sp>
         <p:nvSpPr>
-          <p:cNvPr id="6" name="card_153"/>
+          <p:cNvPr id="6" name="card_160"/>
           <p:cNvSpPr/>
           <p:nvPr/>
         </p:nvSpPr>
@@ -14278,7 +16462,7 @@
       </p:sp>
       <p:sp>
         <p:nvSpPr>
-          <p:cNvPr id="7" name="text_154"/>
+          <p:cNvPr id="7" name="text_161"/>
           <p:cNvSpPr txBox="1"/>
           <p:nvPr/>
         </p:nvSpPr>
@@ -14317,7 +16501,7 @@
       </p:sp>
       <p:sp>
         <p:nvSpPr>
-          <p:cNvPr id="8" name="card_155"/>
+          <p:cNvPr id="8" name="card_162"/>
           <p:cNvSpPr/>
           <p:nvPr/>
         </p:nvSpPr>
@@ -14344,7 +16528,7 @@
       </p:sp>
       <p:sp>
         <p:nvSpPr>
-          <p:cNvPr id="9" name="text_156"/>
+          <p:cNvPr id="9" name="text_163"/>
           <p:cNvSpPr txBox="1"/>
           <p:nvPr/>
         </p:nvSpPr>
@@ -14383,7 +16567,7 @@
       </p:sp>
       <p:sp>
         <p:nvSpPr>
-          <p:cNvPr id="10" name="text_157"/>
+          <p:cNvPr id="10" name="text_164"/>
           <p:cNvSpPr txBox="1"/>
           <p:nvPr/>
         </p:nvSpPr>
@@ -14422,7 +16606,7 @@
       </p:sp>
       <p:sp>
         <p:nvSpPr>
-          <p:cNvPr id="11" name="text_158"/>
+          <p:cNvPr id="11" name="text_165"/>
           <p:cNvSpPr txBox="1"/>
           <p:nvPr/>
         </p:nvSpPr>
@@ -14461,7 +16645,7 @@
       </p:sp>
       <p:sp>
         <p:nvSpPr>
-          <p:cNvPr id="12" name="card_159"/>
+          <p:cNvPr id="12" name="card_166"/>
           <p:cNvSpPr/>
           <p:nvPr/>
         </p:nvSpPr>
@@ -14488,7 +16672,7 @@
       </p:sp>
       <p:sp>
         <p:nvSpPr>
-          <p:cNvPr id="13" name="text_160"/>
+          <p:cNvPr id="13" name="text_167"/>
           <p:cNvSpPr txBox="1"/>
           <p:nvPr/>
         </p:nvSpPr>
@@ -14527,7 +16711,7 @@
       </p:sp>
       <p:sp>
         <p:nvSpPr>
-          <p:cNvPr id="14" name="list_161"/>
+          <p:cNvPr id="14" name="list_168"/>
           <p:cNvSpPr txBox="1"/>
           <p:nvPr/>
         </p:nvSpPr>
@@ -14652,7 +16836,7 @@
             <a:pPr algn="r"/>
             <a:fld id="{F7021451-1387-4CA6-816F-3879F97B5CBC}" type="slidenum">
               <a:rPr b="0" lang="en-US"/>
-              <a:t>17</a:t>
+              <a:t>18</a:t>
             </a:fld>
             <a:endParaRPr lang="en-US"/>
           </a:p>
@@ -14666,9 +16850,9 @@
 </p:sld>
 </file>
 
-<file path=ppt/slides/slide18.xml><?xml version="1.0" encoding="utf-8"?>
+<file path=ppt/slides/slide19.xml><?xml version="1.0" encoding="utf-8"?>
 <p:sld xmlns:a="http://schemas.openxmlformats.org/drawingml/2006/main" xmlns:r="http://schemas.openxmlformats.org/officeDocument/2006/relationships" xmlns:p="http://schemas.openxmlformats.org/presentationml/2006/main">
-  <p:cSld name="Slide 18">
+  <p:cSld name="Slide 19">
     <p:spTree>
       <p:nvGrpSpPr>
         <p:cNvPr id="1" name=""/>
@@ -14767,7 +16951,7 @@
       </p:sp>
       <p:graphicFrame>
         <p:nvGraphicFramePr>
-          <p:cNvPr id="19" name="table_162"/>
+          <p:cNvPr id="20" name="table_169"/>
           <p:cNvGraphicFramePr>
             <a:graphicFrameLocks noGrp="1"/>
           </p:cNvGraphicFramePr>
@@ -16186,7 +18370,7 @@
       </p:graphicFrame>
       <p:sp>
         <p:nvSpPr>
-          <p:cNvPr id="6" name="card_163"/>
+          <p:cNvPr id="6" name="card_170"/>
           <p:cNvSpPr/>
           <p:nvPr/>
         </p:nvSpPr>
@@ -16213,7 +18397,7 @@
       </p:sp>
       <p:sp>
         <p:nvSpPr>
-          <p:cNvPr id="7" name="text_164"/>
+          <p:cNvPr id="7" name="text_171"/>
           <p:cNvSpPr txBox="1"/>
           <p:nvPr/>
         </p:nvSpPr>
@@ -16292,7 +18476,7 @@
             <a:pPr algn="r"/>
             <a:fld id="{F7021451-1387-4CA6-816F-3879F97B5CBC}" type="slidenum">
               <a:rPr b="0" lang="en-US"/>
-              <a:t>18</a:t>
+              <a:t>19</a:t>
             </a:fld>
             <a:endParaRPr lang="en-US"/>
           </a:p>
@@ -16306,9 +18490,9 @@
 </p:sld>
 </file>
 
-<file path=ppt/slides/slide19.xml><?xml version="1.0" encoding="utf-8"?>
+<file path=ppt/slides/slide2.xml><?xml version="1.0" encoding="utf-8"?>
 <p:sld xmlns:a="http://schemas.openxmlformats.org/drawingml/2006/main" xmlns:r="http://schemas.openxmlformats.org/officeDocument/2006/relationships" xmlns:p="http://schemas.openxmlformats.org/presentationml/2006/main">
-  <p:cSld name="Slide 19">
+  <p:cSld name="Slide 2">
     <p:spTree>
       <p:nvGrpSpPr>
         <p:cNvPr id="1" name=""/>
@@ -16358,7 +18542,7 @@
                 <a:ea typeface="Calibri" pitchFamily="34" charset="-122"/>
                 <a:cs typeface="Calibri" pitchFamily="34" charset="-120"/>
               </a:rPr>
-              <a:t>PART 07 · NEXT STEPS</a:t>
+              <a:t>SUMMARY</a:t>
             </a:r>
             <a:endParaRPr lang="en-US" sz="1100" dirty="0"/>
           </a:p>
@@ -16399,7 +18583,7 @@
                 <a:ea typeface="Cambria" pitchFamily="34" charset="-122"/>
                 <a:cs typeface="Cambria" pitchFamily="34" charset="-120"/>
               </a:rPr>
-              <a:t>Plan to Review 3 (week 13)</a:t>
+              <a:t>Four results of this milestone</a:t>
             </a:r>
             <a:endParaRPr lang="en-US" sz="3200" dirty="0"/>
           </a:p>
@@ -16407,144 +18591,14 @@
       </p:sp>
       <p:sp>
         <p:nvSpPr>
-          <p:cNvPr id="5" name="card_165"/>
+          <p:cNvPr id="5" name="card_1"/>
           <p:cNvSpPr/>
           <p:nvPr/>
         </p:nvSpPr>
         <p:spPr>
           <a:xfrm>
             <a:off x="548640" y="1600200"/>
-            <a:ext cx="2533574" cy="3108960"/>
-          </a:xfrm>
-          <a:prstGeom prst="roundRect">
-            <a:avLst>
-              <a:gd name="adj" fmla="val 2887"/>
-            </a:avLst>
-          </a:prstGeom>
-          <a:solidFill>
-            <a:schemeClr val="accent4"/>
-          </a:solidFill>
-          <a:ln w="12700">
-            <a:solidFill>
-              <a:schemeClr val="accent4"/>
-            </a:solidFill>
-            <a:prstDash val="solid"/>
-          </a:ln>
-        </p:spPr>
-      </p:sp>
-      <p:sp>
-        <p:nvSpPr>
-          <p:cNvPr id="6" name="dot_166"/>
-          <p:cNvSpPr/>
-          <p:nvPr/>
-        </p:nvSpPr>
-        <p:spPr>
-          <a:xfrm>
-            <a:off x="822960" y="1874520"/>
-            <a:ext cx="868680" cy="868680"/>
-          </a:xfrm>
-          <a:prstGeom prst="ellipse">
-            <a:avLst/>
-          </a:prstGeom>
-          <a:solidFill>
-            <a:srgbClr val="1C7293"/>
-          </a:solidFill>
-          <a:ln w="12700">
-            <a:solidFill>
-              <a:srgbClr val="FFFFFF"/>
-            </a:solidFill>
-            <a:prstDash val="solid"/>
-          </a:ln>
-        </p:spPr>
-      </p:sp>
-      <p:sp>
-        <p:nvSpPr>
-          <p:cNvPr id="7" name="text_167"/>
-          <p:cNvSpPr txBox="1"/>
-          <p:nvPr/>
-        </p:nvSpPr>
-        <p:spPr>
-          <a:xfrm>
-            <a:off x="822960" y="1874520"/>
-            <a:ext cx="868680" cy="868680"/>
-          </a:xfrm>
-          <a:prstGeom prst="rect">
-            <a:avLst/>
-          </a:prstGeom>
-          <a:noFill/>
-          <a:ln/>
-        </p:spPr>
-        <p:txBody>
-          <a:bodyPr wrap="square" lIns="0" tIns="0" rIns="0" bIns="0" rtlCol="0" anchor="ctr"/>
-          <a:lstStyle/>
-          <a:p>
-            <a:pPr algn="ctr" indent="0" marL="0">
-              <a:buNone/>
-            </a:pPr>
-            <a:r>
-              <a:rPr lang="en-US" sz="1400" b="1" dirty="0">
-                <a:solidFill>
-                  <a:schemeClr val="bg1"/>
-                </a:solidFill>
-                <a:latin typeface="Calibri" pitchFamily="34" charset="0"/>
-                <a:ea typeface="Calibri" pitchFamily="34" charset="-122"/>
-                <a:cs typeface="Calibri" pitchFamily="34" charset="-120"/>
-              </a:rPr>
-              <a:t>W10</a:t>
-            </a:r>
-            <a:endParaRPr lang="en-US" sz="1400" dirty="0"/>
-          </a:p>
-        </p:txBody>
-      </p:sp>
-      <p:sp>
-        <p:nvSpPr>
-          <p:cNvPr id="8" name="text_168"/>
-          <p:cNvSpPr txBox="1"/>
-          <p:nvPr/>
-        </p:nvSpPr>
-        <p:spPr>
-          <a:xfrm>
-            <a:off x="822960" y="2971800"/>
-            <a:ext cx="1984934" cy="1554480"/>
-          </a:xfrm>
-          <a:prstGeom prst="rect">
-            <a:avLst/>
-          </a:prstGeom>
-          <a:noFill/>
-          <a:ln/>
-        </p:spPr>
-        <p:txBody>
-          <a:bodyPr wrap="square" lIns="0" tIns="0" rIns="0" bIns="0" rtlCol="0" anchor="t"/>
-          <a:lstStyle/>
-          <a:p>
-            <a:pPr indent="0" marL="0">
-              <a:buNone/>
-            </a:pPr>
-            <a:r>
-              <a:rPr lang="en-US" sz="1500" dirty="0">
-                <a:solidFill>
-                  <a:schemeClr val="tx1"/>
-                </a:solidFill>
-                <a:latin typeface="Calibri" pitchFamily="34" charset="0"/>
-                <a:ea typeface="Calibri" pitchFamily="34" charset="-122"/>
-                <a:cs typeface="Calibri" pitchFamily="34" charset="-120"/>
-              </a:rPr>
-              <a:t>OCR-aware QLoRA on the full ViTextVQA train set; LoRA rank and target-module ablations (H3, H4)</a:t>
-            </a:r>
-            <a:endParaRPr lang="en-US" sz="1500" dirty="0"/>
-          </a:p>
-        </p:txBody>
-      </p:sp>
-      <p:sp>
-        <p:nvSpPr>
-          <p:cNvPr id="9" name="card_169"/>
-          <p:cNvSpPr/>
-          <p:nvPr/>
-        </p:nvSpPr>
-        <p:spPr>
-          <a:xfrm>
-            <a:off x="3402254" y="1600200"/>
-            <a:ext cx="2533574" cy="3108960"/>
+            <a:ext cx="2533574" cy="2651760"/>
           </a:xfrm>
           <a:prstGeom prst="roundRect">
             <a:avLst>
@@ -16564,78 +18618,14 @@
       </p:sp>
       <p:sp>
         <p:nvSpPr>
-          <p:cNvPr id="10" name="dot_170"/>
-          <p:cNvSpPr/>
+          <p:cNvPr id="6" name="text_2"/>
+          <p:cNvSpPr txBox="1"/>
           <p:nvPr/>
         </p:nvSpPr>
         <p:spPr>
           <a:xfrm>
-            <a:off x="3676574" y="1874520"/>
-            <a:ext cx="868680" cy="868680"/>
-          </a:xfrm>
-          <a:prstGeom prst="ellipse">
-            <a:avLst/>
-          </a:prstGeom>
-          <a:solidFill>
-            <a:srgbClr val="13294B"/>
-          </a:solidFill>
-          <a:ln w="12700">
-            <a:solidFill>
-              <a:srgbClr val="FFFFFF"/>
-            </a:solidFill>
-            <a:prstDash val="solid"/>
-          </a:ln>
-        </p:spPr>
-      </p:sp>
-      <p:sp>
-        <p:nvSpPr>
-          <p:cNvPr id="11" name="text_171"/>
-          <p:cNvSpPr txBox="1"/>
-          <p:nvPr/>
-        </p:nvSpPr>
-        <p:spPr>
-          <a:xfrm>
-            <a:off x="3676574" y="1874520"/>
-            <a:ext cx="868680" cy="868680"/>
-          </a:xfrm>
-          <a:prstGeom prst="rect">
-            <a:avLst/>
-          </a:prstGeom>
-          <a:noFill/>
-          <a:ln/>
-        </p:spPr>
-        <p:txBody>
-          <a:bodyPr wrap="square" lIns="0" tIns="0" rIns="0" bIns="0" rtlCol="0" anchor="ctr"/>
-          <a:lstStyle/>
-          <a:p>
-            <a:pPr algn="ctr" indent="0" marL="0">
-              <a:buNone/>
-            </a:pPr>
-            <a:r>
-              <a:rPr lang="en-US" sz="1400" b="1" dirty="0">
-                <a:solidFill>
-                  <a:schemeClr val="bg1"/>
-                </a:solidFill>
-                <a:latin typeface="Calibri" pitchFamily="34" charset="0"/>
-                <a:ea typeface="Calibri" pitchFamily="34" charset="-122"/>
-                <a:cs typeface="Calibri" pitchFamily="34" charset="-120"/>
-              </a:rPr>
-              <a:t>W11</a:t>
-            </a:r>
-            <a:endParaRPr lang="en-US" sz="1400" dirty="0"/>
-          </a:p>
-        </p:txBody>
-      </p:sp>
-      <p:sp>
-        <p:nvSpPr>
-          <p:cNvPr id="12" name="text_172"/>
-          <p:cNvSpPr txBox="1"/>
-          <p:nvPr/>
-        </p:nvSpPr>
-        <p:spPr>
-          <a:xfrm>
-            <a:off x="3676574" y="2971800"/>
-            <a:ext cx="1984934" cy="1554480"/>
+            <a:off x="822960" y="2011680"/>
+            <a:ext cx="1984934" cy="822960"/>
           </a:xfrm>
           <a:prstGeom prst="rect">
             <a:avLst/>
@@ -16651,7 +18641,46 @@
               <a:buNone/>
             </a:pPr>
             <a:r>
-              <a:rPr lang="en-US" sz="1500" dirty="0">
+              <a:rPr lang="en-US" sz="3600" b="1" dirty="0">
+                <a:solidFill>
+                  <a:schemeClr val="accent1"/>
+                </a:solidFill>
+                <a:latin typeface="Cambria" pitchFamily="34" charset="0"/>
+                <a:ea typeface="Cambria" pitchFamily="34" charset="-122"/>
+                <a:cs typeface="Cambria" pitchFamily="34" charset="-120"/>
+              </a:rPr>
+              <a:t>79.6</a:t>
+            </a:r>
+            <a:endParaRPr lang="en-US" sz="3600" dirty="0"/>
+          </a:p>
+        </p:txBody>
+      </p:sp>
+      <p:sp>
+        <p:nvSpPr>
+          <p:cNvPr id="7" name="text_3"/>
+          <p:cNvSpPr txBox="1"/>
+          <p:nvPr/>
+        </p:nvSpPr>
+        <p:spPr>
+          <a:xfrm>
+            <a:off x="822960" y="2880360"/>
+            <a:ext cx="1984934" cy="822960"/>
+          </a:xfrm>
+          <a:prstGeom prst="rect">
+            <a:avLst/>
+          </a:prstGeom>
+          <a:noFill/>
+          <a:ln/>
+        </p:spPr>
+        <p:txBody>
+          <a:bodyPr wrap="square" lIns="0" tIns="0" rIns="0" bIns="0" rtlCol="0" anchor="t"/>
+          <a:lstStyle/>
+          <a:p>
+            <a:pPr indent="0" marL="0">
+              <a:buNone/>
+            </a:pPr>
+            <a:r>
+              <a:rPr lang="en-US" sz="1400" dirty="0">
                 <a:solidFill>
                   <a:schemeClr val="tx1"/>
                 </a:solidFill>
@@ -16659,22 +18688,22 @@
                 <a:ea typeface="Calibri" pitchFamily="34" charset="-122"/>
                 <a:cs typeface="Calibri" pitchFamily="34" charset="-120"/>
               </a:rPr>
-              <a:t>Shared adapter for both datasets (H5); systematic hallucination evaluation incl. B3 (H8)</a:t>
+              <a:t>Pipeline check — TextVQA val, Qwen2.5-VL-3B; the official report gives 79.3</a:t>
             </a:r>
-            <a:endParaRPr lang="en-US" sz="1500" dirty="0"/>
+            <a:endParaRPr lang="en-US" sz="1400" dirty="0"/>
           </a:p>
         </p:txBody>
       </p:sp>
       <p:sp>
         <p:nvSpPr>
-          <p:cNvPr id="13" name="card_173"/>
+          <p:cNvPr id="8" name="card_4"/>
           <p:cNvSpPr/>
           <p:nvPr/>
         </p:nvSpPr>
         <p:spPr>
           <a:xfrm>
-            <a:off x="6255868" y="1600200"/>
-            <a:ext cx="2533574" cy="3108960"/>
+            <a:off x="3402254" y="1600200"/>
+            <a:ext cx="2533574" cy="2651760"/>
           </a:xfrm>
           <a:prstGeom prst="roundRect">
             <a:avLst>
@@ -16694,78 +18723,14 @@
       </p:sp>
       <p:sp>
         <p:nvSpPr>
-          <p:cNvPr id="14" name="dot_174"/>
-          <p:cNvSpPr/>
+          <p:cNvPr id="9" name="text_5"/>
+          <p:cNvSpPr txBox="1"/>
           <p:nvPr/>
         </p:nvSpPr>
         <p:spPr>
           <a:xfrm>
-            <a:off x="6530188" y="1874520"/>
-            <a:ext cx="868680" cy="868680"/>
-          </a:xfrm>
-          <a:prstGeom prst="ellipse">
-            <a:avLst/>
-          </a:prstGeom>
-          <a:solidFill>
-            <a:srgbClr val="13294B"/>
-          </a:solidFill>
-          <a:ln w="12700">
-            <a:solidFill>
-              <a:srgbClr val="FFFFFF"/>
-            </a:solidFill>
-            <a:prstDash val="solid"/>
-          </a:ln>
-        </p:spPr>
-      </p:sp>
-      <p:sp>
-        <p:nvSpPr>
-          <p:cNvPr id="15" name="text_175"/>
-          <p:cNvSpPr txBox="1"/>
-          <p:nvPr/>
-        </p:nvSpPr>
-        <p:spPr>
-          <a:xfrm>
-            <a:off x="6530188" y="1874520"/>
-            <a:ext cx="868680" cy="868680"/>
-          </a:xfrm>
-          <a:prstGeom prst="rect">
-            <a:avLst/>
-          </a:prstGeom>
-          <a:noFill/>
-          <a:ln/>
-        </p:spPr>
-        <p:txBody>
-          <a:bodyPr wrap="square" lIns="0" tIns="0" rIns="0" bIns="0" rtlCol="0" anchor="ctr"/>
-          <a:lstStyle/>
-          <a:p>
-            <a:pPr algn="ctr" indent="0" marL="0">
-              <a:buNone/>
-            </a:pPr>
-            <a:r>
-              <a:rPr lang="en-US" sz="1400" b="1" dirty="0">
-                <a:solidFill>
-                  <a:schemeClr val="bg1"/>
-                </a:solidFill>
-                <a:latin typeface="Calibri" pitchFamily="34" charset="0"/>
-                <a:ea typeface="Calibri" pitchFamily="34" charset="-122"/>
-                <a:cs typeface="Calibri" pitchFamily="34" charset="-120"/>
-              </a:rPr>
-              <a:t>W12</a:t>
-            </a:r>
-            <a:endParaRPr lang="en-US" sz="1400" dirty="0"/>
-          </a:p>
-        </p:txBody>
-      </p:sp>
-      <p:sp>
-        <p:nvSpPr>
-          <p:cNvPr id="16" name="text_176"/>
-          <p:cNvSpPr txBox="1"/>
-          <p:nvPr/>
-        </p:nvSpPr>
-        <p:spPr>
-          <a:xfrm>
-            <a:off x="6530188" y="2971800"/>
-            <a:ext cx="1984934" cy="1554480"/>
+            <a:off x="3676574" y="2011680"/>
+            <a:ext cx="1984934" cy="822960"/>
           </a:xfrm>
           <a:prstGeom prst="rect">
             <a:avLst/>
@@ -16781,7 +18746,46 @@
               <a:buNone/>
             </a:pPr>
             <a:r>
-              <a:rPr lang="en-US" sz="1500" dirty="0">
+              <a:rPr lang="en-US" sz="3600" b="1" dirty="0">
+                <a:solidFill>
+                  <a:schemeClr val="tx2"/>
+                </a:solidFill>
+                <a:latin typeface="Cambria" pitchFamily="34" charset="0"/>
+                <a:ea typeface="Cambria" pitchFamily="34" charset="-122"/>
+                <a:cs typeface="Cambria" pitchFamily="34" charset="-120"/>
+              </a:rPr>
+              <a:t>+21.1</a:t>
+            </a:r>
+            <a:endParaRPr lang="en-US" sz="3600" dirty="0"/>
+          </a:p>
+        </p:txBody>
+      </p:sp>
+      <p:sp>
+        <p:nvSpPr>
+          <p:cNvPr id="10" name="text_6"/>
+          <p:cNvSpPr txBox="1"/>
+          <p:nvPr/>
+        </p:nvSpPr>
+        <p:spPr>
+          <a:xfrm>
+            <a:off x="3676574" y="2880360"/>
+            <a:ext cx="1984934" cy="822960"/>
+          </a:xfrm>
+          <a:prstGeom prst="rect">
+            <a:avLst/>
+          </a:prstGeom>
+          <a:noFill/>
+          <a:ln/>
+        </p:spPr>
+        <p:txBody>
+          <a:bodyPr wrap="square" lIns="0" tIns="0" rIns="0" bIns="0" rtlCol="0" anchor="t"/>
+          <a:lstStyle/>
+          <a:p>
+            <a:pPr indent="0" marL="0">
+              <a:buNone/>
+            </a:pPr>
+            <a:r>
+              <a:rPr lang="en-US" sz="1400" dirty="0">
                 <a:solidFill>
                   <a:schemeClr val="tx1"/>
                 </a:solidFill>
@@ -16789,22 +18793,22 @@
                 <a:ea typeface="Calibri" pitchFamily="34" charset="-122"/>
                 <a:cs typeface="Calibri" pitchFamily="34" charset="-120"/>
               </a:rPr>
-              <a:t>Web prototype: upload image → OCR → answer in Vietnamese</a:t>
+              <a:t>EM from QLoRA over zero-shot, full ViTextVQA test (+51.7 on ViVQA); p ≈ 0</a:t>
             </a:r>
-            <a:endParaRPr lang="en-US" sz="1500" dirty="0"/>
+            <a:endParaRPr lang="en-US" sz="1400" dirty="0"/>
           </a:p>
         </p:txBody>
       </p:sp>
       <p:sp>
         <p:nvSpPr>
-          <p:cNvPr id="17" name="card_177"/>
+          <p:cNvPr id="11" name="card_7"/>
           <p:cNvSpPr/>
           <p:nvPr/>
         </p:nvSpPr>
         <p:spPr>
           <a:xfrm>
-            <a:off x="9109481" y="1600200"/>
-            <a:ext cx="2533574" cy="3108960"/>
+            <a:off x="6255868" y="1600200"/>
+            <a:ext cx="2533574" cy="2651760"/>
           </a:xfrm>
           <a:prstGeom prst="roundRect">
             <a:avLst>
@@ -16824,24 +18828,104 @@
       </p:sp>
       <p:sp>
         <p:nvSpPr>
-          <p:cNvPr id="18" name="dot_178"/>
+          <p:cNvPr id="12" name="text_8"/>
+          <p:cNvSpPr txBox="1"/>
+          <p:nvPr/>
+        </p:nvSpPr>
+        <p:spPr>
+          <a:xfrm>
+            <a:off x="6530188" y="2011680"/>
+            <a:ext cx="1984934" cy="822960"/>
+          </a:xfrm>
+          <a:prstGeom prst="rect">
+            <a:avLst/>
+          </a:prstGeom>
+          <a:noFill/>
+          <a:ln/>
+        </p:spPr>
+        <p:txBody>
+          <a:bodyPr wrap="square" lIns="0" tIns="0" rIns="0" bIns="0" rtlCol="0" anchor="t"/>
+          <a:lstStyle/>
+          <a:p>
+            <a:pPr indent="0" marL="0">
+              <a:buNone/>
+            </a:pPr>
+            <a:r>
+              <a:rPr lang="en-US" sz="3600" b="1" dirty="0">
+                <a:solidFill>
+                  <a:schemeClr val="tx2"/>
+                </a:solidFill>
+                <a:latin typeface="Cambria" pitchFamily="34" charset="0"/>
+                <a:ea typeface="Cambria" pitchFamily="34" charset="-122"/>
+                <a:cs typeface="Cambria" pitchFamily="34" charset="-120"/>
+              </a:rPr>
+              <a:t>50.3</a:t>
+            </a:r>
+            <a:endParaRPr lang="en-US" sz="3600" dirty="0"/>
+          </a:p>
+        </p:txBody>
+      </p:sp>
+      <p:sp>
+        <p:nvSpPr>
+          <p:cNvPr id="13" name="text_9"/>
+          <p:cNvSpPr txBox="1"/>
+          <p:nvPr/>
+        </p:nvSpPr>
+        <p:spPr>
+          <a:xfrm>
+            <a:off x="6530188" y="2880360"/>
+            <a:ext cx="1984934" cy="822960"/>
+          </a:xfrm>
+          <a:prstGeom prst="rect">
+            <a:avLst/>
+          </a:prstGeom>
+          <a:noFill/>
+          <a:ln/>
+        </p:spPr>
+        <p:txBody>
+          <a:bodyPr wrap="square" lIns="0" tIns="0" rIns="0" bIns="0" rtlCol="0" anchor="t"/>
+          <a:lstStyle/>
+          <a:p>
+            <a:pPr indent="0" marL="0">
+              <a:buNone/>
+            </a:pPr>
+            <a:r>
+              <a:rPr lang="en-US" sz="1400" dirty="0">
+                <a:solidFill>
+                  <a:schemeClr val="tx1"/>
+                </a:solidFill>
+                <a:latin typeface="Calibri" pitchFamily="34" charset="0"/>
+                <a:ea typeface="Calibri" pitchFamily="34" charset="-122"/>
+                <a:cs typeface="Calibri" pitchFamily="34" charset="-120"/>
+              </a:rPr>
+              <a:t>EM on the full ViTextVQA test vs 25.5 for the published SOTA ViTextBLIP-2</a:t>
+            </a:r>
+            <a:endParaRPr lang="en-US" sz="1400" dirty="0"/>
+          </a:p>
+        </p:txBody>
+      </p:sp>
+      <p:sp>
+        <p:nvSpPr>
+          <p:cNvPr id="14" name="card_10"/>
           <p:cNvSpPr/>
           <p:nvPr/>
         </p:nvSpPr>
         <p:spPr>
           <a:xfrm>
-            <a:off x="9383801" y="1874520"/>
-            <a:ext cx="868680" cy="868680"/>
+            <a:off x="9109481" y="1600200"/>
+            <a:ext cx="2533574" cy="2651760"/>
           </a:xfrm>
-          <a:prstGeom prst="ellipse">
-            <a:avLst/>
+          <a:prstGeom prst="roundRect">
+            <a:avLst>
+              <a:gd name="adj" fmla="val 2887"/>
+            </a:avLst>
           </a:prstGeom>
           <a:solidFill>
-            <a:srgbClr val="13294B"/>
+            <a:schemeClr val="accent5"/>
           </a:solidFill>
           <a:ln w="12700">
             <a:solidFill>
-              <a:srgbClr val="FFFFFF"/>
+              <a:schemeClr val="accent5"/>
             </a:solidFill>
             <a:prstDash val="solid"/>
           </a:ln>
@@ -16849,14 +18933,119 @@
       </p:sp>
       <p:sp>
         <p:nvSpPr>
-          <p:cNvPr id="19" name="text_179"/>
+          <p:cNvPr id="15" name="text_11"/>
           <p:cNvSpPr txBox="1"/>
           <p:nvPr/>
         </p:nvSpPr>
         <p:spPr>
           <a:xfrm>
-            <a:off x="9383801" y="1874520"/>
-            <a:ext cx="868680" cy="868680"/>
+            <a:off x="9383801" y="2011680"/>
+            <a:ext cx="1984934" cy="822960"/>
+          </a:xfrm>
+          <a:prstGeom prst="rect">
+            <a:avLst/>
+          </a:prstGeom>
+          <a:noFill/>
+          <a:ln/>
+        </p:spPr>
+        <p:txBody>
+          <a:bodyPr wrap="square" lIns="0" tIns="0" rIns="0" bIns="0" rtlCol="0" anchor="t"/>
+          <a:lstStyle/>
+          <a:p>
+            <a:pPr indent="0" marL="0">
+              <a:buNone/>
+            </a:pPr>
+            <a:r>
+              <a:rPr lang="en-US" sz="3600" b="1" dirty="0">
+                <a:solidFill>
+                  <a:schemeClr val="accent2"/>
+                </a:solidFill>
+                <a:latin typeface="Cambria" pitchFamily="34" charset="0"/>
+                <a:ea typeface="Cambria" pitchFamily="34" charset="-122"/>
+                <a:cs typeface="Cambria" pitchFamily="34" charset="-120"/>
+              </a:rPr>
+              <a:t>+2.5</a:t>
+            </a:r>
+            <a:endParaRPr lang="en-US" sz="3600" dirty="0"/>
+          </a:p>
+        </p:txBody>
+      </p:sp>
+      <p:sp>
+        <p:nvSpPr>
+          <p:cNvPr id="16" name="text_12"/>
+          <p:cNvSpPr txBox="1"/>
+          <p:nvPr/>
+        </p:nvSpPr>
+        <p:spPr>
+          <a:xfrm>
+            <a:off x="9383801" y="2880360"/>
+            <a:ext cx="1984934" cy="822960"/>
+          </a:xfrm>
+          <a:prstGeom prst="rect">
+            <a:avLst/>
+          </a:prstGeom>
+          <a:noFill/>
+          <a:ln/>
+        </p:spPr>
+        <p:txBody>
+          <a:bodyPr wrap="square" lIns="0" tIns="0" rIns="0" bIns="0" rtlCol="0" anchor="t"/>
+          <a:lstStyle/>
+          <a:p>
+            <a:pPr indent="0" marL="0">
+              <a:buNone/>
+            </a:pPr>
+            <a:r>
+              <a:rPr lang="en-US" sz="1400" dirty="0">
+                <a:solidFill>
+                  <a:schemeClr val="tx1"/>
+                </a:solidFill>
+                <a:latin typeface="Calibri" pitchFamily="34" charset="0"/>
+                <a:ea typeface="Calibri" pitchFamily="34" charset="-122"/>
+                <a:cs typeface="Calibri" pitchFamily="34" charset="-120"/>
+              </a:rPr>
+              <a:t>EM from OCR-aware QLoRA vs the same QLoRA without OCR (full test, p = 10⁻¹⁴; stable over 3 seeds)</a:t>
+            </a:r>
+            <a:endParaRPr lang="en-US" sz="1400" dirty="0"/>
+          </a:p>
+        </p:txBody>
+      </p:sp>
+      <p:sp>
+        <p:nvSpPr>
+          <p:cNvPr id="17" name="card_13"/>
+          <p:cNvSpPr/>
+          <p:nvPr/>
+        </p:nvSpPr>
+        <p:spPr>
+          <a:xfrm>
+            <a:off x="548640" y="4572000"/>
+            <a:ext cx="11094415" cy="960120"/>
+          </a:xfrm>
+          <a:prstGeom prst="roundRect">
+            <a:avLst>
+              <a:gd name="adj" fmla="val 7619"/>
+            </a:avLst>
+          </a:prstGeom>
+          <a:solidFill>
+            <a:schemeClr val="accent4"/>
+          </a:solidFill>
+          <a:ln w="12700">
+            <a:solidFill>
+              <a:schemeClr val="accent4"/>
+            </a:solidFill>
+            <a:prstDash val="solid"/>
+          </a:ln>
+        </p:spPr>
+      </p:sp>
+      <p:sp>
+        <p:nvSpPr>
+          <p:cNvPr id="18" name="text_14"/>
+          <p:cNvSpPr txBox="1"/>
+          <p:nvPr/>
+        </p:nvSpPr>
+        <p:spPr>
+          <a:xfrm>
+            <a:off x="868680" y="4572000"/>
+            <a:ext cx="10454335" cy="960120"/>
           </a:xfrm>
           <a:prstGeom prst="rect">
             <a:avLst/>
@@ -16868,99 +19057,21 @@
           <a:bodyPr wrap="square" lIns="0" tIns="0" rIns="0" bIns="0" rtlCol="0" anchor="ctr"/>
           <a:lstStyle/>
           <a:p>
-            <a:pPr algn="ctr" indent="0" marL="0">
+            <a:pPr indent="0" marL="0">
               <a:buNone/>
             </a:pPr>
             <a:r>
-              <a:rPr lang="en-US" sz="1400" b="1" dirty="0">
+              <a:rPr lang="en-US" sz="1600" dirty="0">
                 <a:solidFill>
-                  <a:schemeClr val="bg1"/>
+                  <a:schemeClr val="tx2"/>
                 </a:solidFill>
                 <a:latin typeface="Calibri" pitchFamily="34" charset="0"/>
                 <a:ea typeface="Calibri" pitchFamily="34" charset="-122"/>
                 <a:cs typeface="Calibri" pitchFamily="34" charset="-120"/>
               </a:rPr>
-              <a:t>W13</a:t>
+              <a:t>Efficient by design: QLoRA trains 7.37 M parameters (0.196%), a 29.5 MB adapter, on a single NVIDIA L4 GPU — no full fine-tuning.</a:t>
             </a:r>
-            <a:endParaRPr lang="en-US" sz="1400" dirty="0"/>
-          </a:p>
-        </p:txBody>
-      </p:sp>
-      <p:sp>
-        <p:nvSpPr>
-          <p:cNvPr id="20" name="text_180"/>
-          <p:cNvSpPr txBox="1"/>
-          <p:nvPr/>
-        </p:nvSpPr>
-        <p:spPr>
-          <a:xfrm>
-            <a:off x="9383801" y="2971800"/>
-            <a:ext cx="1984934" cy="1554480"/>
-          </a:xfrm>
-          <a:prstGeom prst="rect">
-            <a:avLst/>
-          </a:prstGeom>
-          <a:noFill/>
-          <a:ln/>
-        </p:spPr>
-        <p:txBody>
-          <a:bodyPr wrap="square" lIns="0" tIns="0" rIns="0" bIns="0" rtlCol="0" anchor="t"/>
-          <a:lstStyle/>
-          <a:p>
-            <a:pPr indent="0" marL="0">
-              <a:buNone/>
-            </a:pPr>
-            <a:r>
-              <a:rPr lang="en-US" sz="1500" dirty="0">
-                <a:solidFill>
-                  <a:schemeClr val="tx1"/>
-                </a:solidFill>
-                <a:latin typeface="Calibri" pitchFamily="34" charset="0"/>
-                <a:ea typeface="Calibri" pitchFamily="34" charset="-122"/>
-                <a:cs typeface="Calibri" pitchFamily="34" charset="-120"/>
-              </a:rPr>
-              <a:t>Review 3: final results, ablations, error analysis, live demo</a:t>
-            </a:r>
-            <a:endParaRPr lang="en-US" sz="1500" dirty="0"/>
-          </a:p>
-        </p:txBody>
-      </p:sp>
-      <p:sp>
-        <p:nvSpPr>
-          <p:cNvPr id="21" name="text_181"/>
-          <p:cNvSpPr txBox="1"/>
-          <p:nvPr/>
-        </p:nvSpPr>
-        <p:spPr>
-          <a:xfrm>
-            <a:off x="548640" y="5029200"/>
-            <a:ext cx="11094415" cy="411480"/>
-          </a:xfrm>
-          <a:prstGeom prst="rect">
-            <a:avLst/>
-          </a:prstGeom>
-          <a:noFill/>
-          <a:ln/>
-        </p:spPr>
-        <p:txBody>
-          <a:bodyPr wrap="square" lIns="0" tIns="0" rIns="0" bIns="0" rtlCol="0" anchor="t"/>
-          <a:lstStyle/>
-          <a:p>
-            <a:pPr indent="0" marL="0">
-              <a:buNone/>
-            </a:pPr>
-            <a:r>
-              <a:rPr lang="en-US" sz="1400" dirty="0">
-                <a:solidFill>
-                  <a:schemeClr val="accent3"/>
-                </a:solidFill>
-                <a:latin typeface="Calibri" pitchFamily="34" charset="0"/>
-                <a:ea typeface="Calibri" pitchFamily="34" charset="-122"/>
-                <a:cs typeface="Calibri" pitchFamily="34" charset="-120"/>
-              </a:rPr>
-              <a:t>All runs keep the frozen protocol, PEFT only, and pre-registered decision rules.</a:t>
-            </a:r>
-            <a:endParaRPr lang="en-US" sz="1400" dirty="0"/>
+            <a:endParaRPr lang="en-US" sz="1600" dirty="0"/>
           </a:p>
         </p:txBody>
       </p:sp>
@@ -17006,7 +19117,7 @@
             <a:pPr algn="r"/>
             <a:fld id="{F7021451-1387-4CA6-816F-3879F97B5CBC}" type="slidenum">
               <a:rPr b="0" lang="en-US"/>
-              <a:t>19</a:t>
+              <a:t>2</a:t>
             </a:fld>
             <a:endParaRPr lang="en-US"/>
           </a:p>
@@ -17020,9 +19131,9 @@
 </p:sld>
 </file>
 
-<file path=ppt/slides/slide2.xml><?xml version="1.0" encoding="utf-8"?>
+<file path=ppt/slides/slide20.xml><?xml version="1.0" encoding="utf-8"?>
 <p:sld xmlns:a="http://schemas.openxmlformats.org/drawingml/2006/main" xmlns:r="http://schemas.openxmlformats.org/officeDocument/2006/relationships" xmlns:p="http://schemas.openxmlformats.org/presentationml/2006/main">
-  <p:cSld name="Slide 2">
+  <p:cSld name="Slide 20">
     <p:spTree>
       <p:nvGrpSpPr>
         <p:cNvPr id="1" name=""/>
@@ -17072,7 +19183,7 @@
                 <a:ea typeface="Calibri" pitchFamily="34" charset="-122"/>
                 <a:cs typeface="Calibri" pitchFamily="34" charset="-120"/>
               </a:rPr>
-              <a:t>SUMMARY</a:t>
+              <a:t>PART 07 · NEXT STEPS</a:t>
             </a:r>
             <a:endParaRPr lang="en-US" sz="1100" dirty="0"/>
           </a:p>
@@ -17113,7 +19224,7 @@
                 <a:ea typeface="Cambria" pitchFamily="34" charset="-122"/>
                 <a:cs typeface="Cambria" pitchFamily="34" charset="-120"/>
               </a:rPr>
-              <a:t>Four results of this milestone</a:t>
+              <a:t>Plan to Review 3 (week 13)</a:t>
             </a:r>
             <a:endParaRPr lang="en-US" sz="3200" dirty="0"/>
           </a:p>
@@ -17121,14 +19232,144 @@
       </p:sp>
       <p:sp>
         <p:nvSpPr>
-          <p:cNvPr id="5" name="card_1"/>
+          <p:cNvPr id="5" name="card_172"/>
           <p:cNvSpPr/>
           <p:nvPr/>
         </p:nvSpPr>
         <p:spPr>
           <a:xfrm>
             <a:off x="548640" y="1600200"/>
-            <a:ext cx="2533574" cy="2651760"/>
+            <a:ext cx="2533574" cy="3108960"/>
+          </a:xfrm>
+          <a:prstGeom prst="roundRect">
+            <a:avLst>
+              <a:gd name="adj" fmla="val 2887"/>
+            </a:avLst>
+          </a:prstGeom>
+          <a:solidFill>
+            <a:schemeClr val="accent4"/>
+          </a:solidFill>
+          <a:ln w="12700">
+            <a:solidFill>
+              <a:schemeClr val="accent4"/>
+            </a:solidFill>
+            <a:prstDash val="solid"/>
+          </a:ln>
+        </p:spPr>
+      </p:sp>
+      <p:sp>
+        <p:nvSpPr>
+          <p:cNvPr id="6" name="dot_173"/>
+          <p:cNvSpPr/>
+          <p:nvPr/>
+        </p:nvSpPr>
+        <p:spPr>
+          <a:xfrm>
+            <a:off x="822960" y="1874520"/>
+            <a:ext cx="868680" cy="868680"/>
+          </a:xfrm>
+          <a:prstGeom prst="ellipse">
+            <a:avLst/>
+          </a:prstGeom>
+          <a:solidFill>
+            <a:srgbClr val="1C7293"/>
+          </a:solidFill>
+          <a:ln w="12700">
+            <a:solidFill>
+              <a:srgbClr val="FFFFFF"/>
+            </a:solidFill>
+            <a:prstDash val="solid"/>
+          </a:ln>
+        </p:spPr>
+      </p:sp>
+      <p:sp>
+        <p:nvSpPr>
+          <p:cNvPr id="7" name="text_174"/>
+          <p:cNvSpPr txBox="1"/>
+          <p:nvPr/>
+        </p:nvSpPr>
+        <p:spPr>
+          <a:xfrm>
+            <a:off x="822960" y="1874520"/>
+            <a:ext cx="868680" cy="868680"/>
+          </a:xfrm>
+          <a:prstGeom prst="rect">
+            <a:avLst/>
+          </a:prstGeom>
+          <a:noFill/>
+          <a:ln/>
+        </p:spPr>
+        <p:txBody>
+          <a:bodyPr wrap="square" lIns="0" tIns="0" rIns="0" bIns="0" rtlCol="0" anchor="ctr"/>
+          <a:lstStyle/>
+          <a:p>
+            <a:pPr algn="ctr" indent="0" marL="0">
+              <a:buNone/>
+            </a:pPr>
+            <a:r>
+              <a:rPr lang="en-US" sz="1400" b="1" dirty="0">
+                <a:solidFill>
+                  <a:schemeClr val="bg1"/>
+                </a:solidFill>
+                <a:latin typeface="Calibri" pitchFamily="34" charset="0"/>
+                <a:ea typeface="Calibri" pitchFamily="34" charset="-122"/>
+                <a:cs typeface="Calibri" pitchFamily="34" charset="-120"/>
+              </a:rPr>
+              <a:t>W10</a:t>
+            </a:r>
+            <a:endParaRPr lang="en-US" sz="1400" dirty="0"/>
+          </a:p>
+        </p:txBody>
+      </p:sp>
+      <p:sp>
+        <p:nvSpPr>
+          <p:cNvPr id="8" name="text_175"/>
+          <p:cNvSpPr txBox="1"/>
+          <p:nvPr/>
+        </p:nvSpPr>
+        <p:spPr>
+          <a:xfrm>
+            <a:off x="822960" y="2971800"/>
+            <a:ext cx="1984934" cy="1554480"/>
+          </a:xfrm>
+          <a:prstGeom prst="rect">
+            <a:avLst/>
+          </a:prstGeom>
+          <a:noFill/>
+          <a:ln/>
+        </p:spPr>
+        <p:txBody>
+          <a:bodyPr wrap="square" lIns="0" tIns="0" rIns="0" bIns="0" rtlCol="0" anchor="t"/>
+          <a:lstStyle/>
+          <a:p>
+            <a:pPr indent="0" marL="0">
+              <a:buNone/>
+            </a:pPr>
+            <a:r>
+              <a:rPr lang="en-US" sz="1500" dirty="0">
+                <a:solidFill>
+                  <a:schemeClr val="tx1"/>
+                </a:solidFill>
+                <a:latin typeface="Calibri" pitchFamily="34" charset="0"/>
+                <a:ea typeface="Calibri" pitchFamily="34" charset="-122"/>
+                <a:cs typeface="Calibri" pitchFamily="34" charset="-120"/>
+              </a:rPr>
+              <a:t>OCR-aware QLoRA on the full ViTextVQA train set; LoRA rank and target-module ablations (H3, H4)</a:t>
+            </a:r>
+            <a:endParaRPr lang="en-US" sz="1500" dirty="0"/>
+          </a:p>
+        </p:txBody>
+      </p:sp>
+      <p:sp>
+        <p:nvSpPr>
+          <p:cNvPr id="9" name="card_176"/>
+          <p:cNvSpPr/>
+          <p:nvPr/>
+        </p:nvSpPr>
+        <p:spPr>
+          <a:xfrm>
+            <a:off x="3402254" y="1600200"/>
+            <a:ext cx="2533574" cy="3108960"/>
           </a:xfrm>
           <a:prstGeom prst="roundRect">
             <a:avLst>
@@ -17148,14 +19389,78 @@
       </p:sp>
       <p:sp>
         <p:nvSpPr>
-          <p:cNvPr id="6" name="text_2"/>
+          <p:cNvPr id="10" name="dot_177"/>
+          <p:cNvSpPr/>
+          <p:nvPr/>
+        </p:nvSpPr>
+        <p:spPr>
+          <a:xfrm>
+            <a:off x="3676574" y="1874520"/>
+            <a:ext cx="868680" cy="868680"/>
+          </a:xfrm>
+          <a:prstGeom prst="ellipse">
+            <a:avLst/>
+          </a:prstGeom>
+          <a:solidFill>
+            <a:srgbClr val="13294B"/>
+          </a:solidFill>
+          <a:ln w="12700">
+            <a:solidFill>
+              <a:srgbClr val="FFFFFF"/>
+            </a:solidFill>
+            <a:prstDash val="solid"/>
+          </a:ln>
+        </p:spPr>
+      </p:sp>
+      <p:sp>
+        <p:nvSpPr>
+          <p:cNvPr id="11" name="text_178"/>
           <p:cNvSpPr txBox="1"/>
           <p:nvPr/>
         </p:nvSpPr>
         <p:spPr>
           <a:xfrm>
-            <a:off x="822960" y="2011680"/>
-            <a:ext cx="1984934" cy="822960"/>
+            <a:off x="3676574" y="1874520"/>
+            <a:ext cx="868680" cy="868680"/>
+          </a:xfrm>
+          <a:prstGeom prst="rect">
+            <a:avLst/>
+          </a:prstGeom>
+          <a:noFill/>
+          <a:ln/>
+        </p:spPr>
+        <p:txBody>
+          <a:bodyPr wrap="square" lIns="0" tIns="0" rIns="0" bIns="0" rtlCol="0" anchor="ctr"/>
+          <a:lstStyle/>
+          <a:p>
+            <a:pPr algn="ctr" indent="0" marL="0">
+              <a:buNone/>
+            </a:pPr>
+            <a:r>
+              <a:rPr lang="en-US" sz="1400" b="1" dirty="0">
+                <a:solidFill>
+                  <a:schemeClr val="bg1"/>
+                </a:solidFill>
+                <a:latin typeface="Calibri" pitchFamily="34" charset="0"/>
+                <a:ea typeface="Calibri" pitchFamily="34" charset="-122"/>
+                <a:cs typeface="Calibri" pitchFamily="34" charset="-120"/>
+              </a:rPr>
+              <a:t>W11</a:t>
+            </a:r>
+            <a:endParaRPr lang="en-US" sz="1400" dirty="0"/>
+          </a:p>
+        </p:txBody>
+      </p:sp>
+      <p:sp>
+        <p:nvSpPr>
+          <p:cNvPr id="12" name="text_179"/>
+          <p:cNvSpPr txBox="1"/>
+          <p:nvPr/>
+        </p:nvSpPr>
+        <p:spPr>
+          <a:xfrm>
+            <a:off x="3676574" y="2971800"/>
+            <a:ext cx="1984934" cy="1554480"/>
           </a:xfrm>
           <a:prstGeom prst="rect">
             <a:avLst/>
@@ -17171,46 +19476,7 @@
               <a:buNone/>
             </a:pPr>
             <a:r>
-              <a:rPr lang="en-US" sz="3600" b="1" dirty="0">
-                <a:solidFill>
-                  <a:schemeClr val="accent1"/>
-                </a:solidFill>
-                <a:latin typeface="Cambria" pitchFamily="34" charset="0"/>
-                <a:ea typeface="Cambria" pitchFamily="34" charset="-122"/>
-                <a:cs typeface="Cambria" pitchFamily="34" charset="-120"/>
-              </a:rPr>
-              <a:t>79.6</a:t>
-            </a:r>
-            <a:endParaRPr lang="en-US" sz="3600" dirty="0"/>
-          </a:p>
-        </p:txBody>
-      </p:sp>
-      <p:sp>
-        <p:nvSpPr>
-          <p:cNvPr id="7" name="text_3"/>
-          <p:cNvSpPr txBox="1"/>
-          <p:nvPr/>
-        </p:nvSpPr>
-        <p:spPr>
-          <a:xfrm>
-            <a:off x="822960" y="2880360"/>
-            <a:ext cx="1984934" cy="822960"/>
-          </a:xfrm>
-          <a:prstGeom prst="rect">
-            <a:avLst/>
-          </a:prstGeom>
-          <a:noFill/>
-          <a:ln/>
-        </p:spPr>
-        <p:txBody>
-          <a:bodyPr wrap="square" lIns="0" tIns="0" rIns="0" bIns="0" rtlCol="0" anchor="t"/>
-          <a:lstStyle/>
-          <a:p>
-            <a:pPr indent="0" marL="0">
-              <a:buNone/>
-            </a:pPr>
-            <a:r>
-              <a:rPr lang="en-US" sz="1400" dirty="0">
+              <a:rPr lang="en-US" sz="1500" dirty="0">
                 <a:solidFill>
                   <a:schemeClr val="tx1"/>
                 </a:solidFill>
@@ -17218,22 +19484,22 @@
                 <a:ea typeface="Calibri" pitchFamily="34" charset="-122"/>
                 <a:cs typeface="Calibri" pitchFamily="34" charset="-120"/>
               </a:rPr>
-              <a:t>Pipeline check — TextVQA val, Qwen2.5-VL-3B; the official report gives 79.3</a:t>
+              <a:t>Shared adapter for both datasets (H5); systematic hallucination evaluation incl. B3 (H8)</a:t>
             </a:r>
-            <a:endParaRPr lang="en-US" sz="1400" dirty="0"/>
+            <a:endParaRPr lang="en-US" sz="1500" dirty="0"/>
           </a:p>
         </p:txBody>
       </p:sp>
       <p:sp>
         <p:nvSpPr>
-          <p:cNvPr id="8" name="card_4"/>
+          <p:cNvPr id="13" name="card_180"/>
           <p:cNvSpPr/>
           <p:nvPr/>
         </p:nvSpPr>
         <p:spPr>
           <a:xfrm>
-            <a:off x="3402254" y="1600200"/>
-            <a:ext cx="2533574" cy="2651760"/>
+            <a:off x="6255868" y="1600200"/>
+            <a:ext cx="2533574" cy="3108960"/>
           </a:xfrm>
           <a:prstGeom prst="roundRect">
             <a:avLst>
@@ -17253,14 +19519,78 @@
       </p:sp>
       <p:sp>
         <p:nvSpPr>
-          <p:cNvPr id="9" name="text_5"/>
+          <p:cNvPr id="14" name="dot_181"/>
+          <p:cNvSpPr/>
+          <p:nvPr/>
+        </p:nvSpPr>
+        <p:spPr>
+          <a:xfrm>
+            <a:off x="6530188" y="1874520"/>
+            <a:ext cx="868680" cy="868680"/>
+          </a:xfrm>
+          <a:prstGeom prst="ellipse">
+            <a:avLst/>
+          </a:prstGeom>
+          <a:solidFill>
+            <a:srgbClr val="13294B"/>
+          </a:solidFill>
+          <a:ln w="12700">
+            <a:solidFill>
+              <a:srgbClr val="FFFFFF"/>
+            </a:solidFill>
+            <a:prstDash val="solid"/>
+          </a:ln>
+        </p:spPr>
+      </p:sp>
+      <p:sp>
+        <p:nvSpPr>
+          <p:cNvPr id="15" name="text_182"/>
           <p:cNvSpPr txBox="1"/>
           <p:nvPr/>
         </p:nvSpPr>
         <p:spPr>
           <a:xfrm>
-            <a:off x="3676574" y="2011680"/>
-            <a:ext cx="1984934" cy="822960"/>
+            <a:off x="6530188" y="1874520"/>
+            <a:ext cx="868680" cy="868680"/>
+          </a:xfrm>
+          <a:prstGeom prst="rect">
+            <a:avLst/>
+          </a:prstGeom>
+          <a:noFill/>
+          <a:ln/>
+        </p:spPr>
+        <p:txBody>
+          <a:bodyPr wrap="square" lIns="0" tIns="0" rIns="0" bIns="0" rtlCol="0" anchor="ctr"/>
+          <a:lstStyle/>
+          <a:p>
+            <a:pPr algn="ctr" indent="0" marL="0">
+              <a:buNone/>
+            </a:pPr>
+            <a:r>
+              <a:rPr lang="en-US" sz="1400" b="1" dirty="0">
+                <a:solidFill>
+                  <a:schemeClr val="bg1"/>
+                </a:solidFill>
+                <a:latin typeface="Calibri" pitchFamily="34" charset="0"/>
+                <a:ea typeface="Calibri" pitchFamily="34" charset="-122"/>
+                <a:cs typeface="Calibri" pitchFamily="34" charset="-120"/>
+              </a:rPr>
+              <a:t>W12</a:t>
+            </a:r>
+            <a:endParaRPr lang="en-US" sz="1400" dirty="0"/>
+          </a:p>
+        </p:txBody>
+      </p:sp>
+      <p:sp>
+        <p:nvSpPr>
+          <p:cNvPr id="16" name="text_183"/>
+          <p:cNvSpPr txBox="1"/>
+          <p:nvPr/>
+        </p:nvSpPr>
+        <p:spPr>
+          <a:xfrm>
+            <a:off x="6530188" y="2971800"/>
+            <a:ext cx="1984934" cy="1554480"/>
           </a:xfrm>
           <a:prstGeom prst="rect">
             <a:avLst/>
@@ -17276,46 +19606,7 @@
               <a:buNone/>
             </a:pPr>
             <a:r>
-              <a:rPr lang="en-US" sz="3600" b="1" dirty="0">
-                <a:solidFill>
-                  <a:schemeClr val="tx2"/>
-                </a:solidFill>
-                <a:latin typeface="Cambria" pitchFamily="34" charset="0"/>
-                <a:ea typeface="Cambria" pitchFamily="34" charset="-122"/>
-                <a:cs typeface="Cambria" pitchFamily="34" charset="-120"/>
-              </a:rPr>
-              <a:t>+21.1</a:t>
-            </a:r>
-            <a:endParaRPr lang="en-US" sz="3600" dirty="0"/>
-          </a:p>
-        </p:txBody>
-      </p:sp>
-      <p:sp>
-        <p:nvSpPr>
-          <p:cNvPr id="10" name="text_6"/>
-          <p:cNvSpPr txBox="1"/>
-          <p:nvPr/>
-        </p:nvSpPr>
-        <p:spPr>
-          <a:xfrm>
-            <a:off x="3676574" y="2880360"/>
-            <a:ext cx="1984934" cy="822960"/>
-          </a:xfrm>
-          <a:prstGeom prst="rect">
-            <a:avLst/>
-          </a:prstGeom>
-          <a:noFill/>
-          <a:ln/>
-        </p:spPr>
-        <p:txBody>
-          <a:bodyPr wrap="square" lIns="0" tIns="0" rIns="0" bIns="0" rtlCol="0" anchor="t"/>
-          <a:lstStyle/>
-          <a:p>
-            <a:pPr indent="0" marL="0">
-              <a:buNone/>
-            </a:pPr>
-            <a:r>
-              <a:rPr lang="en-US" sz="1400" dirty="0">
+              <a:rPr lang="en-US" sz="1500" dirty="0">
                 <a:solidFill>
                   <a:schemeClr val="tx1"/>
                 </a:solidFill>
@@ -17323,22 +19614,22 @@
                 <a:ea typeface="Calibri" pitchFamily="34" charset="-122"/>
                 <a:cs typeface="Calibri" pitchFamily="34" charset="-120"/>
               </a:rPr>
-              <a:t>EM from QLoRA over zero-shot, full ViTextVQA test (+51.7 on ViVQA); p ≈ 0</a:t>
+              <a:t>Web prototype: upload image → OCR → answer in Vietnamese</a:t>
             </a:r>
-            <a:endParaRPr lang="en-US" sz="1400" dirty="0"/>
+            <a:endParaRPr lang="en-US" sz="1500" dirty="0"/>
           </a:p>
         </p:txBody>
       </p:sp>
       <p:sp>
         <p:nvSpPr>
-          <p:cNvPr id="11" name="card_7"/>
+          <p:cNvPr id="17" name="card_184"/>
           <p:cNvSpPr/>
           <p:nvPr/>
         </p:nvSpPr>
         <p:spPr>
           <a:xfrm>
-            <a:off x="6255868" y="1600200"/>
-            <a:ext cx="2533574" cy="2651760"/>
+            <a:off x="9109481" y="1600200"/>
+            <a:ext cx="2533574" cy="3108960"/>
           </a:xfrm>
           <a:prstGeom prst="roundRect">
             <a:avLst>
@@ -17358,14 +19649,78 @@
       </p:sp>
       <p:sp>
         <p:nvSpPr>
-          <p:cNvPr id="12" name="text_8"/>
+          <p:cNvPr id="18" name="dot_185"/>
+          <p:cNvSpPr/>
+          <p:nvPr/>
+        </p:nvSpPr>
+        <p:spPr>
+          <a:xfrm>
+            <a:off x="9383801" y="1874520"/>
+            <a:ext cx="868680" cy="868680"/>
+          </a:xfrm>
+          <a:prstGeom prst="ellipse">
+            <a:avLst/>
+          </a:prstGeom>
+          <a:solidFill>
+            <a:srgbClr val="13294B"/>
+          </a:solidFill>
+          <a:ln w="12700">
+            <a:solidFill>
+              <a:srgbClr val="FFFFFF"/>
+            </a:solidFill>
+            <a:prstDash val="solid"/>
+          </a:ln>
+        </p:spPr>
+      </p:sp>
+      <p:sp>
+        <p:nvSpPr>
+          <p:cNvPr id="19" name="text_186"/>
           <p:cNvSpPr txBox="1"/>
           <p:nvPr/>
         </p:nvSpPr>
         <p:spPr>
           <a:xfrm>
-            <a:off x="6530188" y="2011680"/>
-            <a:ext cx="1984934" cy="822960"/>
+            <a:off x="9383801" y="1874520"/>
+            <a:ext cx="868680" cy="868680"/>
+          </a:xfrm>
+          <a:prstGeom prst="rect">
+            <a:avLst/>
+          </a:prstGeom>
+          <a:noFill/>
+          <a:ln/>
+        </p:spPr>
+        <p:txBody>
+          <a:bodyPr wrap="square" lIns="0" tIns="0" rIns="0" bIns="0" rtlCol="0" anchor="ctr"/>
+          <a:lstStyle/>
+          <a:p>
+            <a:pPr algn="ctr" indent="0" marL="0">
+              <a:buNone/>
+            </a:pPr>
+            <a:r>
+              <a:rPr lang="en-US" sz="1400" b="1" dirty="0">
+                <a:solidFill>
+                  <a:schemeClr val="bg1"/>
+                </a:solidFill>
+                <a:latin typeface="Calibri" pitchFamily="34" charset="0"/>
+                <a:ea typeface="Calibri" pitchFamily="34" charset="-122"/>
+                <a:cs typeface="Calibri" pitchFamily="34" charset="-120"/>
+              </a:rPr>
+              <a:t>W13</a:t>
+            </a:r>
+            <a:endParaRPr lang="en-US" sz="1400" dirty="0"/>
+          </a:p>
+        </p:txBody>
+      </p:sp>
+      <p:sp>
+        <p:nvSpPr>
+          <p:cNvPr id="20" name="text_187"/>
+          <p:cNvSpPr txBox="1"/>
+          <p:nvPr/>
+        </p:nvSpPr>
+        <p:spPr>
+          <a:xfrm>
+            <a:off x="9383801" y="2971800"/>
+            <a:ext cx="1984934" cy="1554480"/>
           </a:xfrm>
           <a:prstGeom prst="rect">
             <a:avLst/>
@@ -17381,30 +19736,30 @@
               <a:buNone/>
             </a:pPr>
             <a:r>
-              <a:rPr lang="en-US" sz="3600" b="1" dirty="0">
+              <a:rPr lang="en-US" sz="1500" dirty="0">
                 <a:solidFill>
-                  <a:schemeClr val="tx2"/>
+                  <a:schemeClr val="tx1"/>
                 </a:solidFill>
-                <a:latin typeface="Cambria" pitchFamily="34" charset="0"/>
-                <a:ea typeface="Cambria" pitchFamily="34" charset="-122"/>
-                <a:cs typeface="Cambria" pitchFamily="34" charset="-120"/>
+                <a:latin typeface="Calibri" pitchFamily="34" charset="0"/>
+                <a:ea typeface="Calibri" pitchFamily="34" charset="-122"/>
+                <a:cs typeface="Calibri" pitchFamily="34" charset="-120"/>
               </a:rPr>
-              <a:t>50.3</a:t>
+              <a:t>Review 3: final results, ablations, error analysis, live demo</a:t>
             </a:r>
-            <a:endParaRPr lang="en-US" sz="3600" dirty="0"/>
+            <a:endParaRPr lang="en-US" sz="1500" dirty="0"/>
           </a:p>
         </p:txBody>
       </p:sp>
       <p:sp>
         <p:nvSpPr>
-          <p:cNvPr id="13" name="text_9"/>
+          <p:cNvPr id="21" name="text_188"/>
           <p:cNvSpPr txBox="1"/>
           <p:nvPr/>
         </p:nvSpPr>
         <p:spPr>
           <a:xfrm>
-            <a:off x="6530188" y="2880360"/>
-            <a:ext cx="1984934" cy="822960"/>
+            <a:off x="548640" y="5029200"/>
+            <a:ext cx="11094415" cy="411480"/>
           </a:xfrm>
           <a:prstGeom prst="rect">
             <a:avLst/>
@@ -17422,186 +19777,15 @@
             <a:r>
               <a:rPr lang="en-US" sz="1400" dirty="0">
                 <a:solidFill>
-                  <a:schemeClr val="tx1"/>
+                  <a:schemeClr val="accent3"/>
                 </a:solidFill>
                 <a:latin typeface="Calibri" pitchFamily="34" charset="0"/>
                 <a:ea typeface="Calibri" pitchFamily="34" charset="-122"/>
                 <a:cs typeface="Calibri" pitchFamily="34" charset="-120"/>
               </a:rPr>
-              <a:t>EM on the full ViTextVQA test vs 25.5 for the published SOTA ViTextBLIP-2</a:t>
+              <a:t>All runs keep the frozen protocol, PEFT only, and pre-registered decision rules.</a:t>
             </a:r>
             <a:endParaRPr lang="en-US" sz="1400" dirty="0"/>
-          </a:p>
-        </p:txBody>
-      </p:sp>
-      <p:sp>
-        <p:nvSpPr>
-          <p:cNvPr id="14" name="card_10"/>
-          <p:cNvSpPr/>
-          <p:nvPr/>
-        </p:nvSpPr>
-        <p:spPr>
-          <a:xfrm>
-            <a:off x="9109481" y="1600200"/>
-            <a:ext cx="2533574" cy="2651760"/>
-          </a:xfrm>
-          <a:prstGeom prst="roundRect">
-            <a:avLst>
-              <a:gd name="adj" fmla="val 2887"/>
-            </a:avLst>
-          </a:prstGeom>
-          <a:solidFill>
-            <a:schemeClr val="accent5"/>
-          </a:solidFill>
-          <a:ln w="12700">
-            <a:solidFill>
-              <a:schemeClr val="accent5"/>
-            </a:solidFill>
-            <a:prstDash val="solid"/>
-          </a:ln>
-        </p:spPr>
-      </p:sp>
-      <p:sp>
-        <p:nvSpPr>
-          <p:cNvPr id="15" name="text_11"/>
-          <p:cNvSpPr txBox="1"/>
-          <p:nvPr/>
-        </p:nvSpPr>
-        <p:spPr>
-          <a:xfrm>
-            <a:off x="9383801" y="2011680"/>
-            <a:ext cx="1984934" cy="822960"/>
-          </a:xfrm>
-          <a:prstGeom prst="rect">
-            <a:avLst/>
-          </a:prstGeom>
-          <a:noFill/>
-          <a:ln/>
-        </p:spPr>
-        <p:txBody>
-          <a:bodyPr wrap="square" lIns="0" tIns="0" rIns="0" bIns="0" rtlCol="0" anchor="t"/>
-          <a:lstStyle/>
-          <a:p>
-            <a:pPr indent="0" marL="0">
-              <a:buNone/>
-            </a:pPr>
-            <a:r>
-              <a:rPr lang="en-US" sz="3600" b="1" dirty="0">
-                <a:solidFill>
-                  <a:schemeClr val="accent2"/>
-                </a:solidFill>
-                <a:latin typeface="Cambria" pitchFamily="34" charset="0"/>
-                <a:ea typeface="Cambria" pitchFamily="34" charset="-122"/>
-                <a:cs typeface="Cambria" pitchFamily="34" charset="-120"/>
-              </a:rPr>
-              <a:t>+2.5</a:t>
-            </a:r>
-            <a:endParaRPr lang="en-US" sz="3600" dirty="0"/>
-          </a:p>
-        </p:txBody>
-      </p:sp>
-      <p:sp>
-        <p:nvSpPr>
-          <p:cNvPr id="16" name="text_12"/>
-          <p:cNvSpPr txBox="1"/>
-          <p:nvPr/>
-        </p:nvSpPr>
-        <p:spPr>
-          <a:xfrm>
-            <a:off x="9383801" y="2880360"/>
-            <a:ext cx="1984934" cy="822960"/>
-          </a:xfrm>
-          <a:prstGeom prst="rect">
-            <a:avLst/>
-          </a:prstGeom>
-          <a:noFill/>
-          <a:ln/>
-        </p:spPr>
-        <p:txBody>
-          <a:bodyPr wrap="square" lIns="0" tIns="0" rIns="0" bIns="0" rtlCol="0" anchor="t"/>
-          <a:lstStyle/>
-          <a:p>
-            <a:pPr indent="0" marL="0">
-              <a:buNone/>
-            </a:pPr>
-            <a:r>
-              <a:rPr lang="en-US" sz="1400" dirty="0">
-                <a:solidFill>
-                  <a:schemeClr val="tx1"/>
-                </a:solidFill>
-                <a:latin typeface="Calibri" pitchFamily="34" charset="0"/>
-                <a:ea typeface="Calibri" pitchFamily="34" charset="-122"/>
-                <a:cs typeface="Calibri" pitchFamily="34" charset="-120"/>
-              </a:rPr>
-              <a:t>EM from OCR-aware QLoRA vs the same QLoRA without OCR (full test, p = 10⁻¹⁴; stable over 3 seeds)</a:t>
-            </a:r>
-            <a:endParaRPr lang="en-US" sz="1400" dirty="0"/>
-          </a:p>
-        </p:txBody>
-      </p:sp>
-      <p:sp>
-        <p:nvSpPr>
-          <p:cNvPr id="17" name="card_13"/>
-          <p:cNvSpPr/>
-          <p:nvPr/>
-        </p:nvSpPr>
-        <p:spPr>
-          <a:xfrm>
-            <a:off x="548640" y="4572000"/>
-            <a:ext cx="11094415" cy="960120"/>
-          </a:xfrm>
-          <a:prstGeom prst="roundRect">
-            <a:avLst>
-              <a:gd name="adj" fmla="val 7619"/>
-            </a:avLst>
-          </a:prstGeom>
-          <a:solidFill>
-            <a:schemeClr val="accent4"/>
-          </a:solidFill>
-          <a:ln w="12700">
-            <a:solidFill>
-              <a:schemeClr val="accent4"/>
-            </a:solidFill>
-            <a:prstDash val="solid"/>
-          </a:ln>
-        </p:spPr>
-      </p:sp>
-      <p:sp>
-        <p:nvSpPr>
-          <p:cNvPr id="18" name="text_14"/>
-          <p:cNvSpPr txBox="1"/>
-          <p:nvPr/>
-        </p:nvSpPr>
-        <p:spPr>
-          <a:xfrm>
-            <a:off x="868680" y="4572000"/>
-            <a:ext cx="10454335" cy="960120"/>
-          </a:xfrm>
-          <a:prstGeom prst="rect">
-            <a:avLst/>
-          </a:prstGeom>
-          <a:noFill/>
-          <a:ln/>
-        </p:spPr>
-        <p:txBody>
-          <a:bodyPr wrap="square" lIns="0" tIns="0" rIns="0" bIns="0" rtlCol="0" anchor="ctr"/>
-          <a:lstStyle/>
-          <a:p>
-            <a:pPr indent="0" marL="0">
-              <a:buNone/>
-            </a:pPr>
-            <a:r>
-              <a:rPr lang="en-US" sz="1600" dirty="0">
-                <a:solidFill>
-                  <a:schemeClr val="tx2"/>
-                </a:solidFill>
-                <a:latin typeface="Calibri" pitchFamily="34" charset="0"/>
-                <a:ea typeface="Calibri" pitchFamily="34" charset="-122"/>
-                <a:cs typeface="Calibri" pitchFamily="34" charset="-120"/>
-              </a:rPr>
-              <a:t>Efficient by design: QLoRA trains 7.37 M parameters (0.196%), a 29.5 MB adapter, on a single NVIDIA L4 GPU — no full fine-tuning.</a:t>
-            </a:r>
-            <a:endParaRPr lang="en-US" sz="1600" dirty="0"/>
           </a:p>
         </p:txBody>
       </p:sp>
@@ -17647,7 +19831,7 @@
             <a:pPr algn="r"/>
             <a:fld id="{F7021451-1387-4CA6-816F-3879F97B5CBC}" type="slidenum">
               <a:rPr b="0" lang="en-US"/>
-              <a:t>2</a:t>
+              <a:t>20</a:t>
             </a:fld>
             <a:endParaRPr lang="en-US"/>
           </a:p>
@@ -17661,9 +19845,9 @@
 </p:sld>
 </file>
 
-<file path=ppt/slides/slide20.xml><?xml version="1.0" encoding="utf-8"?>
+<file path=ppt/slides/slide21.xml><?xml version="1.0" encoding="utf-8"?>
 <p:sld xmlns:a="http://schemas.openxmlformats.org/drawingml/2006/main" xmlns:r="http://schemas.openxmlformats.org/officeDocument/2006/relationships" xmlns:p="http://schemas.openxmlformats.org/presentationml/2006/main">
-  <p:cSld name="Slide 20">
+  <p:cSld name="Slide 21">
     <p:spTree>
       <p:nvGrpSpPr>
         <p:cNvPr id="1" name=""/>
@@ -18479,7 +20663,7 @@
                           <a:ea typeface="Calibri" pitchFamily="34" charset="-122"/>
                           <a:cs typeface="Calibri" pitchFamily="34" charset="-120"/>
                         </a:rPr>
-                        <a:t>4, 13</a:t>
+                        <a:t>4, 14</a:t>
                       </a:r>
                       <a:endParaRPr lang="en-US" sz="1400" dirty="0">
                         <a:latin typeface="Calibri" charset="0"/>
@@ -18873,7 +21057,7 @@
                           <a:ea typeface="Calibri" pitchFamily="34" charset="-122"/>
                           <a:cs typeface="Calibri" pitchFamily="34" charset="-120"/>
                         </a:rPr>
-                        <a:t>9, 12</a:t>
+                        <a:t>9, 12–13</a:t>
                       </a:r>
                       <a:endParaRPr lang="en-US" sz="1400" dirty="0">
                         <a:latin typeface="Calibri" charset="0"/>
@@ -19070,7 +21254,7 @@
                           <a:ea typeface="Calibri" pitchFamily="34" charset="-122"/>
                           <a:cs typeface="Calibri" pitchFamily="34" charset="-120"/>
                         </a:rPr>
-                        <a:t>10–17</a:t>
+                        <a:t>10–18</a:t>
                       </a:r>
                       <a:endParaRPr lang="en-US" sz="1400" dirty="0">
                         <a:latin typeface="Calibri" charset="0"/>
@@ -19634,7 +21818,7 @@
         <p:spPr>
           <a:xfrm>
             <a:off x="548640" y="1325880"/>
-            <a:ext cx="8138160" cy="4641536"/>
+            <a:ext cx="7589520" cy="4328624"/>
           </a:xfrm>
           <a:prstGeom prst="rect">
             <a:avLst/>
@@ -19649,12 +21833,12 @@
         </p:nvSpPr>
         <p:spPr>
           <a:xfrm>
-            <a:off x="9052560" y="1325880"/>
-            <a:ext cx="2590495" cy="2240280"/>
+            <a:off x="8503920" y="1325880"/>
+            <a:ext cx="3139135" cy="1691640"/>
           </a:xfrm>
           <a:prstGeom prst="roundRect">
             <a:avLst>
-              <a:gd name="adj" fmla="val 3265"/>
+              <a:gd name="adj" fmla="val 4324"/>
             </a:avLst>
           </a:prstGeom>
           <a:solidFill>
@@ -19676,8 +21860,8 @@
         </p:nvSpPr>
         <p:spPr>
           <a:xfrm>
-            <a:off x="9281160" y="1463040"/>
-            <a:ext cx="2133295" cy="365760"/>
+            <a:off x="8732520" y="1417320"/>
+            <a:ext cx="2681935" cy="365760"/>
           </a:xfrm>
           <a:prstGeom prst="rect">
             <a:avLst/>
@@ -19715,8 +21899,8 @@
         </p:nvSpPr>
         <p:spPr>
           <a:xfrm>
-            <a:off x="9281160" y="1874520"/>
-            <a:ext cx="2133295" cy="1600200"/>
+            <a:off x="8732520" y="1783080"/>
+            <a:ext cx="2681935" cy="1188720"/>
           </a:xfrm>
           <a:prstGeom prst="rect">
             <a:avLst/>
@@ -19730,13 +21914,13 @@
           <a:p>
             <a:pPr marL="177800" indent="-177800">
               <a:spcAft>
-                <a:spcPts val="600"/>
+                <a:spcPts val="200"/>
               </a:spcAft>
               <a:buSzPct val="100000"/>
               <a:buChar char="•"/>
             </a:pPr>
             <a:r>
-              <a:rPr lang="en-US" sz="1400" dirty="0">
+              <a:rPr lang="en-US" sz="1200" dirty="0">
                 <a:solidFill>
                   <a:schemeClr val="tx1"/>
                 </a:solidFill>
@@ -19746,18 +21930,18 @@
               </a:rPr>
               <a:t>LoRA r = 16, α = 32 on q, k, v, o</a:t>
             </a:r>
-            <a:endParaRPr lang="en-US" sz="1400" dirty="0"/>
+            <a:endParaRPr lang="en-US" sz="1200" dirty="0"/>
           </a:p>
           <a:p>
             <a:pPr marL="177800" indent="-177800">
               <a:spcAft>
-                <a:spcPts val="600"/>
+                <a:spcPts val="200"/>
               </a:spcAft>
               <a:buSzPct val="100000"/>
               <a:buChar char="•"/>
             </a:pPr>
             <a:r>
-              <a:rPr lang="en-US" sz="1400" dirty="0">
+              <a:rPr lang="en-US" sz="1200" dirty="0">
                 <a:solidFill>
                   <a:schemeClr val="tx1"/>
                 </a:solidFill>
@@ -19765,20 +21949,20 @@
                 <a:ea typeface="Calibri" pitchFamily="34" charset="-122"/>
                 <a:cs typeface="Calibri" pitchFamily="34" charset="-120"/>
               </a:rPr>
-              <a:t>7,372,800 params = 0.196%</a:t>
+              <a:t>7,372,800 params = 0.196% · 29.5 MB</a:t>
             </a:r>
-            <a:endParaRPr lang="en-US" sz="1400" dirty="0"/>
+            <a:endParaRPr lang="en-US" sz="1200" dirty="0"/>
           </a:p>
           <a:p>
             <a:pPr marL="177800" indent="-177800">
               <a:spcAft>
-                <a:spcPts val="600"/>
+                <a:spcPts val="200"/>
               </a:spcAft>
               <a:buSzPct val="100000"/>
               <a:buChar char="•"/>
             </a:pPr>
             <a:r>
-              <a:rPr lang="en-US" sz="1400" dirty="0">
+              <a:rPr lang="en-US" sz="1200" dirty="0">
                 <a:solidFill>
                   <a:schemeClr val="tx1"/>
                 </a:solidFill>
@@ -19786,9 +21970,9 @@
                 <a:ea typeface="Calibri" pitchFamily="34" charset="-122"/>
                 <a:cs typeface="Calibri" pitchFamily="34" charset="-120"/>
               </a:rPr>
-              <a:t>Adapter 29.5 MB</a:t>
+              <a:t>Everything else frozen, LLM in 4-bit NF4</a:t>
             </a:r>
-            <a:endParaRPr lang="en-US" sz="1400" dirty="0"/>
+            <a:endParaRPr lang="en-US" sz="1200" dirty="0"/>
           </a:p>
         </p:txBody>
       </p:sp>
@@ -19800,12 +21984,12 @@
         </p:nvSpPr>
         <p:spPr>
           <a:xfrm>
-            <a:off x="9052560" y="3749040"/>
-            <a:ext cx="2590495" cy="2514600"/>
+            <a:off x="8503920" y="3154680"/>
+            <a:ext cx="3139135" cy="3108960"/>
           </a:xfrm>
           <a:prstGeom prst="roundRect">
             <a:avLst>
-              <a:gd name="adj" fmla="val 2909"/>
+              <a:gd name="adj" fmla="val 2353"/>
             </a:avLst>
           </a:prstGeom>
           <a:solidFill>
@@ -19827,8 +22011,8 @@
         </p:nvSpPr>
         <p:spPr>
           <a:xfrm>
-            <a:off x="9281160" y="3886200"/>
-            <a:ext cx="2133295" cy="365760"/>
+            <a:off x="8732520" y="3246120"/>
+            <a:ext cx="2681935" cy="365760"/>
           </a:xfrm>
           <a:prstGeom prst="rect">
             <a:avLst/>
@@ -19852,7 +22036,7 @@
                 <a:ea typeface="Calibri" pitchFamily="34" charset="-122"/>
                 <a:cs typeface="Calibri" pitchFamily="34" charset="-120"/>
               </a:rPr>
-              <a:t>Frozen</a:t>
+              <a:t>Data flow (in → out)</a:t>
             </a:r>
             <a:endParaRPr lang="en-US" sz="1600" dirty="0"/>
           </a:p>
@@ -19860,14 +22044,14 @@
       </p:sp>
       <p:sp>
         <p:nvSpPr>
-          <p:cNvPr id="11" name="list_27"/>
+          <p:cNvPr id="11" name="text_27"/>
           <p:cNvSpPr txBox="1"/>
           <p:nvPr/>
         </p:nvSpPr>
         <p:spPr>
           <a:xfrm>
-            <a:off x="9281160" y="4297680"/>
-            <a:ext cx="2133295" cy="1828800"/>
+            <a:off x="8732520" y="3639312"/>
+            <a:ext cx="2681935" cy="2103120"/>
           </a:xfrm>
           <a:prstGeom prst="rect">
             <a:avLst/>
@@ -19879,15 +22063,25 @@
           <a:bodyPr wrap="square" lIns="0" tIns="0" rIns="0" bIns="0" rtlCol="0" anchor="t"/>
           <a:lstStyle/>
           <a:p>
-            <a:pPr marL="177800" indent="-177800">
-              <a:spcAft>
-                <a:spcPts val="600"/>
-              </a:spcAft>
-              <a:buSzPct val="100000"/>
-              <a:buChar char="•"/>
+            <a:pPr indent="0" marL="0">
+              <a:buNone/>
             </a:pPr>
             <a:r>
-              <a:rPr lang="en-US" sz="1400" dirty="0">
+              <a:rPr lang="en-US" sz="1150" b="1" dirty="0">
+                <a:solidFill>
+                  <a:srgbClr val="13294B"/>
+                </a:solidFill>
+                <a:latin typeface="Calibri" pitchFamily="34" charset="0"/>
+                <a:ea typeface="Calibri" pitchFamily="34" charset="-122"/>
+                <a:cs typeface="Calibri" pitchFamily="34" charset="-120"/>
+              </a:rPr>
+              <a:t>1 · Image → ViT: </a:t>
+            </a:r>
+            <a:pPr indent="0" marL="0">
+              <a:buNone/>
+            </a:pPr>
+            <a:r>
+              <a:rPr lang="en-US" sz="1150" dirty="0">
                 <a:solidFill>
                   <a:schemeClr val="tx1"/>
                 </a:solidFill>
@@ -19895,20 +22089,16 @@
                 <a:ea typeface="Calibri" pitchFamily="34" charset="-122"/>
                 <a:cs typeface="Calibri" pitchFamily="34" charset="-120"/>
               </a:rPr>
-              <a:t>ViT (32 blocks) + patch merger</a:t>
+              <a:t>≤ 401,408 px → 14×14 patches → 32 blocks</a:t>
             </a:r>
-            <a:endParaRPr lang="en-US" sz="1400" dirty="0"/>
-          </a:p>
-          <a:p>
-            <a:pPr marL="177800" indent="-177800">
-              <a:spcAft>
-                <a:spcPts val="600"/>
-              </a:spcAft>
-              <a:buSzPct val="100000"/>
-              <a:buChar char="•"/>
+            <a:endParaRPr lang="en-US" sz="1150" dirty="0"/>
+          </a:p>
+          <a:p>
+            <a:pPr indent="0" marL="0">
+              <a:buNone/>
             </a:pPr>
             <a:r>
-              <a:rPr lang="en-US" sz="1400" dirty="0">
+              <a:rPr lang="en-US" sz="300" dirty="0">
                 <a:solidFill>
                   <a:schemeClr val="tx1"/>
                 </a:solidFill>
@@ -19916,20 +22106,30 @@
                 <a:ea typeface="Calibri" pitchFamily="34" charset="-122"/>
                 <a:cs typeface="Calibri" pitchFamily="34" charset="-120"/>
               </a:rPr>
-              <a:t>LLM decoder, 36 layers, 4-bit NF4</a:t>
+              <a:t> </a:t>
             </a:r>
-            <a:endParaRPr lang="en-US" sz="1400" dirty="0"/>
-          </a:p>
-          <a:p>
-            <a:pPr marL="177800" indent="-177800">
-              <a:spcAft>
-                <a:spcPts val="600"/>
-              </a:spcAft>
-              <a:buSzPct val="100000"/>
-              <a:buChar char="•"/>
+            <a:endParaRPr lang="en-US" sz="1150" dirty="0"/>
+          </a:p>
+          <a:p>
+            <a:pPr indent="0" marL="0">
+              <a:buNone/>
             </a:pPr>
             <a:r>
-              <a:rPr lang="en-US" sz="1400" dirty="0">
+              <a:rPr lang="en-US" sz="1150" b="1" dirty="0">
+                <a:solidFill>
+                  <a:srgbClr val="13294B"/>
+                </a:solidFill>
+                <a:latin typeface="Calibri" pitchFamily="34" charset="0"/>
+                <a:ea typeface="Calibri" pitchFamily="34" charset="-122"/>
+                <a:cs typeface="Calibri" pitchFamily="34" charset="-120"/>
+              </a:rPr>
+              <a:t>2 · Patch merger: </a:t>
+            </a:r>
+            <a:pPr indent="0" marL="0">
+              <a:buNone/>
+            </a:pPr>
+            <a:r>
+              <a:rPr lang="en-US" sz="1150" dirty="0">
                 <a:solidFill>
                   <a:schemeClr val="tx1"/>
                 </a:solidFill>
@@ -19937,9 +22137,144 @@
                 <a:ea typeface="Calibri" pitchFamily="34" charset="-122"/>
                 <a:cs typeface="Calibri" pitchFamily="34" charset="-120"/>
               </a:rPr>
-              <a:t>256–512 visual tokens per image</a:t>
+              <a:t>2×2 patches → 1 token (2048-d) → 256–512 visual tokens</a:t>
             </a:r>
-            <a:endParaRPr lang="en-US" sz="1400" dirty="0"/>
+            <a:endParaRPr lang="en-US" sz="1150" dirty="0"/>
+          </a:p>
+          <a:p>
+            <a:pPr indent="0" marL="0">
+              <a:buNone/>
+            </a:pPr>
+            <a:r>
+              <a:rPr lang="en-US" sz="300" dirty="0">
+                <a:solidFill>
+                  <a:schemeClr val="tx1"/>
+                </a:solidFill>
+                <a:latin typeface="Calibri" pitchFamily="34" charset="0"/>
+                <a:ea typeface="Calibri" pitchFamily="34" charset="-122"/>
+                <a:cs typeface="Calibri" pitchFamily="34" charset="-120"/>
+              </a:rPr>
+              <a:t> </a:t>
+            </a:r>
+            <a:endParaRPr lang="en-US" sz="1150" dirty="0"/>
+          </a:p>
+          <a:p>
+            <a:pPr indent="0" marL="0">
+              <a:buNone/>
+            </a:pPr>
+            <a:r>
+              <a:rPr lang="en-US" sz="1150" b="1" dirty="0">
+                <a:solidFill>
+                  <a:srgbClr val="13294B"/>
+                </a:solidFill>
+                <a:latin typeface="Calibri" pitchFamily="34" charset="0"/>
+                <a:ea typeface="Calibri" pitchFamily="34" charset="-122"/>
+                <a:cs typeface="Calibri" pitchFamily="34" charset="-120"/>
+              </a:rPr>
+              <a:t>3 · Prompt P0: </a:t>
+            </a:r>
+            <a:pPr indent="0" marL="0">
+              <a:buNone/>
+            </a:pPr>
+            <a:r>
+              <a:rPr lang="en-US" sz="1150" dirty="0">
+                <a:solidFill>
+                  <a:schemeClr val="tx1"/>
+                </a:solidFill>
+                <a:latin typeface="Calibri" pitchFamily="34" charset="0"/>
+                <a:ea typeface="Calibri" pitchFamily="34" charset="-122"/>
+                <a:cs typeface="Calibri" pitchFamily="34" charset="-120"/>
+              </a:rPr>
+              <a:t>chat template + visual tokens + Vietnamese question</a:t>
+            </a:r>
+            <a:endParaRPr lang="en-US" sz="1150" dirty="0"/>
+          </a:p>
+          <a:p>
+            <a:pPr indent="0" marL="0">
+              <a:buNone/>
+            </a:pPr>
+            <a:r>
+              <a:rPr lang="en-US" sz="300" dirty="0">
+                <a:solidFill>
+                  <a:schemeClr val="tx1"/>
+                </a:solidFill>
+                <a:latin typeface="Calibri" pitchFamily="34" charset="0"/>
+                <a:ea typeface="Calibri" pitchFamily="34" charset="-122"/>
+                <a:cs typeface="Calibri" pitchFamily="34" charset="-120"/>
+              </a:rPr>
+              <a:t> </a:t>
+            </a:r>
+            <a:endParaRPr lang="en-US" sz="1150" dirty="0"/>
+          </a:p>
+          <a:p>
+            <a:pPr indent="0" marL="0">
+              <a:buNone/>
+            </a:pPr>
+            <a:r>
+              <a:rPr lang="en-US" sz="1150" b="1" dirty="0">
+                <a:solidFill>
+                  <a:srgbClr val="13294B"/>
+                </a:solidFill>
+                <a:latin typeface="Calibri" pitchFamily="34" charset="0"/>
+                <a:ea typeface="Calibri" pitchFamily="34" charset="-122"/>
+                <a:cs typeface="Calibri" pitchFamily="34" charset="-120"/>
+              </a:rPr>
+              <a:t>4 · Decoder (+LoRA): </a:t>
+            </a:r>
+            <a:pPr indent="0" marL="0">
+              <a:buNone/>
+            </a:pPr>
+            <a:r>
+              <a:rPr lang="en-US" sz="1150" dirty="0">
+                <a:solidFill>
+                  <a:schemeClr val="tx1"/>
+                </a:solidFill>
+                <a:latin typeface="Calibri" pitchFamily="34" charset="0"/>
+                <a:ea typeface="Calibri" pitchFamily="34" charset="-122"/>
+                <a:cs typeface="Calibri" pitchFamily="34" charset="-120"/>
+              </a:rPr>
+              <a:t>greedy, ≤ 32 new tokens → normalize → EM / ANLS</a:t>
+            </a:r>
+            <a:endParaRPr lang="en-US" sz="1150" dirty="0"/>
+          </a:p>
+        </p:txBody>
+      </p:sp>
+      <p:sp>
+        <p:nvSpPr>
+          <p:cNvPr id="12" name="text_28"/>
+          <p:cNvSpPr txBox="1"/>
+          <p:nvPr/>
+        </p:nvSpPr>
+        <p:spPr>
+          <a:xfrm>
+            <a:off x="8732520" y="5760720"/>
+            <a:ext cx="2681935" cy="411480"/>
+          </a:xfrm>
+          <a:prstGeom prst="rect">
+            <a:avLst/>
+          </a:prstGeom>
+          <a:noFill/>
+          <a:ln/>
+        </p:spPr>
+        <p:txBody>
+          <a:bodyPr wrap="square" lIns="0" tIns="0" rIns="0" bIns="0" rtlCol="0" anchor="t"/>
+          <a:lstStyle/>
+          <a:p>
+            <a:pPr indent="0" marL="0">
+              <a:buNone/>
+            </a:pPr>
+            <a:r>
+              <a:rPr lang="en-US" sz="1100" i="1" dirty="0">
+                <a:solidFill>
+                  <a:srgbClr val="1C7293"/>
+                </a:solidFill>
+                <a:latin typeface="Calibri" pitchFamily="34" charset="0"/>
+                <a:ea typeface="Calibri" pitchFamily="34" charset="-122"/>
+                <a:cs typeface="Calibri" pitchFamily="34" charset="-120"/>
+              </a:rPr>
+              <a:t>No OCR in the baseline — OCR is the B3 improvement (Part 06).</a:t>
+            </a:r>
+            <a:endParaRPr lang="en-US" sz="1100" dirty="0"/>
           </a:p>
         </p:txBody>
       </p:sp>
@@ -20100,7 +22435,7 @@
       </p:sp>
       <p:pic>
         <p:nvPicPr>
-          <p:cNvPr id="5" name="figure_28" descr="b7">    </p:cNvPr>
+          <p:cNvPr id="5" name="figure_29" descr="b7">    </p:cNvPr>
           <p:cNvPicPr>
             <a:picLocks noChangeAspect="1"/>
           </p:cNvPicPr>
@@ -20124,18 +22459,18 @@
       </p:pic>
       <p:sp>
         <p:nvSpPr>
-          <p:cNvPr id="6" name="card_29"/>
+          <p:cNvPr id="6" name="card_30"/>
           <p:cNvSpPr/>
           <p:nvPr/>
         </p:nvSpPr>
         <p:spPr>
           <a:xfrm>
-            <a:off x="548640" y="3807855"/>
-            <a:ext cx="3454298" cy="2455785"/>
+            <a:off x="548640" y="3762135"/>
+            <a:ext cx="3454298" cy="1998585"/>
           </a:xfrm>
           <a:prstGeom prst="roundRect">
             <a:avLst>
-              <a:gd name="adj" fmla="val 2979"/>
+              <a:gd name="adj" fmla="val 3660"/>
             </a:avLst>
           </a:prstGeom>
           <a:solidFill>
@@ -20151,13 +22486,13 @@
       </p:sp>
       <p:sp>
         <p:nvSpPr>
-          <p:cNvPr id="7" name="text_30"/>
+          <p:cNvPr id="7" name="text_31"/>
           <p:cNvSpPr txBox="1"/>
           <p:nvPr/>
         </p:nvSpPr>
         <p:spPr>
           <a:xfrm>
-            <a:off x="777240" y="3945015"/>
+            <a:off x="777240" y="3899295"/>
             <a:ext cx="2997098" cy="365760"/>
           </a:xfrm>
           <a:prstGeom prst="rect">
@@ -20190,14 +22525,14 @@
       </p:sp>
       <p:sp>
         <p:nvSpPr>
-          <p:cNvPr id="8" name="list_31"/>
+          <p:cNvPr id="8" name="list_32"/>
           <p:cNvSpPr txBox="1"/>
           <p:nvPr/>
         </p:nvSpPr>
         <p:spPr>
           <a:xfrm>
-            <a:off x="777240" y="4356495"/>
-            <a:ext cx="2997098" cy="1815705"/>
+            <a:off x="777240" y="4310775"/>
+            <a:ext cx="2997098" cy="1358505"/>
           </a:xfrm>
           <a:prstGeom prst="rect">
             <a:avLst/>
@@ -20296,18 +22631,18 @@
       </p:sp>
       <p:sp>
         <p:nvSpPr>
-          <p:cNvPr id="9" name="card_32"/>
+          <p:cNvPr id="9" name="card_33"/>
           <p:cNvSpPr/>
           <p:nvPr/>
         </p:nvSpPr>
         <p:spPr>
           <a:xfrm>
-            <a:off x="4368698" y="3807855"/>
-            <a:ext cx="3454298" cy="2455785"/>
+            <a:off x="4368698" y="3762135"/>
+            <a:ext cx="3454298" cy="1998585"/>
           </a:xfrm>
           <a:prstGeom prst="roundRect">
             <a:avLst>
-              <a:gd name="adj" fmla="val 2979"/>
+              <a:gd name="adj" fmla="val 3660"/>
             </a:avLst>
           </a:prstGeom>
           <a:solidFill>
@@ -20323,13 +22658,13 @@
       </p:sp>
       <p:sp>
         <p:nvSpPr>
-          <p:cNvPr id="10" name="text_33"/>
+          <p:cNvPr id="10" name="text_34"/>
           <p:cNvSpPr txBox="1"/>
           <p:nvPr/>
         </p:nvSpPr>
         <p:spPr>
           <a:xfrm>
-            <a:off x="4597298" y="3945015"/>
+            <a:off x="4597298" y="3899295"/>
             <a:ext cx="2997098" cy="365760"/>
           </a:xfrm>
           <a:prstGeom prst="rect">
@@ -20362,14 +22697,14 @@
       </p:sp>
       <p:sp>
         <p:nvSpPr>
-          <p:cNvPr id="11" name="list_34"/>
+          <p:cNvPr id="11" name="list_35"/>
           <p:cNvSpPr txBox="1"/>
           <p:nvPr/>
         </p:nvSpPr>
         <p:spPr>
           <a:xfrm>
-            <a:off x="4597298" y="4356495"/>
-            <a:ext cx="2997098" cy="1815705"/>
+            <a:off x="4597298" y="4310775"/>
+            <a:ext cx="2997098" cy="1358505"/>
           </a:xfrm>
           <a:prstGeom prst="rect">
             <a:avLst/>
@@ -20447,18 +22782,18 @@
       </p:sp>
       <p:sp>
         <p:nvSpPr>
-          <p:cNvPr id="12" name="card_35"/>
+          <p:cNvPr id="12" name="card_36"/>
           <p:cNvSpPr/>
           <p:nvPr/>
         </p:nvSpPr>
         <p:spPr>
           <a:xfrm>
-            <a:off x="8188757" y="3807855"/>
-            <a:ext cx="3454298" cy="2455785"/>
+            <a:off x="8188757" y="3762135"/>
+            <a:ext cx="3454298" cy="1998585"/>
           </a:xfrm>
           <a:prstGeom prst="roundRect">
             <a:avLst>
-              <a:gd name="adj" fmla="val 2979"/>
+              <a:gd name="adj" fmla="val 3660"/>
             </a:avLst>
           </a:prstGeom>
           <a:solidFill>
@@ -20474,13 +22809,13 @@
       </p:sp>
       <p:sp>
         <p:nvSpPr>
-          <p:cNvPr id="13" name="text_36"/>
+          <p:cNvPr id="13" name="text_37"/>
           <p:cNvSpPr txBox="1"/>
           <p:nvPr/>
         </p:nvSpPr>
         <p:spPr>
           <a:xfrm>
-            <a:off x="8417357" y="3945015"/>
+            <a:off x="8417357" y="3899295"/>
             <a:ext cx="2997098" cy="365760"/>
           </a:xfrm>
           <a:prstGeom prst="rect">
@@ -20513,14 +22848,14 @@
       </p:sp>
       <p:sp>
         <p:nvSpPr>
-          <p:cNvPr id="14" name="list_37"/>
+          <p:cNvPr id="14" name="list_38"/>
           <p:cNvSpPr txBox="1"/>
           <p:nvPr/>
         </p:nvSpPr>
         <p:spPr>
           <a:xfrm>
-            <a:off x="8417357" y="4356495"/>
-            <a:ext cx="2997098" cy="1815705"/>
+            <a:off x="8417357" y="4310775"/>
+            <a:ext cx="2997098" cy="1358505"/>
           </a:xfrm>
           <a:prstGeom prst="rect">
             <a:avLst/>
@@ -20593,6 +22928,45 @@
               <a:t>Decision rules fixed before each run</a:t>
             </a:r>
             <a:endParaRPr lang="en-US" sz="1400" dirty="0"/>
+          </a:p>
+        </p:txBody>
+      </p:sp>
+      <p:sp>
+        <p:nvSpPr>
+          <p:cNvPr id="15" name="text_39"/>
+          <p:cNvSpPr txBox="1"/>
+          <p:nvPr/>
+        </p:nvSpPr>
+        <p:spPr>
+          <a:xfrm>
+            <a:off x="548640" y="5833872"/>
+            <a:ext cx="11094415" cy="548640"/>
+          </a:xfrm>
+          <a:prstGeom prst="rect">
+            <a:avLst/>
+          </a:prstGeom>
+          <a:noFill/>
+          <a:ln/>
+        </p:spPr>
+        <p:txBody>
+          <a:bodyPr wrap="square" lIns="0" tIns="0" rIns="0" bIns="0" rtlCol="0" anchor="b"/>
+          <a:lstStyle/>
+          <a:p>
+            <a:pPr indent="0" marL="0">
+              <a:buNone/>
+            </a:pPr>
+            <a:r>
+              <a:rPr lang="en-US" sz="1000" dirty="0">
+                <a:solidFill>
+                  <a:schemeClr val="accent3"/>
+                </a:solidFill>
+                <a:latin typeface="Calibri" pitchFamily="34" charset="0"/>
+                <a:ea typeface="Calibri" pitchFamily="34" charset="-122"/>
+                <a:cs typeface="Calibri" pitchFamily="34" charset="-120"/>
+              </a:rPr>
+              <a:t>EM = Exact Match · VQA-Acc = VQA Accuracy (min(#matching gold / 3, 1); = EM with one gold answer) · ANLS = Average Normalized Levenshtein Similarity (threshold 0.5) · F1 = token-level F1 · bf16 = bfloat16 · NF4 = 4-bit NormalFloat (QLoRA) · CI95 = 95% confidence interval · McNemar = paired test on questions where exactly one run is correct</a:t>
+            </a:r>
+            <a:endParaRPr lang="en-US" sz="1000" dirty="0"/>
           </a:p>
         </p:txBody>
       </p:sp>
@@ -20753,7 +23127,7 @@
       </p:sp>
       <p:graphicFrame>
         <p:nvGraphicFramePr>
-          <p:cNvPr id="5" name="chart_38" descr=""/>
+          <p:cNvPr id="5" name="chart_40" descr=""/>
           <p:cNvGraphicFramePr/>
           <p:nvPr/>
         </p:nvGraphicFramePr>
@@ -20769,7 +23143,7 @@
       </p:graphicFrame>
       <p:sp>
         <p:nvSpPr>
-          <p:cNvPr id="6" name="card_39"/>
+          <p:cNvPr id="6" name="card_41"/>
           <p:cNvSpPr/>
           <p:nvPr/>
         </p:nvSpPr>
@@ -20796,7 +23170,7 @@
       </p:sp>
       <p:sp>
         <p:nvSpPr>
-          <p:cNvPr id="7" name="text_40"/>
+          <p:cNvPr id="7" name="text_42"/>
           <p:cNvSpPr txBox="1"/>
           <p:nvPr/>
         </p:nvSpPr>
@@ -20835,7 +23209,7 @@
       </p:sp>
       <p:sp>
         <p:nvSpPr>
-          <p:cNvPr id="8" name="text_41"/>
+          <p:cNvPr id="8" name="text_43"/>
           <p:cNvSpPr txBox="1"/>
           <p:nvPr/>
         </p:nvSpPr>
@@ -20874,7 +23248,7 @@
       </p:sp>
       <p:sp>
         <p:nvSpPr>
-          <p:cNvPr id="9" name="card_42"/>
+          <p:cNvPr id="9" name="card_44"/>
           <p:cNvSpPr/>
           <p:nvPr/>
         </p:nvSpPr>
@@ -20901,7 +23275,7 @@
       </p:sp>
       <p:sp>
         <p:nvSpPr>
-          <p:cNvPr id="10" name="text_43"/>
+          <p:cNvPr id="10" name="text_45"/>
           <p:cNvSpPr txBox="1"/>
           <p:nvPr/>
         </p:nvSpPr>
@@ -20940,7 +23314,7 @@
       </p:sp>
       <p:sp>
         <p:nvSpPr>
-          <p:cNvPr id="11" name="list_44"/>
+          <p:cNvPr id="11" name="list_46"/>
           <p:cNvSpPr txBox="1"/>
           <p:nvPr/>
         </p:nvSpPr>
@@ -21180,7 +23554,7 @@
       </p:sp>
       <p:graphicFrame>
         <p:nvGraphicFramePr>
-          <p:cNvPr id="9" name="table_45"/>
+          <p:cNvPr id="9" name="table_47"/>
           <p:cNvGraphicFramePr>
             <a:graphicFrameLocks noGrp="1"/>
           </p:cNvGraphicFramePr>
@@ -22272,7 +24646,7 @@
       </p:graphicFrame>
       <p:sp>
         <p:nvSpPr>
-          <p:cNvPr id="6" name="card_46"/>
+          <p:cNvPr id="6" name="card_48"/>
           <p:cNvSpPr/>
           <p:nvPr/>
         </p:nvSpPr>
@@ -22299,7 +24673,7 @@
       </p:sp>
       <p:sp>
         <p:nvSpPr>
-          <p:cNvPr id="7" name="text_47"/>
+          <p:cNvPr id="7" name="text_49"/>
           <p:cNvSpPr txBox="1"/>
           <p:nvPr/>
         </p:nvSpPr>
@@ -22338,7 +24712,7 @@
       </p:sp>
       <p:graphicFrame>
         <p:nvGraphicFramePr>
-          <p:cNvPr id="8" name="chart_48" descr=""/>
+          <p:cNvPr id="8" name="chart_50" descr=""/>
           <p:cNvGraphicFramePr/>
           <p:nvPr/>
         </p:nvGraphicFramePr>
@@ -22354,7 +24728,7 @@
       </p:graphicFrame>
       <p:sp>
         <p:nvSpPr>
-          <p:cNvPr id="9" name="card_49"/>
+          <p:cNvPr id="9" name="card_51"/>
           <p:cNvSpPr/>
           <p:nvPr/>
         </p:nvSpPr>
@@ -22381,7 +24755,7 @@
       </p:sp>
       <p:sp>
         <p:nvSpPr>
-          <p:cNvPr id="10" name="text_50"/>
+          <p:cNvPr id="10" name="text_52"/>
           <p:cNvSpPr txBox="1"/>
           <p:nvPr/>
         </p:nvSpPr>
@@ -22420,7 +24794,7 @@
       </p:sp>
       <p:sp>
         <p:nvSpPr>
-          <p:cNvPr id="11" name="list_51"/>
+          <p:cNvPr id="11" name="list_53"/>
           <p:cNvSpPr txBox="1"/>
           <p:nvPr/>
         </p:nvSpPr>
@@ -22681,7 +25055,7 @@
       </p:sp>
       <p:graphicFrame>
         <p:nvGraphicFramePr>
-          <p:cNvPr id="10" name="table_52"/>
+          <p:cNvPr id="10" name="table_54"/>
           <p:cNvGraphicFramePr>
             <a:graphicFrameLocks noGrp="1"/>
           </p:cNvGraphicFramePr>
@@ -23137,7 +25511,7 @@
                           <a:ea typeface="Calibri" pitchFamily="34" charset="-122"/>
                           <a:cs typeface="Calibri" pitchFamily="34" charset="-120"/>
                         </a:rPr>
-                        <a:t>B1 · Qwen2.5-VL-3B · 4-bit · 512 tok.</a:t>
+                        <a:t>B1 · Qwen2.5-VL-3B [1] · 4-bit · 512 tok.</a:t>
                       </a:r>
                       <a:endParaRPr lang="en-US" sz="1400" dirty="0">
                         <a:latin typeface="Calibri" charset="0"/>
@@ -23529,7 +25903,7 @@
                           <a:ea typeface="Calibri" pitchFamily="34" charset="-122"/>
                           <a:cs typeface="Calibri" pitchFamily="34" charset="-120"/>
                         </a:rPr>
-                        <a:t>R1b · Qwen2-VL-7B · 4-bit · 512 tok.</a:t>
+                        <a:t>R1b · Qwen2-VL-7B [2] · 4-bit · 512 tok.</a:t>
                       </a:r>
                       <a:endParaRPr lang="en-US" sz="1400" dirty="0">
                         <a:latin typeface="Calibri" charset="0"/>
@@ -23921,7 +26295,7 @@
                           <a:ea typeface="Calibri" pitchFamily="34" charset="-122"/>
                           <a:cs typeface="Calibri" pitchFamily="34" charset="-120"/>
                         </a:rPr>
-                        <a:t>R1 · Qwen2-VL-7B · bf16 · full res.</a:t>
+                        <a:t>R1 · Qwen2-VL-7B [2] · bf16 · full res.</a:t>
                       </a:r>
                       <a:endParaRPr lang="en-US" sz="1400" dirty="0">
                         <a:latin typeface="Calibri" charset="0"/>
@@ -24313,7 +26687,7 @@
                           <a:ea typeface="Calibri" pitchFamily="34" charset="-122"/>
                           <a:cs typeface="Calibri" pitchFamily="34" charset="-120"/>
                         </a:rPr>
-                        <a:t>Paper Table 7 · “QwenVL-7b” (100 q.)</a:t>
+                        <a:t>ViTextVQA paper [3] Table 7 · “QwenVL-7b” (100 q.)</a:t>
                       </a:r>
                       <a:endParaRPr lang="en-US" sz="1400" dirty="0">
                         <a:latin typeface="Calibri" charset="0"/>
@@ -24693,18 +27067,18 @@
       </p:graphicFrame>
       <p:sp>
         <p:nvSpPr>
-          <p:cNvPr id="6" name="card_53"/>
+          <p:cNvPr id="6" name="card_55"/>
           <p:cNvSpPr/>
           <p:nvPr/>
         </p:nvSpPr>
         <p:spPr>
           <a:xfrm>
-            <a:off x="548640" y="4114800"/>
-            <a:ext cx="3454298" cy="1783080"/>
+            <a:off x="548640" y="4023360"/>
+            <a:ext cx="3454298" cy="1691640"/>
           </a:xfrm>
           <a:prstGeom prst="roundRect">
             <a:avLst>
-              <a:gd name="adj" fmla="val 4103"/>
+              <a:gd name="adj" fmla="val 4324"/>
             </a:avLst>
           </a:prstGeom>
           <a:solidFill>
@@ -24720,13 +27094,13 @@
       </p:sp>
       <p:sp>
         <p:nvSpPr>
-          <p:cNvPr id="7" name="text_54"/>
+          <p:cNvPr id="7" name="text_56"/>
           <p:cNvSpPr txBox="1"/>
           <p:nvPr/>
         </p:nvSpPr>
         <p:spPr>
           <a:xfrm>
-            <a:off x="777240" y="4251960"/>
+            <a:off x="777240" y="4160520"/>
             <a:ext cx="2997098" cy="411480"/>
           </a:xfrm>
           <a:prstGeom prst="rect">
@@ -24759,14 +27133,14 @@
       </p:sp>
       <p:sp>
         <p:nvSpPr>
-          <p:cNvPr id="8" name="text_55"/>
+          <p:cNvPr id="8" name="text_57"/>
           <p:cNvSpPr txBox="1"/>
           <p:nvPr/>
         </p:nvSpPr>
         <p:spPr>
           <a:xfrm>
-            <a:off x="777240" y="4709160"/>
-            <a:ext cx="2997098" cy="1051560"/>
+            <a:off x="777240" y="4617720"/>
+            <a:ext cx="2997098" cy="960120"/>
           </a:xfrm>
           <a:prstGeom prst="rect">
             <a:avLst/>
@@ -24798,18 +27172,18 @@
       </p:sp>
       <p:sp>
         <p:nvSpPr>
-          <p:cNvPr id="9" name="card_56"/>
+          <p:cNvPr id="9" name="card_58"/>
           <p:cNvSpPr/>
           <p:nvPr/>
         </p:nvSpPr>
         <p:spPr>
           <a:xfrm>
-            <a:off x="4368698" y="4114800"/>
-            <a:ext cx="3454298" cy="1783080"/>
+            <a:off x="4368698" y="4023360"/>
+            <a:ext cx="3454298" cy="1691640"/>
           </a:xfrm>
           <a:prstGeom prst="roundRect">
             <a:avLst>
-              <a:gd name="adj" fmla="val 4103"/>
+              <a:gd name="adj" fmla="val 4324"/>
             </a:avLst>
           </a:prstGeom>
           <a:solidFill>
@@ -24825,13 +27199,13 @@
       </p:sp>
       <p:sp>
         <p:nvSpPr>
-          <p:cNvPr id="10" name="text_57"/>
+          <p:cNvPr id="10" name="text_59"/>
           <p:cNvSpPr txBox="1"/>
           <p:nvPr/>
         </p:nvSpPr>
         <p:spPr>
           <a:xfrm>
-            <a:off x="4597298" y="4251960"/>
+            <a:off x="4597298" y="4160520"/>
             <a:ext cx="2997098" cy="411480"/>
           </a:xfrm>
           <a:prstGeom prst="rect">
@@ -24864,14 +27238,14 @@
       </p:sp>
       <p:sp>
         <p:nvSpPr>
-          <p:cNvPr id="11" name="text_58"/>
+          <p:cNvPr id="11" name="text_60"/>
           <p:cNvSpPr txBox="1"/>
           <p:nvPr/>
         </p:nvSpPr>
         <p:spPr>
           <a:xfrm>
-            <a:off x="4597298" y="4709160"/>
-            <a:ext cx="2997098" cy="1051560"/>
+            <a:off x="4597298" y="4617720"/>
+            <a:ext cx="2997098" cy="960120"/>
           </a:xfrm>
           <a:prstGeom prst="rect">
             <a:avLst/>
@@ -24903,18 +27277,18 @@
       </p:sp>
       <p:sp>
         <p:nvSpPr>
-          <p:cNvPr id="12" name="card_59"/>
+          <p:cNvPr id="12" name="card_61"/>
           <p:cNvSpPr/>
           <p:nvPr/>
         </p:nvSpPr>
         <p:spPr>
           <a:xfrm>
-            <a:off x="8188757" y="4114800"/>
-            <a:ext cx="3454298" cy="1783080"/>
+            <a:off x="8188757" y="4023360"/>
+            <a:ext cx="3454298" cy="1691640"/>
           </a:xfrm>
           <a:prstGeom prst="roundRect">
             <a:avLst>
-              <a:gd name="adj" fmla="val 4103"/>
+              <a:gd name="adj" fmla="val 4324"/>
             </a:avLst>
           </a:prstGeom>
           <a:solidFill>
@@ -24930,13 +27304,13 @@
       </p:sp>
       <p:sp>
         <p:nvSpPr>
-          <p:cNvPr id="13" name="text_60"/>
+          <p:cNvPr id="13" name="text_62"/>
           <p:cNvSpPr txBox="1"/>
           <p:nvPr/>
         </p:nvSpPr>
         <p:spPr>
           <a:xfrm>
-            <a:off x="8417357" y="4251960"/>
+            <a:off x="8417357" y="4160520"/>
             <a:ext cx="2997098" cy="411480"/>
           </a:xfrm>
           <a:prstGeom prst="rect">
@@ -24969,14 +27343,14 @@
       </p:sp>
       <p:sp>
         <p:nvSpPr>
-          <p:cNvPr id="14" name="text_61"/>
+          <p:cNvPr id="14" name="text_63"/>
           <p:cNvSpPr txBox="1"/>
           <p:nvPr/>
         </p:nvSpPr>
         <p:spPr>
           <a:xfrm>
-            <a:off x="8417357" y="4709160"/>
-            <a:ext cx="2997098" cy="1051560"/>
+            <a:off x="8417357" y="4617720"/>
+            <a:ext cx="2997098" cy="960120"/>
           </a:xfrm>
           <a:prstGeom prst="rect">
             <a:avLst/>
@@ -25003,6 +27377,45 @@
               <a:t>n = 100 → ±9 EM; B1 is already consistent with it. Decision: keep Qwen2.5-VL-3B</a:t>
             </a:r>
             <a:endParaRPr lang="en-US" sz="1400" dirty="0"/>
+          </a:p>
+        </p:txBody>
+      </p:sp>
+      <p:sp>
+        <p:nvSpPr>
+          <p:cNvPr id="15" name="text_64"/>
+          <p:cNvSpPr txBox="1"/>
+          <p:nvPr/>
+        </p:nvSpPr>
+        <p:spPr>
+          <a:xfrm>
+            <a:off x="548640" y="5806440"/>
+            <a:ext cx="11094415" cy="566928"/>
+          </a:xfrm>
+          <a:prstGeom prst="rect">
+            <a:avLst/>
+          </a:prstGeom>
+          <a:noFill/>
+          <a:ln/>
+        </p:spPr>
+        <p:txBody>
+          <a:bodyPr wrap="square" lIns="0" tIns="0" rIns="0" bIns="0" rtlCol="0" anchor="b"/>
+          <a:lstStyle/>
+          <a:p>
+            <a:pPr indent="0" marL="0">
+              <a:buNone/>
+            </a:pPr>
+            <a:r>
+              <a:rPr lang="en-US" sz="1000" dirty="0">
+                <a:solidFill>
+                  <a:schemeClr val="accent3"/>
+                </a:solidFill>
+                <a:latin typeface="Calibri" pitchFamily="34" charset="0"/>
+                <a:ea typeface="Calibri" pitchFamily="34" charset="-122"/>
+                <a:cs typeface="Calibri" pitchFamily="34" charset="-120"/>
+              </a:rPr>
+              <a:t>[1] Bai et al., Qwen2.5-VL Technical Report, arXiv:2502.13923, 2025 · [2] Wang et al., Qwen2-VL, arXiv:2409.12191, 2024 · [3] Nguyen et al., ViTextVQA, arXiv:2404.10652, 2024 (ext. in Expert Systems with Applications, 2025). Our runs: experiments/W07_B1_zeroshot_…_test2000, W07_R1_…, W07_R1b_… (same 2,000 questions, seed 42).</a:t>
+            </a:r>
+            <a:endParaRPr lang="en-US" sz="1000" dirty="0"/>
           </a:p>
         </p:txBody>
       </p:sp>
